--- a/output/wordlabs-vit-3day.pptx
+++ b/output/wordlabs-vit-3day.pptx
@@ -6071,7 +6071,7 @@
                 <a:ea typeface="Calibri" pitchFamily="34" charset="-122"/>
                 <a:cs typeface="Calibri" pitchFamily="34" charset="-120"/>
               </a:rPr>
-              <a:t> that we get enough </a:t>
+              <a:t> to take your </a:t>
             </a:r>
             <a:pPr algn="l" indent="0" marL="0">
               <a:buNone/>
@@ -6102,7 +6102,7 @@
                 <a:ea typeface="Calibri" pitchFamily="34" charset="-122"/>
                 <a:cs typeface="Calibri" pitchFamily="34" charset="-120"/>
               </a:rPr>
-              <a:t> from the food we eat every day.</a:t>
+              <a:t> every morning so your body stays strong and healthy.</a:t>
             </a:r>
             <a:endParaRPr lang="en-US" sz="1800" dirty="0"/>
           </a:p>
@@ -10445,7 +10445,7 @@
         </p:nvSpPr>
         <p:spPr>
           <a:xfrm>
-            <a:off x="2427732" y="4169664"/>
+            <a:off x="2670048" y="4169664"/>
             <a:ext cx="685800" cy="475488"/>
           </a:xfrm>
           <a:prstGeom prst="rect">
@@ -10472,7 +10472,7 @@
         </p:nvSpPr>
         <p:spPr>
           <a:xfrm>
-            <a:off x="2427732" y="4169664"/>
+            <a:off x="2670048" y="4169664"/>
             <a:ext cx="685800" cy="475488"/>
           </a:xfrm>
           <a:prstGeom prst="rect">
@@ -10511,7 +10511,7 @@
         </p:nvSpPr>
         <p:spPr>
           <a:xfrm>
-            <a:off x="3639312" y="4169664"/>
+            <a:off x="4123944" y="4169664"/>
             <a:ext cx="685800" cy="475488"/>
           </a:xfrm>
           <a:prstGeom prst="rect">
@@ -10538,7 +10538,7 @@
         </p:nvSpPr>
         <p:spPr>
           <a:xfrm>
-            <a:off x="3639312" y="4169664"/>
+            <a:off x="4123944" y="4169664"/>
             <a:ext cx="685800" cy="475488"/>
           </a:xfrm>
           <a:prstGeom prst="rect">
@@ -10577,7 +10577,7 @@
         </p:nvSpPr>
         <p:spPr>
           <a:xfrm>
-            <a:off x="4850892" y="4169664"/>
+            <a:off x="5577840" y="4169664"/>
             <a:ext cx="685800" cy="475488"/>
           </a:xfrm>
           <a:prstGeom prst="rect">
@@ -10604,7 +10604,7 @@
         </p:nvSpPr>
         <p:spPr>
           <a:xfrm>
-            <a:off x="4850892" y="4169664"/>
+            <a:off x="5577840" y="4169664"/>
             <a:ext cx="685800" cy="475488"/>
           </a:xfrm>
           <a:prstGeom prst="rect">
@@ -10643,7 +10643,7 @@
         </p:nvSpPr>
         <p:spPr>
           <a:xfrm>
-            <a:off x="6062472" y="4169664"/>
+            <a:off x="7031736" y="4169664"/>
             <a:ext cx="685800" cy="475488"/>
           </a:xfrm>
           <a:prstGeom prst="rect">
@@ -10670,7 +10670,7 @@
         </p:nvSpPr>
         <p:spPr>
           <a:xfrm>
-            <a:off x="6062472" y="4169664"/>
+            <a:off x="7031736" y="4169664"/>
             <a:ext cx="685800" cy="475488"/>
           </a:xfrm>
           <a:prstGeom prst="rect">
@@ -10695,73 +10695,7 @@
                 <a:ea typeface="Trebuchet MS" pitchFamily="34" charset="-122"/>
                 <a:cs typeface="Trebuchet MS" pitchFamily="34" charset="-120"/>
               </a:rPr>
-              <a:t>a</a:t>
-            </a:r>
-            <a:endParaRPr lang="en-US" sz="900" dirty="0"/>
-          </a:p>
-        </p:txBody>
-      </p:sp>
-      <p:sp>
-        <p:nvSpPr>
-          <p:cNvPr id="41" name="Shape 39"/>
-          <p:cNvSpPr/>
-          <p:nvPr/>
-        </p:nvSpPr>
-        <p:spPr>
-          <a:xfrm>
-            <a:off x="7274052" y="4169664"/>
-            <a:ext cx="685800" cy="475488"/>
-          </a:xfrm>
-          <a:prstGeom prst="rect">
-            <a:avLst>
-              <a:gd name="adj" fmla="val 7692"/>
-            </a:avLst>
-          </a:prstGeom>
-          <a:solidFill>
-            <a:srgbClr val="FFFFFF"/>
-          </a:solidFill>
-          <a:ln w="12700">
-            <a:solidFill>
-              <a:srgbClr val="DB2777"/>
-            </a:solidFill>
-            <a:prstDash val="solid"/>
-          </a:ln>
-        </p:spPr>
-      </p:sp>
-      <p:sp>
-        <p:nvSpPr>
-          <p:cNvPr id="42" name="Text 40"/>
-          <p:cNvSpPr/>
-          <p:nvPr/>
-        </p:nvSpPr>
-        <p:spPr>
-          <a:xfrm>
-            <a:off x="7274052" y="4169664"/>
-            <a:ext cx="685800" cy="475488"/>
-          </a:xfrm>
-          <a:prstGeom prst="rect">
-            <a:avLst/>
-          </a:prstGeom>
-          <a:noFill/>
-          <a:ln/>
-        </p:spPr>
-        <p:txBody>
-          <a:bodyPr wrap="square" lIns="0" tIns="0" rIns="0" bIns="0" rtlCol="0" anchor="ctr"/>
-          <a:lstStyle/>
-          <a:p>
-            <a:pPr algn="ctr" indent="0" marL="0">
-              <a:buNone/>
-            </a:pPr>
-            <a:r>
-              <a:rPr lang="en-US" sz="900" b="1" dirty="0">
-                <a:solidFill>
-                  <a:srgbClr val="9D174D"/>
-                </a:solidFill>
-                <a:latin typeface="Trebuchet MS" pitchFamily="34" charset="0"/>
-                <a:ea typeface="Trebuchet MS" pitchFamily="34" charset="-122"/>
-                <a:cs typeface="Trebuchet MS" pitchFamily="34" charset="-120"/>
-              </a:rPr>
-              <a:t>l</a:t>
+              <a:t>al</a:t>
             </a:r>
             <a:endParaRPr lang="en-US" sz="900" dirty="0"/>
           </a:p>
@@ -12421,7 +12355,7 @@
                 <a:ea typeface="Calibri" pitchFamily="34" charset="-122"/>
                 <a:cs typeface="Calibri" pitchFamily="34" charset="-120"/>
               </a:rPr>
-              <a:t>plural</a:t>
+              <a:t>more than one</a:t>
             </a:r>
             <a:endParaRPr lang="en-US" sz="850" dirty="0"/>
           </a:p>
@@ -13518,7 +13452,7 @@
                 <a:ea typeface="Calibri" pitchFamily="34" charset="-122"/>
                 <a:cs typeface="Calibri" pitchFamily="34" charset="-120"/>
               </a:rPr>
-              <a:t>plural</a:t>
+              <a:t>more than one</a:t>
             </a:r>
             <a:endParaRPr lang="en-US" sz="850" dirty="0"/>
           </a:p>
@@ -15117,7 +15051,7 @@
                 <a:ea typeface="Calibri" pitchFamily="34" charset="-122"/>
                 <a:cs typeface="Calibri" pitchFamily="34" charset="-120"/>
               </a:rPr>
-              <a:t>plural</a:t>
+              <a:t>more than one</a:t>
             </a:r>
             <a:endParaRPr lang="en-US" sz="850" dirty="0"/>
           </a:p>
@@ -17433,7 +17367,7 @@
                 <a:ea typeface="Calibri" pitchFamily="34" charset="-122"/>
                 <a:cs typeface="Calibri" pitchFamily="34" charset="-120"/>
               </a:rPr>
-              <a:t>The coach said that </a:t>
+              <a:t>The coach worked hard to </a:t>
             </a:r>
             <a:pPr algn="l" indent="0" marL="0">
               <a:buNone/>
@@ -17450,7 +17384,7 @@
                 <a:ea typeface="Calibri" pitchFamily="34" charset="-122"/>
                 <a:cs typeface="Calibri" pitchFamily="34" charset="-120"/>
               </a:rPr>
-              <a:t>vitality</a:t>
+              <a:t>revitalise</a:t>
             </a:r>
             <a:pPr algn="l" indent="0" marL="0">
               <a:buNone/>
@@ -17464,7 +17398,7 @@
                 <a:ea typeface="Calibri" pitchFamily="34" charset="-122"/>
                 <a:cs typeface="Calibri" pitchFamily="34" charset="-120"/>
               </a:rPr>
-              <a:t> is </a:t>
+              <a:t> the team's energy, reminding them that </a:t>
             </a:r>
             <a:pPr algn="l" indent="0" marL="0">
               <a:buNone/>
@@ -17481,7 +17415,7 @@
                 <a:ea typeface="Calibri" pitchFamily="34" charset="-122"/>
                 <a:cs typeface="Calibri" pitchFamily="34" charset="-120"/>
               </a:rPr>
-              <a:t>vital</a:t>
+              <a:t>vitality</a:t>
             </a:r>
             <a:pPr algn="l" indent="0" marL="0">
               <a:buNone/>
@@ -17495,7 +17429,7 @@
                 <a:ea typeface="Calibri" pitchFamily="34" charset="-122"/>
                 <a:cs typeface="Calibri" pitchFamily="34" charset="-120"/>
               </a:rPr>
-              <a:t> when you compete, so she asked us to </a:t>
+              <a:t> and </a:t>
             </a:r>
             <a:pPr algn="l" indent="0" marL="0">
               <a:buNone/>
@@ -17512,7 +17446,7 @@
                 <a:ea typeface="Calibri" pitchFamily="34" charset="-122"/>
                 <a:cs typeface="Calibri" pitchFamily="34" charset="-120"/>
               </a:rPr>
-              <a:t>revitalise</a:t>
+              <a:t>survival</a:t>
             </a:r>
             <a:pPr algn="l" indent="0" marL="0">
               <a:buNone/>
@@ -17526,7 +17460,7 @@
                 <a:ea typeface="Calibri" pitchFamily="34" charset="-122"/>
                 <a:cs typeface="Calibri" pitchFamily="34" charset="-120"/>
               </a:rPr>
-              <a:t> ourselves with rest and good food.</a:t>
+              <a:t> depended on their effort.</a:t>
             </a:r>
             <a:endParaRPr lang="en-US" sz="1800" dirty="0"/>
           </a:p>
@@ -17681,7 +17615,7 @@
                 <a:ea typeface="Trebuchet MS" pitchFamily="34" charset="-122"/>
                 <a:cs typeface="Trebuchet MS" pitchFamily="34" charset="-120"/>
               </a:rPr>
-              <a:t>vitality</a:t>
+              <a:t>revitalise</a:t>
             </a:r>
             <a:endParaRPr lang="en-US" sz="1400" dirty="0"/>
           </a:p>
@@ -17809,7 +17743,7 @@
                 <a:ea typeface="Trebuchet MS" pitchFamily="34" charset="-122"/>
                 <a:cs typeface="Trebuchet MS" pitchFamily="34" charset="-120"/>
               </a:rPr>
-              <a:t>vital</a:t>
+              <a:t>vitality</a:t>
             </a:r>
             <a:endParaRPr lang="en-US" sz="1400" dirty="0"/>
           </a:p>
@@ -17937,7 +17871,7 @@
                 <a:ea typeface="Trebuchet MS" pitchFamily="34" charset="-122"/>
                 <a:cs typeface="Trebuchet MS" pitchFamily="34" charset="-120"/>
               </a:rPr>
-              <a:t>revitalise</a:t>
+              <a:t>survival</a:t>
             </a:r>
             <a:endParaRPr lang="en-US" sz="1400" dirty="0"/>
           </a:p>
@@ -18407,7 +18341,7 @@
                 <a:ea typeface="Trebuchet MS" pitchFamily="34" charset="-122"/>
                 <a:cs typeface="Trebuchet MS" pitchFamily="34" charset="-120"/>
               </a:rPr>
-              <a:t>vitality</a:t>
+              <a:t>revitalise</a:t>
             </a:r>
             <a:endParaRPr lang="en-US" sz="2800" dirty="0"/>
           </a:p>
@@ -19234,7 +19168,7 @@
                 <a:ea typeface="Trebuchet MS" pitchFamily="34" charset="-122"/>
                 <a:cs typeface="Trebuchet MS" pitchFamily="34" charset="-120"/>
               </a:rPr>
-              <a:t>vitality</a:t>
+              <a:t>revitalise</a:t>
             </a:r>
             <a:endParaRPr lang="en-US" sz="2800" dirty="0"/>
           </a:p>
@@ -19314,8 +19248,8 @@
         </p:nvSpPr>
         <p:spPr>
           <a:xfrm>
-            <a:off x="2221992" y="2258568"/>
-            <a:ext cx="1828800" cy="292608"/>
+            <a:off x="1989734" y="2258568"/>
+            <a:ext cx="1581912" cy="292608"/>
           </a:xfrm>
           <a:prstGeom prst="rect">
             <a:avLst>
@@ -19323,11 +19257,11 @@
             </a:avLst>
           </a:prstGeom>
           <a:solidFill>
-            <a:srgbClr val="CCFBF1"/>
+            <a:srgbClr val="DDD6FE"/>
           </a:solidFill>
           <a:ln w="19050">
             <a:solidFill>
-              <a:srgbClr val="0D9488"/>
+              <a:srgbClr val="7C3AED"/>
             </a:solidFill>
             <a:prstDash val="solid"/>
           </a:ln>
@@ -19348,8 +19282,8 @@
         </p:nvSpPr>
         <p:spPr>
           <a:xfrm>
-            <a:off x="2221992" y="2258568"/>
-            <a:ext cx="1828800" cy="292608"/>
+            <a:off x="1989734" y="2258568"/>
+            <a:ext cx="1581912" cy="292608"/>
           </a:xfrm>
           <a:prstGeom prst="rect">
             <a:avLst/>
@@ -19367,13 +19301,13 @@
             <a:r>
               <a:rPr lang="en-US" sz="1300" b="1" dirty="0">
                 <a:solidFill>
-                  <a:srgbClr val="0F766E"/>
+                  <a:srgbClr val="4C1D95"/>
                 </a:solidFill>
                 <a:latin typeface="Trebuchet MS" pitchFamily="34" charset="0"/>
                 <a:ea typeface="Trebuchet MS" pitchFamily="34" charset="-122"/>
                 <a:cs typeface="Trebuchet MS" pitchFamily="34" charset="-120"/>
               </a:rPr>
-              <a:t>vit</a:t>
+              <a:t>re</a:t>
             </a:r>
             <a:endParaRPr lang="en-US" sz="1300" dirty="0"/>
           </a:p>
@@ -19387,8 +19321,8 @@
         </p:nvSpPr>
         <p:spPr>
           <a:xfrm>
-            <a:off x="2221992" y="2569464"/>
-            <a:ext cx="1828800" cy="201168"/>
+            <a:off x="1989734" y="2569464"/>
+            <a:ext cx="1581912" cy="201168"/>
           </a:xfrm>
           <a:prstGeom prst="rect">
             <a:avLst/>
@@ -19412,7 +19346,7 @@
                 <a:ea typeface="Calibri" pitchFamily="34" charset="-122"/>
                 <a:cs typeface="Calibri" pitchFamily="34" charset="-120"/>
               </a:rPr>
-              <a:t>life</a:t>
+              <a:t>again</a:t>
             </a:r>
             <a:endParaRPr lang="en-US" sz="850" dirty="0"/>
           </a:p>
@@ -19426,8 +19360,8 @@
         </p:nvSpPr>
         <p:spPr>
           <a:xfrm>
-            <a:off x="4370832" y="2258568"/>
-            <a:ext cx="1828800" cy="292608"/>
+            <a:off x="3659429" y="2258568"/>
+            <a:ext cx="1581912" cy="292608"/>
           </a:xfrm>
           <a:prstGeom prst="rect">
             <a:avLst>
@@ -19435,11 +19369,11 @@
             </a:avLst>
           </a:prstGeom>
           <a:solidFill>
-            <a:srgbClr val="FCE7F3"/>
+            <a:srgbClr val="CCFBF1"/>
           </a:solidFill>
           <a:ln w="19050">
             <a:solidFill>
-              <a:srgbClr val="DB2777"/>
+              <a:srgbClr val="0D9488"/>
             </a:solidFill>
             <a:prstDash val="solid"/>
           </a:ln>
@@ -19460,8 +19394,8 @@
         </p:nvSpPr>
         <p:spPr>
           <a:xfrm>
-            <a:off x="4370832" y="2258568"/>
-            <a:ext cx="1828800" cy="292608"/>
+            <a:off x="3659429" y="2258568"/>
+            <a:ext cx="1581912" cy="292608"/>
           </a:xfrm>
           <a:prstGeom prst="rect">
             <a:avLst/>
@@ -19479,13 +19413,13 @@
             <a:r>
               <a:rPr lang="en-US" sz="1300" b="1" dirty="0">
                 <a:solidFill>
-                  <a:srgbClr val="9D174D"/>
+                  <a:srgbClr val="0F766E"/>
                 </a:solidFill>
                 <a:latin typeface="Trebuchet MS" pitchFamily="34" charset="0"/>
                 <a:ea typeface="Trebuchet MS" pitchFamily="34" charset="-122"/>
                 <a:cs typeface="Trebuchet MS" pitchFamily="34" charset="-120"/>
               </a:rPr>
-              <a:t>al</a:t>
+              <a:t>vit</a:t>
             </a:r>
             <a:endParaRPr lang="en-US" sz="1300" dirty="0"/>
           </a:p>
@@ -19499,8 +19433,8 @@
         </p:nvSpPr>
         <p:spPr>
           <a:xfrm>
-            <a:off x="4370832" y="2569464"/>
-            <a:ext cx="1828800" cy="201168"/>
+            <a:off x="3659429" y="2569464"/>
+            <a:ext cx="1581912" cy="201168"/>
           </a:xfrm>
           <a:prstGeom prst="rect">
             <a:avLst/>
@@ -19524,7 +19458,7 @@
                 <a:ea typeface="Calibri" pitchFamily="34" charset="-122"/>
                 <a:cs typeface="Calibri" pitchFamily="34" charset="-120"/>
               </a:rPr>
-              <a:t>relating to</a:t>
+              <a:t>life</a:t>
             </a:r>
             <a:endParaRPr lang="en-US" sz="850" dirty="0"/>
           </a:p>
@@ -19538,8 +19472,8 @@
         </p:nvSpPr>
         <p:spPr>
           <a:xfrm>
-            <a:off x="6519672" y="2258568"/>
-            <a:ext cx="1828800" cy="292608"/>
+            <a:off x="5329123" y="2258568"/>
+            <a:ext cx="1581912" cy="292608"/>
           </a:xfrm>
           <a:prstGeom prst="rect">
             <a:avLst>
@@ -19572,8 +19506,8 @@
         </p:nvSpPr>
         <p:spPr>
           <a:xfrm>
-            <a:off x="6519672" y="2258568"/>
-            <a:ext cx="1828800" cy="292608"/>
+            <a:off x="5329123" y="2258568"/>
+            <a:ext cx="1581912" cy="292608"/>
           </a:xfrm>
           <a:prstGeom prst="rect">
             <a:avLst/>
@@ -19597,7 +19531,7 @@
                 <a:ea typeface="Trebuchet MS" pitchFamily="34" charset="-122"/>
                 <a:cs typeface="Trebuchet MS" pitchFamily="34" charset="-120"/>
               </a:rPr>
-              <a:t>ity</a:t>
+              <a:t>al</a:t>
             </a:r>
             <a:endParaRPr lang="en-US" sz="1300" dirty="0"/>
           </a:p>
@@ -19611,8 +19545,8 @@
         </p:nvSpPr>
         <p:spPr>
           <a:xfrm>
-            <a:off x="6519672" y="2569464"/>
-            <a:ext cx="1828800" cy="201168"/>
+            <a:off x="5329123" y="2569464"/>
+            <a:ext cx="1581912" cy="201168"/>
           </a:xfrm>
           <a:prstGeom prst="rect">
             <a:avLst/>
@@ -19636,7 +19570,7 @@
                 <a:ea typeface="Calibri" pitchFamily="34" charset="-122"/>
                 <a:cs typeface="Calibri" pitchFamily="34" charset="-120"/>
               </a:rPr>
-              <a:t>state or quality of</a:t>
+              <a:t>relating to</a:t>
             </a:r>
             <a:endParaRPr lang="en-US" sz="850" dirty="0"/>
           </a:p>
@@ -19645,6 +19579,157 @@
       <p:sp>
         <p:nvSpPr>
           <p:cNvPr id="25" name="Shape 23"/>
+          <p:cNvSpPr/>
+          <p:nvPr/>
+        </p:nvSpPr>
+        <p:spPr>
+          <a:xfrm>
+            <a:off x="6998818" y="2258568"/>
+            <a:ext cx="1581912" cy="292608"/>
+          </a:xfrm>
+          <a:prstGeom prst="rect">
+            <a:avLst>
+              <a:gd name="adj" fmla="val 25000"/>
+            </a:avLst>
+          </a:prstGeom>
+          <a:solidFill>
+            <a:srgbClr val="FCE7F3"/>
+          </a:solidFill>
+          <a:ln w="19050">
+            <a:solidFill>
+              <a:srgbClr val="DB2777"/>
+            </a:solidFill>
+            <a:prstDash val="solid"/>
+          </a:ln>
+          <a:effectLst>
+            <a:outerShdw sx="100000" sy="100000" kx="0" ky="0" algn="bl" rotWithShape="0" blurRad="101600" dist="38100" dir="8100000">
+              <a:srgbClr val="000000">
+                <a:alpha val="12000"/>
+              </a:srgbClr>
+            </a:outerShdw>
+          </a:effectLst>
+        </p:spPr>
+      </p:sp>
+      <p:sp>
+        <p:nvSpPr>
+          <p:cNvPr id="26" name="Text 24"/>
+          <p:cNvSpPr/>
+          <p:nvPr/>
+        </p:nvSpPr>
+        <p:spPr>
+          <a:xfrm>
+            <a:off x="6998818" y="2258568"/>
+            <a:ext cx="1581912" cy="292608"/>
+          </a:xfrm>
+          <a:prstGeom prst="rect">
+            <a:avLst/>
+          </a:prstGeom>
+          <a:noFill/>
+          <a:ln/>
+        </p:spPr>
+        <p:txBody>
+          <a:bodyPr wrap="square" lIns="0" tIns="0" rIns="0" bIns="0" rtlCol="0" anchor="ctr"/>
+          <a:lstStyle/>
+          <a:p>
+            <a:pPr algn="ctr" indent="0" marL="0">
+              <a:buNone/>
+            </a:pPr>
+            <a:r>
+              <a:rPr lang="en-US" sz="1300" b="1" dirty="0">
+                <a:solidFill>
+                  <a:srgbClr val="9D174D"/>
+                </a:solidFill>
+                <a:latin typeface="Trebuchet MS" pitchFamily="34" charset="0"/>
+                <a:ea typeface="Trebuchet MS" pitchFamily="34" charset="-122"/>
+                <a:cs typeface="Trebuchet MS" pitchFamily="34" charset="-120"/>
+              </a:rPr>
+              <a:t>ise</a:t>
+            </a:r>
+            <a:endParaRPr lang="en-US" sz="1300" dirty="0"/>
+          </a:p>
+        </p:txBody>
+      </p:sp>
+      <p:sp>
+        <p:nvSpPr>
+          <p:cNvPr id="27" name="Text 25"/>
+          <p:cNvSpPr/>
+          <p:nvPr/>
+        </p:nvSpPr>
+        <p:spPr>
+          <a:xfrm>
+            <a:off x="6998818" y="2569464"/>
+            <a:ext cx="1581912" cy="201168"/>
+          </a:xfrm>
+          <a:prstGeom prst="rect">
+            <a:avLst/>
+          </a:prstGeom>
+          <a:noFill/>
+          <a:ln/>
+        </p:spPr>
+        <p:txBody>
+          <a:bodyPr wrap="square" lIns="0" tIns="0" rIns="0" bIns="0" rtlCol="0" anchor="t"/>
+          <a:lstStyle/>
+          <a:p>
+            <a:pPr algn="ctr" indent="0" marL="0">
+              <a:buNone/>
+            </a:pPr>
+            <a:r>
+              <a:rPr lang="en-US" sz="850" dirty="0">
+                <a:solidFill>
+                  <a:srgbClr val="475569"/>
+                </a:solidFill>
+                <a:latin typeface="Calibri" pitchFamily="34" charset="0"/>
+                <a:ea typeface="Calibri" pitchFamily="34" charset="-122"/>
+                <a:cs typeface="Calibri" pitchFamily="34" charset="-120"/>
+              </a:rPr>
+              <a:t>to make or do</a:t>
+            </a:r>
+            <a:endParaRPr lang="en-US" sz="850" dirty="0"/>
+          </a:p>
+        </p:txBody>
+      </p:sp>
+      <p:sp>
+        <p:nvSpPr>
+          <p:cNvPr id="28" name="Text 26"/>
+          <p:cNvSpPr/>
+          <p:nvPr/>
+        </p:nvSpPr>
+        <p:spPr>
+          <a:xfrm>
+            <a:off x="6998818" y="2752344"/>
+            <a:ext cx="1581912" cy="182880"/>
+          </a:xfrm>
+          <a:prstGeom prst="rect">
+            <a:avLst/>
+          </a:prstGeom>
+          <a:noFill/>
+          <a:ln/>
+        </p:spPr>
+        <p:txBody>
+          <a:bodyPr wrap="square" lIns="0" tIns="0" rIns="0" bIns="0" rtlCol="0" anchor="t"/>
+          <a:lstStyle/>
+          <a:p>
+            <a:pPr algn="ctr" indent="0" marL="0">
+              <a:buNone/>
+            </a:pPr>
+            <a:r>
+              <a:rPr lang="en-US" sz="700" i="1" dirty="0">
+                <a:solidFill>
+                  <a:srgbClr val="94A3B8"/>
+                </a:solidFill>
+                <a:latin typeface="Calibri" pitchFamily="34" charset="0"/>
+                <a:ea typeface="Calibri" pitchFamily="34" charset="-122"/>
+                <a:cs typeface="Calibri" pitchFamily="34" charset="-120"/>
+              </a:rPr>
+              <a:t>Australian/British spelling of -ize</a:t>
+            </a:r>
+            <a:endParaRPr lang="en-US" sz="700" dirty="0"/>
+          </a:p>
+        </p:txBody>
+      </p:sp>
+      <p:sp>
+        <p:nvSpPr>
+          <p:cNvPr id="29" name="Shape 27"/>
           <p:cNvSpPr/>
           <p:nvPr/>
         </p:nvSpPr>
@@ -19671,7 +19756,7 @@
       </p:sp>
       <p:sp>
         <p:nvSpPr>
-          <p:cNvPr id="26" name="Text 24"/>
+          <p:cNvPr id="30" name="Text 28"/>
           <p:cNvSpPr/>
           <p:nvPr/>
         </p:nvSpPr>
@@ -19710,7 +19795,7 @@
       </p:sp>
       <p:sp>
         <p:nvSpPr>
-          <p:cNvPr id="27" name="Shape 25"/>
+          <p:cNvPr id="31" name="Shape 29"/>
           <p:cNvSpPr/>
           <p:nvPr/>
         </p:nvSpPr>
@@ -19737,7 +19822,7 @@
       </p:sp>
       <p:sp>
         <p:nvSpPr>
-          <p:cNvPr id="28" name="Text 26"/>
+          <p:cNvPr id="32" name="Text 30"/>
           <p:cNvSpPr/>
           <p:nvPr/>
         </p:nvSpPr>
@@ -19776,7 +19861,7 @@
       </p:sp>
       <p:sp>
         <p:nvSpPr>
-          <p:cNvPr id="29" name="Shape 27"/>
+          <p:cNvPr id="33" name="Shape 31"/>
           <p:cNvSpPr/>
           <p:nvPr/>
         </p:nvSpPr>
@@ -19803,7 +19888,7 @@
       </p:sp>
       <p:sp>
         <p:nvSpPr>
-          <p:cNvPr id="30" name="Text 28"/>
+          <p:cNvPr id="34" name="Text 32"/>
           <p:cNvSpPr/>
           <p:nvPr/>
         </p:nvSpPr>
@@ -19842,7 +19927,7 @@
       </p:sp>
       <p:sp>
         <p:nvSpPr>
-          <p:cNvPr id="31" name="Shape 29"/>
+          <p:cNvPr id="35" name="Shape 33"/>
           <p:cNvSpPr/>
           <p:nvPr/>
         </p:nvSpPr>
@@ -19869,7 +19954,7 @@
       </p:sp>
       <p:sp>
         <p:nvSpPr>
-          <p:cNvPr id="32" name="Text 30"/>
+          <p:cNvPr id="36" name="Text 34"/>
           <p:cNvSpPr/>
           <p:nvPr/>
         </p:nvSpPr>
@@ -20331,7 +20416,7 @@
                 <a:ea typeface="Trebuchet MS" pitchFamily="34" charset="-122"/>
                 <a:cs typeface="Trebuchet MS" pitchFamily="34" charset="-120"/>
               </a:rPr>
-              <a:t>vitality</a:t>
+              <a:t>revitalise</a:t>
             </a:r>
             <a:endParaRPr lang="en-US" sz="2800" dirty="0"/>
           </a:p>
@@ -20411,8 +20496,8 @@
         </p:nvSpPr>
         <p:spPr>
           <a:xfrm>
-            <a:off x="2221992" y="2258568"/>
-            <a:ext cx="1828800" cy="292608"/>
+            <a:off x="1989734" y="2258568"/>
+            <a:ext cx="1581912" cy="292608"/>
           </a:xfrm>
           <a:prstGeom prst="rect">
             <a:avLst>
@@ -20420,11 +20505,11 @@
             </a:avLst>
           </a:prstGeom>
           <a:solidFill>
-            <a:srgbClr val="CCFBF1"/>
+            <a:srgbClr val="DDD6FE"/>
           </a:solidFill>
           <a:ln w="19050">
             <a:solidFill>
-              <a:srgbClr val="0D9488"/>
+              <a:srgbClr val="7C3AED"/>
             </a:solidFill>
             <a:prstDash val="solid"/>
           </a:ln>
@@ -20445,8 +20530,8 @@
         </p:nvSpPr>
         <p:spPr>
           <a:xfrm>
-            <a:off x="2221992" y="2258568"/>
-            <a:ext cx="1828800" cy="292608"/>
+            <a:off x="1989734" y="2258568"/>
+            <a:ext cx="1581912" cy="292608"/>
           </a:xfrm>
           <a:prstGeom prst="rect">
             <a:avLst/>
@@ -20464,13 +20549,13 @@
             <a:r>
               <a:rPr lang="en-US" sz="1300" b="1" dirty="0">
                 <a:solidFill>
-                  <a:srgbClr val="0F766E"/>
+                  <a:srgbClr val="4C1D95"/>
                 </a:solidFill>
                 <a:latin typeface="Trebuchet MS" pitchFamily="34" charset="0"/>
                 <a:ea typeface="Trebuchet MS" pitchFamily="34" charset="-122"/>
                 <a:cs typeface="Trebuchet MS" pitchFamily="34" charset="-120"/>
               </a:rPr>
-              <a:t>vit</a:t>
+              <a:t>re</a:t>
             </a:r>
             <a:endParaRPr lang="en-US" sz="1300" dirty="0"/>
           </a:p>
@@ -20484,8 +20569,8 @@
         </p:nvSpPr>
         <p:spPr>
           <a:xfrm>
-            <a:off x="2221992" y="2569464"/>
-            <a:ext cx="1828800" cy="201168"/>
+            <a:off x="1989734" y="2569464"/>
+            <a:ext cx="1581912" cy="201168"/>
           </a:xfrm>
           <a:prstGeom prst="rect">
             <a:avLst/>
@@ -20509,7 +20594,7 @@
                 <a:ea typeface="Calibri" pitchFamily="34" charset="-122"/>
                 <a:cs typeface="Calibri" pitchFamily="34" charset="-120"/>
               </a:rPr>
-              <a:t>life</a:t>
+              <a:t>again</a:t>
             </a:r>
             <a:endParaRPr lang="en-US" sz="850" dirty="0"/>
           </a:p>
@@ -20523,8 +20608,8 @@
         </p:nvSpPr>
         <p:spPr>
           <a:xfrm>
-            <a:off x="4370832" y="2258568"/>
-            <a:ext cx="1828800" cy="292608"/>
+            <a:off x="3659429" y="2258568"/>
+            <a:ext cx="1581912" cy="292608"/>
           </a:xfrm>
           <a:prstGeom prst="rect">
             <a:avLst>
@@ -20532,11 +20617,11 @@
             </a:avLst>
           </a:prstGeom>
           <a:solidFill>
-            <a:srgbClr val="FCE7F3"/>
+            <a:srgbClr val="CCFBF1"/>
           </a:solidFill>
           <a:ln w="19050">
             <a:solidFill>
-              <a:srgbClr val="DB2777"/>
+              <a:srgbClr val="0D9488"/>
             </a:solidFill>
             <a:prstDash val="solid"/>
           </a:ln>
@@ -20557,8 +20642,8 @@
         </p:nvSpPr>
         <p:spPr>
           <a:xfrm>
-            <a:off x="4370832" y="2258568"/>
-            <a:ext cx="1828800" cy="292608"/>
+            <a:off x="3659429" y="2258568"/>
+            <a:ext cx="1581912" cy="292608"/>
           </a:xfrm>
           <a:prstGeom prst="rect">
             <a:avLst/>
@@ -20576,13 +20661,13 @@
             <a:r>
               <a:rPr lang="en-US" sz="1300" b="1" dirty="0">
                 <a:solidFill>
-                  <a:srgbClr val="9D174D"/>
+                  <a:srgbClr val="0F766E"/>
                 </a:solidFill>
                 <a:latin typeface="Trebuchet MS" pitchFamily="34" charset="0"/>
                 <a:ea typeface="Trebuchet MS" pitchFamily="34" charset="-122"/>
                 <a:cs typeface="Trebuchet MS" pitchFamily="34" charset="-120"/>
               </a:rPr>
-              <a:t>al</a:t>
+              <a:t>vit</a:t>
             </a:r>
             <a:endParaRPr lang="en-US" sz="1300" dirty="0"/>
           </a:p>
@@ -20596,8 +20681,8 @@
         </p:nvSpPr>
         <p:spPr>
           <a:xfrm>
-            <a:off x="4370832" y="2569464"/>
-            <a:ext cx="1828800" cy="201168"/>
+            <a:off x="3659429" y="2569464"/>
+            <a:ext cx="1581912" cy="201168"/>
           </a:xfrm>
           <a:prstGeom prst="rect">
             <a:avLst/>
@@ -20621,7 +20706,7 @@
                 <a:ea typeface="Calibri" pitchFamily="34" charset="-122"/>
                 <a:cs typeface="Calibri" pitchFamily="34" charset="-120"/>
               </a:rPr>
-              <a:t>relating to</a:t>
+              <a:t>life</a:t>
             </a:r>
             <a:endParaRPr lang="en-US" sz="850" dirty="0"/>
           </a:p>
@@ -20635,8 +20720,8 @@
         </p:nvSpPr>
         <p:spPr>
           <a:xfrm>
-            <a:off x="6519672" y="2258568"/>
-            <a:ext cx="1828800" cy="292608"/>
+            <a:off x="5329123" y="2258568"/>
+            <a:ext cx="1581912" cy="292608"/>
           </a:xfrm>
           <a:prstGeom prst="rect">
             <a:avLst>
@@ -20669,8 +20754,8 @@
         </p:nvSpPr>
         <p:spPr>
           <a:xfrm>
-            <a:off x="6519672" y="2258568"/>
-            <a:ext cx="1828800" cy="292608"/>
+            <a:off x="5329123" y="2258568"/>
+            <a:ext cx="1581912" cy="292608"/>
           </a:xfrm>
           <a:prstGeom prst="rect">
             <a:avLst/>
@@ -20694,7 +20779,7 @@
                 <a:ea typeface="Trebuchet MS" pitchFamily="34" charset="-122"/>
                 <a:cs typeface="Trebuchet MS" pitchFamily="34" charset="-120"/>
               </a:rPr>
-              <a:t>ity</a:t>
+              <a:t>al</a:t>
             </a:r>
             <a:endParaRPr lang="en-US" sz="1300" dirty="0"/>
           </a:p>
@@ -20708,8 +20793,8 @@
         </p:nvSpPr>
         <p:spPr>
           <a:xfrm>
-            <a:off x="6519672" y="2569464"/>
-            <a:ext cx="1828800" cy="201168"/>
+            <a:off x="5329123" y="2569464"/>
+            <a:ext cx="1581912" cy="201168"/>
           </a:xfrm>
           <a:prstGeom prst="rect">
             <a:avLst/>
@@ -20733,7 +20818,7 @@
                 <a:ea typeface="Calibri" pitchFamily="34" charset="-122"/>
                 <a:cs typeface="Calibri" pitchFamily="34" charset="-120"/>
               </a:rPr>
-              <a:t>state or quality of</a:t>
+              <a:t>relating to</a:t>
             </a:r>
             <a:endParaRPr lang="en-US" sz="850" dirty="0"/>
           </a:p>
@@ -20742,6 +20827,157 @@
       <p:sp>
         <p:nvSpPr>
           <p:cNvPr id="25" name="Shape 23"/>
+          <p:cNvSpPr/>
+          <p:nvPr/>
+        </p:nvSpPr>
+        <p:spPr>
+          <a:xfrm>
+            <a:off x="6998818" y="2258568"/>
+            <a:ext cx="1581912" cy="292608"/>
+          </a:xfrm>
+          <a:prstGeom prst="rect">
+            <a:avLst>
+              <a:gd name="adj" fmla="val 25000"/>
+            </a:avLst>
+          </a:prstGeom>
+          <a:solidFill>
+            <a:srgbClr val="FCE7F3"/>
+          </a:solidFill>
+          <a:ln w="19050">
+            <a:solidFill>
+              <a:srgbClr val="DB2777"/>
+            </a:solidFill>
+            <a:prstDash val="solid"/>
+          </a:ln>
+          <a:effectLst>
+            <a:outerShdw sx="100000" sy="100000" kx="0" ky="0" algn="bl" rotWithShape="0" blurRad="101600" dist="38100" dir="8100000">
+              <a:srgbClr val="000000">
+                <a:alpha val="12000"/>
+              </a:srgbClr>
+            </a:outerShdw>
+          </a:effectLst>
+        </p:spPr>
+      </p:sp>
+      <p:sp>
+        <p:nvSpPr>
+          <p:cNvPr id="26" name="Text 24"/>
+          <p:cNvSpPr/>
+          <p:nvPr/>
+        </p:nvSpPr>
+        <p:spPr>
+          <a:xfrm>
+            <a:off x="6998818" y="2258568"/>
+            <a:ext cx="1581912" cy="292608"/>
+          </a:xfrm>
+          <a:prstGeom prst="rect">
+            <a:avLst/>
+          </a:prstGeom>
+          <a:noFill/>
+          <a:ln/>
+        </p:spPr>
+        <p:txBody>
+          <a:bodyPr wrap="square" lIns="0" tIns="0" rIns="0" bIns="0" rtlCol="0" anchor="ctr"/>
+          <a:lstStyle/>
+          <a:p>
+            <a:pPr algn="ctr" indent="0" marL="0">
+              <a:buNone/>
+            </a:pPr>
+            <a:r>
+              <a:rPr lang="en-US" sz="1300" b="1" dirty="0">
+                <a:solidFill>
+                  <a:srgbClr val="9D174D"/>
+                </a:solidFill>
+                <a:latin typeface="Trebuchet MS" pitchFamily="34" charset="0"/>
+                <a:ea typeface="Trebuchet MS" pitchFamily="34" charset="-122"/>
+                <a:cs typeface="Trebuchet MS" pitchFamily="34" charset="-120"/>
+              </a:rPr>
+              <a:t>ise</a:t>
+            </a:r>
+            <a:endParaRPr lang="en-US" sz="1300" dirty="0"/>
+          </a:p>
+        </p:txBody>
+      </p:sp>
+      <p:sp>
+        <p:nvSpPr>
+          <p:cNvPr id="27" name="Text 25"/>
+          <p:cNvSpPr/>
+          <p:nvPr/>
+        </p:nvSpPr>
+        <p:spPr>
+          <a:xfrm>
+            <a:off x="6998818" y="2569464"/>
+            <a:ext cx="1581912" cy="201168"/>
+          </a:xfrm>
+          <a:prstGeom prst="rect">
+            <a:avLst/>
+          </a:prstGeom>
+          <a:noFill/>
+          <a:ln/>
+        </p:spPr>
+        <p:txBody>
+          <a:bodyPr wrap="square" lIns="0" tIns="0" rIns="0" bIns="0" rtlCol="0" anchor="t"/>
+          <a:lstStyle/>
+          <a:p>
+            <a:pPr algn="ctr" indent="0" marL="0">
+              <a:buNone/>
+            </a:pPr>
+            <a:r>
+              <a:rPr lang="en-US" sz="850" dirty="0">
+                <a:solidFill>
+                  <a:srgbClr val="475569"/>
+                </a:solidFill>
+                <a:latin typeface="Calibri" pitchFamily="34" charset="0"/>
+                <a:ea typeface="Calibri" pitchFamily="34" charset="-122"/>
+                <a:cs typeface="Calibri" pitchFamily="34" charset="-120"/>
+              </a:rPr>
+              <a:t>to make or do</a:t>
+            </a:r>
+            <a:endParaRPr lang="en-US" sz="850" dirty="0"/>
+          </a:p>
+        </p:txBody>
+      </p:sp>
+      <p:sp>
+        <p:nvSpPr>
+          <p:cNvPr id="28" name="Text 26"/>
+          <p:cNvSpPr/>
+          <p:nvPr/>
+        </p:nvSpPr>
+        <p:spPr>
+          <a:xfrm>
+            <a:off x="6998818" y="2752344"/>
+            <a:ext cx="1581912" cy="182880"/>
+          </a:xfrm>
+          <a:prstGeom prst="rect">
+            <a:avLst/>
+          </a:prstGeom>
+          <a:noFill/>
+          <a:ln/>
+        </p:spPr>
+        <p:txBody>
+          <a:bodyPr wrap="square" lIns="0" tIns="0" rIns="0" bIns="0" rtlCol="0" anchor="t"/>
+          <a:lstStyle/>
+          <a:p>
+            <a:pPr algn="ctr" indent="0" marL="0">
+              <a:buNone/>
+            </a:pPr>
+            <a:r>
+              <a:rPr lang="en-US" sz="700" i="1" dirty="0">
+                <a:solidFill>
+                  <a:srgbClr val="94A3B8"/>
+                </a:solidFill>
+                <a:latin typeface="Calibri" pitchFamily="34" charset="0"/>
+                <a:ea typeface="Calibri" pitchFamily="34" charset="-122"/>
+                <a:cs typeface="Calibri" pitchFamily="34" charset="-120"/>
+              </a:rPr>
+              <a:t>Australian/British spelling of -ize</a:t>
+            </a:r>
+            <a:endParaRPr lang="en-US" sz="700" dirty="0"/>
+          </a:p>
+        </p:txBody>
+      </p:sp>
+      <p:sp>
+        <p:nvSpPr>
+          <p:cNvPr id="29" name="Shape 27"/>
           <p:cNvSpPr/>
           <p:nvPr/>
         </p:nvSpPr>
@@ -20768,7 +21004,7 @@
       </p:sp>
       <p:sp>
         <p:nvSpPr>
-          <p:cNvPr id="26" name="Text 24"/>
+          <p:cNvPr id="30" name="Text 28"/>
           <p:cNvSpPr/>
           <p:nvPr/>
         </p:nvSpPr>
@@ -20807,7 +21043,7 @@
       </p:sp>
       <p:sp>
         <p:nvSpPr>
-          <p:cNvPr id="27" name="Shape 25"/>
+          <p:cNvPr id="31" name="Shape 29"/>
           <p:cNvSpPr/>
           <p:nvPr/>
         </p:nvSpPr>
@@ -20834,7 +21070,7 @@
       </p:sp>
       <p:sp>
         <p:nvSpPr>
-          <p:cNvPr id="28" name="Shape 26"/>
+          <p:cNvPr id="32" name="Shape 30"/>
           <p:cNvSpPr/>
           <p:nvPr/>
         </p:nvSpPr>
@@ -20861,7 +21097,7 @@
       </p:sp>
       <p:sp>
         <p:nvSpPr>
-          <p:cNvPr id="29" name="Text 27"/>
+          <p:cNvPr id="33" name="Text 31"/>
           <p:cNvSpPr/>
           <p:nvPr/>
         </p:nvSpPr>
@@ -20892,7 +21128,7 @@
                 <a:ea typeface="Trebuchet MS" pitchFamily="34" charset="-122"/>
                 <a:cs typeface="Trebuchet MS" pitchFamily="34" charset="-120"/>
               </a:rPr>
-              <a:t>vi</a:t>
+              <a:t>re</a:t>
             </a:r>
             <a:endParaRPr lang="en-US" sz="1400" dirty="0"/>
           </a:p>
@@ -20900,7 +21136,7 @@
       </p:sp>
       <p:sp>
         <p:nvSpPr>
-          <p:cNvPr id="30" name="Text 28"/>
+          <p:cNvPr id="34" name="Text 32"/>
           <p:cNvSpPr/>
           <p:nvPr/>
         </p:nvSpPr>
@@ -20939,7 +21175,7 @@
       </p:sp>
       <p:sp>
         <p:nvSpPr>
-          <p:cNvPr id="31" name="Shape 29"/>
+          <p:cNvPr id="35" name="Shape 33"/>
           <p:cNvSpPr/>
           <p:nvPr/>
         </p:nvSpPr>
@@ -20966,7 +21202,7 @@
       </p:sp>
       <p:sp>
         <p:nvSpPr>
-          <p:cNvPr id="32" name="Text 30"/>
+          <p:cNvPr id="36" name="Text 34"/>
           <p:cNvSpPr/>
           <p:nvPr/>
         </p:nvSpPr>
@@ -20997,7 +21233,7 @@
                 <a:ea typeface="Trebuchet MS" pitchFamily="34" charset="-122"/>
                 <a:cs typeface="Trebuchet MS" pitchFamily="34" charset="-120"/>
               </a:rPr>
-              <a:t>tal</a:t>
+              <a:t>vi</a:t>
             </a:r>
             <a:endParaRPr lang="en-US" sz="1400" dirty="0"/>
           </a:p>
@@ -21005,7 +21241,7 @@
       </p:sp>
       <p:sp>
         <p:nvSpPr>
-          <p:cNvPr id="33" name="Text 31"/>
+          <p:cNvPr id="37" name="Text 35"/>
           <p:cNvSpPr/>
           <p:nvPr/>
         </p:nvSpPr>
@@ -21044,7 +21280,7 @@
       </p:sp>
       <p:sp>
         <p:nvSpPr>
-          <p:cNvPr id="34" name="Shape 32"/>
+          <p:cNvPr id="38" name="Shape 36"/>
           <p:cNvSpPr/>
           <p:nvPr/>
         </p:nvSpPr>
@@ -21071,7 +21307,7 @@
       </p:sp>
       <p:sp>
         <p:nvSpPr>
-          <p:cNvPr id="35" name="Text 33"/>
+          <p:cNvPr id="39" name="Text 37"/>
           <p:cNvSpPr/>
           <p:nvPr/>
         </p:nvSpPr>
@@ -21102,7 +21338,7 @@
                 <a:ea typeface="Trebuchet MS" pitchFamily="34" charset="-122"/>
                 <a:cs typeface="Trebuchet MS" pitchFamily="34" charset="-120"/>
               </a:rPr>
-              <a:t>i</a:t>
+              <a:t>tal</a:t>
             </a:r>
             <a:endParaRPr lang="en-US" sz="1400" dirty="0"/>
           </a:p>
@@ -21110,7 +21346,7 @@
       </p:sp>
       <p:sp>
         <p:nvSpPr>
-          <p:cNvPr id="36" name="Text 34"/>
+          <p:cNvPr id="40" name="Text 38"/>
           <p:cNvSpPr/>
           <p:nvPr/>
         </p:nvSpPr>
@@ -21149,7 +21385,7 @@
       </p:sp>
       <p:sp>
         <p:nvSpPr>
-          <p:cNvPr id="37" name="Shape 35"/>
+          <p:cNvPr id="41" name="Shape 39"/>
           <p:cNvSpPr/>
           <p:nvPr/>
         </p:nvSpPr>
@@ -21176,7 +21412,7 @@
       </p:sp>
       <p:sp>
         <p:nvSpPr>
-          <p:cNvPr id="38" name="Text 36"/>
+          <p:cNvPr id="42" name="Text 40"/>
           <p:cNvSpPr/>
           <p:nvPr/>
         </p:nvSpPr>
@@ -21207,7 +21443,7 @@
                 <a:ea typeface="Trebuchet MS" pitchFamily="34" charset="-122"/>
                 <a:cs typeface="Trebuchet MS" pitchFamily="34" charset="-120"/>
               </a:rPr>
-              <a:t>ty</a:t>
+              <a:t>ise</a:t>
             </a:r>
             <a:endParaRPr lang="en-US" sz="1400" dirty="0"/>
           </a:p>
@@ -21215,7 +21451,7 @@
       </p:sp>
       <p:sp>
         <p:nvSpPr>
-          <p:cNvPr id="39" name="Shape 37"/>
+          <p:cNvPr id="43" name="Shape 41"/>
           <p:cNvSpPr/>
           <p:nvPr/>
         </p:nvSpPr>
@@ -21242,7 +21478,7 @@
       </p:sp>
       <p:sp>
         <p:nvSpPr>
-          <p:cNvPr id="40" name="Text 38"/>
+          <p:cNvPr id="44" name="Text 42"/>
           <p:cNvSpPr/>
           <p:nvPr/>
         </p:nvSpPr>
@@ -21281,7 +21517,7 @@
       </p:sp>
       <p:sp>
         <p:nvSpPr>
-          <p:cNvPr id="41" name="Shape 39"/>
+          <p:cNvPr id="45" name="Shape 43"/>
           <p:cNvSpPr/>
           <p:nvPr/>
         </p:nvSpPr>
@@ -21308,7 +21544,7 @@
       </p:sp>
       <p:sp>
         <p:nvSpPr>
-          <p:cNvPr id="42" name="Text 40"/>
+          <p:cNvPr id="46" name="Text 44"/>
           <p:cNvSpPr/>
           <p:nvPr/>
         </p:nvSpPr>
@@ -21770,7 +22006,7 @@
                 <a:ea typeface="Trebuchet MS" pitchFamily="34" charset="-122"/>
                 <a:cs typeface="Trebuchet MS" pitchFamily="34" charset="-120"/>
               </a:rPr>
-              <a:t>vitality</a:t>
+              <a:t>revitalise</a:t>
             </a:r>
             <a:endParaRPr lang="en-US" sz="2800" dirty="0"/>
           </a:p>
@@ -21850,8 +22086,8 @@
         </p:nvSpPr>
         <p:spPr>
           <a:xfrm>
-            <a:off x="2221992" y="2258568"/>
-            <a:ext cx="1828800" cy="292608"/>
+            <a:off x="1989734" y="2258568"/>
+            <a:ext cx="1581912" cy="292608"/>
           </a:xfrm>
           <a:prstGeom prst="rect">
             <a:avLst>
@@ -21859,11 +22095,11 @@
             </a:avLst>
           </a:prstGeom>
           <a:solidFill>
-            <a:srgbClr val="CCFBF1"/>
+            <a:srgbClr val="DDD6FE"/>
           </a:solidFill>
           <a:ln w="19050">
             <a:solidFill>
-              <a:srgbClr val="0D9488"/>
+              <a:srgbClr val="7C3AED"/>
             </a:solidFill>
             <a:prstDash val="solid"/>
           </a:ln>
@@ -21884,8 +22120,8 @@
         </p:nvSpPr>
         <p:spPr>
           <a:xfrm>
-            <a:off x="2221992" y="2258568"/>
-            <a:ext cx="1828800" cy="292608"/>
+            <a:off x="1989734" y="2258568"/>
+            <a:ext cx="1581912" cy="292608"/>
           </a:xfrm>
           <a:prstGeom prst="rect">
             <a:avLst/>
@@ -21903,13 +22139,13 @@
             <a:r>
               <a:rPr lang="en-US" sz="1300" b="1" dirty="0">
                 <a:solidFill>
-                  <a:srgbClr val="0F766E"/>
+                  <a:srgbClr val="4C1D95"/>
                 </a:solidFill>
                 <a:latin typeface="Trebuchet MS" pitchFamily="34" charset="0"/>
                 <a:ea typeface="Trebuchet MS" pitchFamily="34" charset="-122"/>
                 <a:cs typeface="Trebuchet MS" pitchFamily="34" charset="-120"/>
               </a:rPr>
-              <a:t>vit</a:t>
+              <a:t>re</a:t>
             </a:r>
             <a:endParaRPr lang="en-US" sz="1300" dirty="0"/>
           </a:p>
@@ -21923,8 +22159,8 @@
         </p:nvSpPr>
         <p:spPr>
           <a:xfrm>
-            <a:off x="2221992" y="2569464"/>
-            <a:ext cx="1828800" cy="201168"/>
+            <a:off x="1989734" y="2569464"/>
+            <a:ext cx="1581912" cy="201168"/>
           </a:xfrm>
           <a:prstGeom prst="rect">
             <a:avLst/>
@@ -21948,7 +22184,7 @@
                 <a:ea typeface="Calibri" pitchFamily="34" charset="-122"/>
                 <a:cs typeface="Calibri" pitchFamily="34" charset="-120"/>
               </a:rPr>
-              <a:t>life</a:t>
+              <a:t>again</a:t>
             </a:r>
             <a:endParaRPr lang="en-US" sz="850" dirty="0"/>
           </a:p>
@@ -21962,8 +22198,8 @@
         </p:nvSpPr>
         <p:spPr>
           <a:xfrm>
-            <a:off x="4370832" y="2258568"/>
-            <a:ext cx="1828800" cy="292608"/>
+            <a:off x="3659429" y="2258568"/>
+            <a:ext cx="1581912" cy="292608"/>
           </a:xfrm>
           <a:prstGeom prst="rect">
             <a:avLst>
@@ -21971,11 +22207,11 @@
             </a:avLst>
           </a:prstGeom>
           <a:solidFill>
-            <a:srgbClr val="FCE7F3"/>
+            <a:srgbClr val="CCFBF1"/>
           </a:solidFill>
           <a:ln w="19050">
             <a:solidFill>
-              <a:srgbClr val="DB2777"/>
+              <a:srgbClr val="0D9488"/>
             </a:solidFill>
             <a:prstDash val="solid"/>
           </a:ln>
@@ -21996,8 +22232,8 @@
         </p:nvSpPr>
         <p:spPr>
           <a:xfrm>
-            <a:off x="4370832" y="2258568"/>
-            <a:ext cx="1828800" cy="292608"/>
+            <a:off x="3659429" y="2258568"/>
+            <a:ext cx="1581912" cy="292608"/>
           </a:xfrm>
           <a:prstGeom prst="rect">
             <a:avLst/>
@@ -22015,13 +22251,13 @@
             <a:r>
               <a:rPr lang="en-US" sz="1300" b="1" dirty="0">
                 <a:solidFill>
-                  <a:srgbClr val="9D174D"/>
+                  <a:srgbClr val="0F766E"/>
                 </a:solidFill>
                 <a:latin typeface="Trebuchet MS" pitchFamily="34" charset="0"/>
                 <a:ea typeface="Trebuchet MS" pitchFamily="34" charset="-122"/>
                 <a:cs typeface="Trebuchet MS" pitchFamily="34" charset="-120"/>
               </a:rPr>
-              <a:t>al</a:t>
+              <a:t>vit</a:t>
             </a:r>
             <a:endParaRPr lang="en-US" sz="1300" dirty="0"/>
           </a:p>
@@ -22035,8 +22271,8 @@
         </p:nvSpPr>
         <p:spPr>
           <a:xfrm>
-            <a:off x="4370832" y="2569464"/>
-            <a:ext cx="1828800" cy="201168"/>
+            <a:off x="3659429" y="2569464"/>
+            <a:ext cx="1581912" cy="201168"/>
           </a:xfrm>
           <a:prstGeom prst="rect">
             <a:avLst/>
@@ -22060,7 +22296,7 @@
                 <a:ea typeface="Calibri" pitchFamily="34" charset="-122"/>
                 <a:cs typeface="Calibri" pitchFamily="34" charset="-120"/>
               </a:rPr>
-              <a:t>relating to</a:t>
+              <a:t>life</a:t>
             </a:r>
             <a:endParaRPr lang="en-US" sz="850" dirty="0"/>
           </a:p>
@@ -22074,8 +22310,8 @@
         </p:nvSpPr>
         <p:spPr>
           <a:xfrm>
-            <a:off x="6519672" y="2258568"/>
-            <a:ext cx="1828800" cy="292608"/>
+            <a:off x="5329123" y="2258568"/>
+            <a:ext cx="1581912" cy="292608"/>
           </a:xfrm>
           <a:prstGeom prst="rect">
             <a:avLst>
@@ -22108,8 +22344,8 @@
         </p:nvSpPr>
         <p:spPr>
           <a:xfrm>
-            <a:off x="6519672" y="2258568"/>
-            <a:ext cx="1828800" cy="292608"/>
+            <a:off x="5329123" y="2258568"/>
+            <a:ext cx="1581912" cy="292608"/>
           </a:xfrm>
           <a:prstGeom prst="rect">
             <a:avLst/>
@@ -22133,7 +22369,7 @@
                 <a:ea typeface="Trebuchet MS" pitchFamily="34" charset="-122"/>
                 <a:cs typeface="Trebuchet MS" pitchFamily="34" charset="-120"/>
               </a:rPr>
-              <a:t>ity</a:t>
+              <a:t>al</a:t>
             </a:r>
             <a:endParaRPr lang="en-US" sz="1300" dirty="0"/>
           </a:p>
@@ -22147,8 +22383,8 @@
         </p:nvSpPr>
         <p:spPr>
           <a:xfrm>
-            <a:off x="6519672" y="2569464"/>
-            <a:ext cx="1828800" cy="201168"/>
+            <a:off x="5329123" y="2569464"/>
+            <a:ext cx="1581912" cy="201168"/>
           </a:xfrm>
           <a:prstGeom prst="rect">
             <a:avLst/>
@@ -22172,7 +22408,7 @@
                 <a:ea typeface="Calibri" pitchFamily="34" charset="-122"/>
                 <a:cs typeface="Calibri" pitchFamily="34" charset="-120"/>
               </a:rPr>
-              <a:t>state or quality of</a:t>
+              <a:t>relating to</a:t>
             </a:r>
             <a:endParaRPr lang="en-US" sz="850" dirty="0"/>
           </a:p>
@@ -22181,6 +22417,157 @@
       <p:sp>
         <p:nvSpPr>
           <p:cNvPr id="25" name="Shape 23"/>
+          <p:cNvSpPr/>
+          <p:nvPr/>
+        </p:nvSpPr>
+        <p:spPr>
+          <a:xfrm>
+            <a:off x="6998818" y="2258568"/>
+            <a:ext cx="1581912" cy="292608"/>
+          </a:xfrm>
+          <a:prstGeom prst="rect">
+            <a:avLst>
+              <a:gd name="adj" fmla="val 25000"/>
+            </a:avLst>
+          </a:prstGeom>
+          <a:solidFill>
+            <a:srgbClr val="FCE7F3"/>
+          </a:solidFill>
+          <a:ln w="19050">
+            <a:solidFill>
+              <a:srgbClr val="DB2777"/>
+            </a:solidFill>
+            <a:prstDash val="solid"/>
+          </a:ln>
+          <a:effectLst>
+            <a:outerShdw sx="100000" sy="100000" kx="0" ky="0" algn="bl" rotWithShape="0" blurRad="101600" dist="38100" dir="8100000">
+              <a:srgbClr val="000000">
+                <a:alpha val="12000"/>
+              </a:srgbClr>
+            </a:outerShdw>
+          </a:effectLst>
+        </p:spPr>
+      </p:sp>
+      <p:sp>
+        <p:nvSpPr>
+          <p:cNvPr id="26" name="Text 24"/>
+          <p:cNvSpPr/>
+          <p:nvPr/>
+        </p:nvSpPr>
+        <p:spPr>
+          <a:xfrm>
+            <a:off x="6998818" y="2258568"/>
+            <a:ext cx="1581912" cy="292608"/>
+          </a:xfrm>
+          <a:prstGeom prst="rect">
+            <a:avLst/>
+          </a:prstGeom>
+          <a:noFill/>
+          <a:ln/>
+        </p:spPr>
+        <p:txBody>
+          <a:bodyPr wrap="square" lIns="0" tIns="0" rIns="0" bIns="0" rtlCol="0" anchor="ctr"/>
+          <a:lstStyle/>
+          <a:p>
+            <a:pPr algn="ctr" indent="0" marL="0">
+              <a:buNone/>
+            </a:pPr>
+            <a:r>
+              <a:rPr lang="en-US" sz="1300" b="1" dirty="0">
+                <a:solidFill>
+                  <a:srgbClr val="9D174D"/>
+                </a:solidFill>
+                <a:latin typeface="Trebuchet MS" pitchFamily="34" charset="0"/>
+                <a:ea typeface="Trebuchet MS" pitchFamily="34" charset="-122"/>
+                <a:cs typeface="Trebuchet MS" pitchFamily="34" charset="-120"/>
+              </a:rPr>
+              <a:t>ise</a:t>
+            </a:r>
+            <a:endParaRPr lang="en-US" sz="1300" dirty="0"/>
+          </a:p>
+        </p:txBody>
+      </p:sp>
+      <p:sp>
+        <p:nvSpPr>
+          <p:cNvPr id="27" name="Text 25"/>
+          <p:cNvSpPr/>
+          <p:nvPr/>
+        </p:nvSpPr>
+        <p:spPr>
+          <a:xfrm>
+            <a:off x="6998818" y="2569464"/>
+            <a:ext cx="1581912" cy="201168"/>
+          </a:xfrm>
+          <a:prstGeom prst="rect">
+            <a:avLst/>
+          </a:prstGeom>
+          <a:noFill/>
+          <a:ln/>
+        </p:spPr>
+        <p:txBody>
+          <a:bodyPr wrap="square" lIns="0" tIns="0" rIns="0" bIns="0" rtlCol="0" anchor="t"/>
+          <a:lstStyle/>
+          <a:p>
+            <a:pPr algn="ctr" indent="0" marL="0">
+              <a:buNone/>
+            </a:pPr>
+            <a:r>
+              <a:rPr lang="en-US" sz="850" dirty="0">
+                <a:solidFill>
+                  <a:srgbClr val="475569"/>
+                </a:solidFill>
+                <a:latin typeface="Calibri" pitchFamily="34" charset="0"/>
+                <a:ea typeface="Calibri" pitchFamily="34" charset="-122"/>
+                <a:cs typeface="Calibri" pitchFamily="34" charset="-120"/>
+              </a:rPr>
+              <a:t>to make or do</a:t>
+            </a:r>
+            <a:endParaRPr lang="en-US" sz="850" dirty="0"/>
+          </a:p>
+        </p:txBody>
+      </p:sp>
+      <p:sp>
+        <p:nvSpPr>
+          <p:cNvPr id="28" name="Text 26"/>
+          <p:cNvSpPr/>
+          <p:nvPr/>
+        </p:nvSpPr>
+        <p:spPr>
+          <a:xfrm>
+            <a:off x="6998818" y="2752344"/>
+            <a:ext cx="1581912" cy="182880"/>
+          </a:xfrm>
+          <a:prstGeom prst="rect">
+            <a:avLst/>
+          </a:prstGeom>
+          <a:noFill/>
+          <a:ln/>
+        </p:spPr>
+        <p:txBody>
+          <a:bodyPr wrap="square" lIns="0" tIns="0" rIns="0" bIns="0" rtlCol="0" anchor="t"/>
+          <a:lstStyle/>
+          <a:p>
+            <a:pPr algn="ctr" indent="0" marL="0">
+              <a:buNone/>
+            </a:pPr>
+            <a:r>
+              <a:rPr lang="en-US" sz="700" i="1" dirty="0">
+                <a:solidFill>
+                  <a:srgbClr val="94A3B8"/>
+                </a:solidFill>
+                <a:latin typeface="Calibri" pitchFamily="34" charset="0"/>
+                <a:ea typeface="Calibri" pitchFamily="34" charset="-122"/>
+                <a:cs typeface="Calibri" pitchFamily="34" charset="-120"/>
+              </a:rPr>
+              <a:t>Australian/British spelling of -ize</a:t>
+            </a:r>
+            <a:endParaRPr lang="en-US" sz="700" dirty="0"/>
+          </a:p>
+        </p:txBody>
+      </p:sp>
+      <p:sp>
+        <p:nvSpPr>
+          <p:cNvPr id="29" name="Shape 27"/>
           <p:cNvSpPr/>
           <p:nvPr/>
         </p:nvSpPr>
@@ -22207,7 +22594,7 @@
       </p:sp>
       <p:sp>
         <p:nvSpPr>
-          <p:cNvPr id="26" name="Text 24"/>
+          <p:cNvPr id="30" name="Text 28"/>
           <p:cNvSpPr/>
           <p:nvPr/>
         </p:nvSpPr>
@@ -22246,7 +22633,7 @@
       </p:sp>
       <p:sp>
         <p:nvSpPr>
-          <p:cNvPr id="27" name="Shape 25"/>
+          <p:cNvPr id="31" name="Shape 29"/>
           <p:cNvSpPr/>
           <p:nvPr/>
         </p:nvSpPr>
@@ -22273,7 +22660,7 @@
       </p:sp>
       <p:sp>
         <p:nvSpPr>
-          <p:cNvPr id="28" name="Shape 26"/>
+          <p:cNvPr id="32" name="Shape 30"/>
           <p:cNvSpPr/>
           <p:nvPr/>
         </p:nvSpPr>
@@ -22300,7 +22687,7 @@
       </p:sp>
       <p:sp>
         <p:nvSpPr>
-          <p:cNvPr id="29" name="Text 27"/>
+          <p:cNvPr id="33" name="Text 31"/>
           <p:cNvSpPr/>
           <p:nvPr/>
         </p:nvSpPr>
@@ -22331,7 +22718,7 @@
                 <a:ea typeface="Trebuchet MS" pitchFamily="34" charset="-122"/>
                 <a:cs typeface="Trebuchet MS" pitchFamily="34" charset="-120"/>
               </a:rPr>
-              <a:t>vi</a:t>
+              <a:t>re</a:t>
             </a:r>
             <a:endParaRPr lang="en-US" sz="1400" dirty="0"/>
           </a:p>
@@ -22339,7 +22726,7 @@
       </p:sp>
       <p:sp>
         <p:nvSpPr>
-          <p:cNvPr id="30" name="Text 28"/>
+          <p:cNvPr id="34" name="Text 32"/>
           <p:cNvSpPr/>
           <p:nvPr/>
         </p:nvSpPr>
@@ -22378,7 +22765,7 @@
       </p:sp>
       <p:sp>
         <p:nvSpPr>
-          <p:cNvPr id="31" name="Shape 29"/>
+          <p:cNvPr id="35" name="Shape 33"/>
           <p:cNvSpPr/>
           <p:nvPr/>
         </p:nvSpPr>
@@ -22405,7 +22792,7 @@
       </p:sp>
       <p:sp>
         <p:nvSpPr>
-          <p:cNvPr id="32" name="Text 30"/>
+          <p:cNvPr id="36" name="Text 34"/>
           <p:cNvSpPr/>
           <p:nvPr/>
         </p:nvSpPr>
@@ -22436,7 +22823,7 @@
                 <a:ea typeface="Trebuchet MS" pitchFamily="34" charset="-122"/>
                 <a:cs typeface="Trebuchet MS" pitchFamily="34" charset="-120"/>
               </a:rPr>
-              <a:t>tal</a:t>
+              <a:t>vi</a:t>
             </a:r>
             <a:endParaRPr lang="en-US" sz="1400" dirty="0"/>
           </a:p>
@@ -22444,7 +22831,7 @@
       </p:sp>
       <p:sp>
         <p:nvSpPr>
-          <p:cNvPr id="33" name="Text 31"/>
+          <p:cNvPr id="37" name="Text 35"/>
           <p:cNvSpPr/>
           <p:nvPr/>
         </p:nvSpPr>
@@ -22483,7 +22870,7 @@
       </p:sp>
       <p:sp>
         <p:nvSpPr>
-          <p:cNvPr id="34" name="Shape 32"/>
+          <p:cNvPr id="38" name="Shape 36"/>
           <p:cNvSpPr/>
           <p:nvPr/>
         </p:nvSpPr>
@@ -22510,7 +22897,7 @@
       </p:sp>
       <p:sp>
         <p:nvSpPr>
-          <p:cNvPr id="35" name="Text 33"/>
+          <p:cNvPr id="39" name="Text 37"/>
           <p:cNvSpPr/>
           <p:nvPr/>
         </p:nvSpPr>
@@ -22541,7 +22928,7 @@
                 <a:ea typeface="Trebuchet MS" pitchFamily="34" charset="-122"/>
                 <a:cs typeface="Trebuchet MS" pitchFamily="34" charset="-120"/>
               </a:rPr>
-              <a:t>i</a:t>
+              <a:t>tal</a:t>
             </a:r>
             <a:endParaRPr lang="en-US" sz="1400" dirty="0"/>
           </a:p>
@@ -22549,7 +22936,7 @@
       </p:sp>
       <p:sp>
         <p:nvSpPr>
-          <p:cNvPr id="36" name="Text 34"/>
+          <p:cNvPr id="40" name="Text 38"/>
           <p:cNvSpPr/>
           <p:nvPr/>
         </p:nvSpPr>
@@ -22588,7 +22975,7 @@
       </p:sp>
       <p:sp>
         <p:nvSpPr>
-          <p:cNvPr id="37" name="Shape 35"/>
+          <p:cNvPr id="41" name="Shape 39"/>
           <p:cNvSpPr/>
           <p:nvPr/>
         </p:nvSpPr>
@@ -22615,7 +23002,7 @@
       </p:sp>
       <p:sp>
         <p:nvSpPr>
-          <p:cNvPr id="38" name="Text 36"/>
+          <p:cNvPr id="42" name="Text 40"/>
           <p:cNvSpPr/>
           <p:nvPr/>
         </p:nvSpPr>
@@ -22646,7 +23033,7 @@
                 <a:ea typeface="Trebuchet MS" pitchFamily="34" charset="-122"/>
                 <a:cs typeface="Trebuchet MS" pitchFamily="34" charset="-120"/>
               </a:rPr>
-              <a:t>ty</a:t>
+              <a:t>ise</a:t>
             </a:r>
             <a:endParaRPr lang="en-US" sz="1400" dirty="0"/>
           </a:p>
@@ -22654,7 +23041,7 @@
       </p:sp>
       <p:sp>
         <p:nvSpPr>
-          <p:cNvPr id="39" name="Shape 37"/>
+          <p:cNvPr id="43" name="Shape 41"/>
           <p:cNvSpPr/>
           <p:nvPr/>
         </p:nvSpPr>
@@ -22681,7 +23068,7 @@
       </p:sp>
       <p:sp>
         <p:nvSpPr>
-          <p:cNvPr id="40" name="Text 38"/>
+          <p:cNvPr id="44" name="Text 42"/>
           <p:cNvSpPr/>
           <p:nvPr/>
         </p:nvSpPr>
@@ -22720,18 +23107,18 @@
       </p:sp>
       <p:sp>
         <p:nvSpPr>
-          <p:cNvPr id="41" name="Shape 39"/>
+          <p:cNvPr id="45" name="Shape 43"/>
           <p:cNvSpPr/>
           <p:nvPr/>
         </p:nvSpPr>
         <p:spPr>
           <a:xfrm>
             <a:off x="1874520" y="4096512"/>
-            <a:ext cx="6903720" cy="658368"/>
+            <a:ext cx="6903720" cy="804672"/>
           </a:xfrm>
           <a:prstGeom prst="rect">
             <a:avLst>
-              <a:gd name="adj" fmla="val 8333"/>
+              <a:gd name="adj" fmla="val 6818"/>
             </a:avLst>
           </a:prstGeom>
           <a:solidFill>
@@ -22747,18 +23134,18 @@
       </p:sp>
       <p:sp>
         <p:nvSpPr>
-          <p:cNvPr id="42" name="Shape 40"/>
+          <p:cNvPr id="46" name="Shape 44"/>
           <p:cNvSpPr/>
           <p:nvPr/>
         </p:nvSpPr>
         <p:spPr>
           <a:xfrm>
             <a:off x="2023872" y="4169664"/>
-            <a:ext cx="685800" cy="475488"/>
+            <a:ext cx="685800" cy="384048"/>
           </a:xfrm>
           <a:prstGeom prst="rect">
             <a:avLst>
-              <a:gd name="adj" fmla="val 7692"/>
+              <a:gd name="adj" fmla="val 9524"/>
             </a:avLst>
           </a:prstGeom>
           <a:solidFill>
@@ -22774,14 +23161,14 @@
       </p:sp>
       <p:sp>
         <p:nvSpPr>
-          <p:cNvPr id="43" name="Text 41"/>
+          <p:cNvPr id="47" name="Text 45"/>
           <p:cNvSpPr/>
           <p:nvPr/>
         </p:nvSpPr>
         <p:spPr>
           <a:xfrm>
             <a:off x="2023872" y="4169664"/>
-            <a:ext cx="685800" cy="475488"/>
+            <a:ext cx="685800" cy="384048"/>
           </a:xfrm>
           <a:prstGeom prst="rect">
             <a:avLst/>
@@ -22805,7 +23192,7 @@
                 <a:ea typeface="Trebuchet MS" pitchFamily="34" charset="-122"/>
                 <a:cs typeface="Trebuchet MS" pitchFamily="34" charset="-120"/>
               </a:rPr>
-              <a:t>v</a:t>
+              <a:t>r</a:t>
             </a:r>
             <a:endParaRPr lang="en-US" sz="900" dirty="0"/>
           </a:p>
@@ -22813,18 +23200,18 @@
       </p:sp>
       <p:sp>
         <p:nvSpPr>
-          <p:cNvPr id="44" name="Shape 42"/>
+          <p:cNvPr id="48" name="Shape 46"/>
           <p:cNvSpPr/>
           <p:nvPr/>
         </p:nvSpPr>
         <p:spPr>
           <a:xfrm>
             <a:off x="2831592" y="4169664"/>
-            <a:ext cx="685800" cy="475488"/>
+            <a:ext cx="685800" cy="384048"/>
           </a:xfrm>
           <a:prstGeom prst="rect">
             <a:avLst>
-              <a:gd name="adj" fmla="val 7692"/>
+              <a:gd name="adj" fmla="val 9524"/>
             </a:avLst>
           </a:prstGeom>
           <a:solidFill>
@@ -22840,14 +23227,14 @@
       </p:sp>
       <p:sp>
         <p:nvSpPr>
-          <p:cNvPr id="45" name="Text 43"/>
+          <p:cNvPr id="49" name="Text 47"/>
           <p:cNvSpPr/>
           <p:nvPr/>
         </p:nvSpPr>
         <p:spPr>
           <a:xfrm>
             <a:off x="2831592" y="4169664"/>
-            <a:ext cx="685800" cy="475488"/>
+            <a:ext cx="685800" cy="384048"/>
           </a:xfrm>
           <a:prstGeom prst="rect">
             <a:avLst/>
@@ -22871,7 +23258,7 @@
                 <a:ea typeface="Trebuchet MS" pitchFamily="34" charset="-122"/>
                 <a:cs typeface="Trebuchet MS" pitchFamily="34" charset="-120"/>
               </a:rPr>
-              <a:t>i</a:t>
+              <a:t>e</a:t>
             </a:r>
             <a:endParaRPr lang="en-US" sz="900" dirty="0"/>
           </a:p>
@@ -22879,18 +23266,18 @@
       </p:sp>
       <p:sp>
         <p:nvSpPr>
-          <p:cNvPr id="46" name="Shape 44"/>
+          <p:cNvPr id="50" name="Shape 48"/>
           <p:cNvSpPr/>
           <p:nvPr/>
         </p:nvSpPr>
         <p:spPr>
           <a:xfrm>
             <a:off x="3639312" y="4169664"/>
-            <a:ext cx="685800" cy="475488"/>
+            <a:ext cx="685800" cy="384048"/>
           </a:xfrm>
           <a:prstGeom prst="rect">
             <a:avLst>
-              <a:gd name="adj" fmla="val 7692"/>
+              <a:gd name="adj" fmla="val 9524"/>
             </a:avLst>
           </a:prstGeom>
           <a:solidFill>
@@ -22906,14 +23293,14 @@
       </p:sp>
       <p:sp>
         <p:nvSpPr>
-          <p:cNvPr id="47" name="Text 45"/>
+          <p:cNvPr id="51" name="Text 49"/>
           <p:cNvSpPr/>
           <p:nvPr/>
         </p:nvSpPr>
         <p:spPr>
           <a:xfrm>
             <a:off x="3639312" y="4169664"/>
-            <a:ext cx="685800" cy="475488"/>
+            <a:ext cx="685800" cy="384048"/>
           </a:xfrm>
           <a:prstGeom prst="rect">
             <a:avLst/>
@@ -22937,7 +23324,7 @@
                 <a:ea typeface="Trebuchet MS" pitchFamily="34" charset="-122"/>
                 <a:cs typeface="Trebuchet MS" pitchFamily="34" charset="-120"/>
               </a:rPr>
-              <a:t>t</a:t>
+              <a:t>v</a:t>
             </a:r>
             <a:endParaRPr lang="en-US" sz="900" dirty="0"/>
           </a:p>
@@ -22945,18 +23332,18 @@
       </p:sp>
       <p:sp>
         <p:nvSpPr>
-          <p:cNvPr id="48" name="Shape 46"/>
+          <p:cNvPr id="52" name="Shape 50"/>
           <p:cNvSpPr/>
           <p:nvPr/>
         </p:nvSpPr>
         <p:spPr>
           <a:xfrm>
             <a:off x="4447032" y="4169664"/>
-            <a:ext cx="685800" cy="475488"/>
+            <a:ext cx="685800" cy="384048"/>
           </a:xfrm>
           <a:prstGeom prst="rect">
             <a:avLst>
-              <a:gd name="adj" fmla="val 7692"/>
+              <a:gd name="adj" fmla="val 9524"/>
             </a:avLst>
           </a:prstGeom>
           <a:solidFill>
@@ -22972,14 +23359,14 @@
       </p:sp>
       <p:sp>
         <p:nvSpPr>
-          <p:cNvPr id="49" name="Text 47"/>
+          <p:cNvPr id="53" name="Text 51"/>
           <p:cNvSpPr/>
           <p:nvPr/>
         </p:nvSpPr>
         <p:spPr>
           <a:xfrm>
             <a:off x="4447032" y="4169664"/>
-            <a:ext cx="685800" cy="475488"/>
+            <a:ext cx="685800" cy="384048"/>
           </a:xfrm>
           <a:prstGeom prst="rect">
             <a:avLst/>
@@ -23003,7 +23390,7 @@
                 <a:ea typeface="Trebuchet MS" pitchFamily="34" charset="-122"/>
                 <a:cs typeface="Trebuchet MS" pitchFamily="34" charset="-120"/>
               </a:rPr>
-              <a:t>a</a:t>
+              <a:t>i</a:t>
             </a:r>
             <a:endParaRPr lang="en-US" sz="900" dirty="0"/>
           </a:p>
@@ -23011,18 +23398,18 @@
       </p:sp>
       <p:sp>
         <p:nvSpPr>
-          <p:cNvPr id="50" name="Shape 48"/>
+          <p:cNvPr id="54" name="Shape 52"/>
           <p:cNvSpPr/>
           <p:nvPr/>
         </p:nvSpPr>
         <p:spPr>
           <a:xfrm>
             <a:off x="5254752" y="4169664"/>
-            <a:ext cx="685800" cy="475488"/>
+            <a:ext cx="685800" cy="384048"/>
           </a:xfrm>
           <a:prstGeom prst="rect">
             <a:avLst>
-              <a:gd name="adj" fmla="val 7692"/>
+              <a:gd name="adj" fmla="val 9524"/>
             </a:avLst>
           </a:prstGeom>
           <a:solidFill>
@@ -23038,14 +23425,14 @@
       </p:sp>
       <p:sp>
         <p:nvSpPr>
-          <p:cNvPr id="51" name="Text 49"/>
+          <p:cNvPr id="55" name="Text 53"/>
           <p:cNvSpPr/>
           <p:nvPr/>
         </p:nvSpPr>
         <p:spPr>
           <a:xfrm>
             <a:off x="5254752" y="4169664"/>
-            <a:ext cx="685800" cy="475488"/>
+            <a:ext cx="685800" cy="384048"/>
           </a:xfrm>
           <a:prstGeom prst="rect">
             <a:avLst/>
@@ -23069,7 +23456,7 @@
                 <a:ea typeface="Trebuchet MS" pitchFamily="34" charset="-122"/>
                 <a:cs typeface="Trebuchet MS" pitchFamily="34" charset="-120"/>
               </a:rPr>
-              <a:t>l</a:t>
+              <a:t>t</a:t>
             </a:r>
             <a:endParaRPr lang="en-US" sz="900" dirty="0"/>
           </a:p>
@@ -23077,18 +23464,18 @@
       </p:sp>
       <p:sp>
         <p:nvSpPr>
-          <p:cNvPr id="52" name="Shape 50"/>
+          <p:cNvPr id="56" name="Shape 54"/>
           <p:cNvSpPr/>
           <p:nvPr/>
         </p:nvSpPr>
         <p:spPr>
           <a:xfrm>
             <a:off x="6062472" y="4169664"/>
-            <a:ext cx="685800" cy="475488"/>
+            <a:ext cx="685800" cy="384048"/>
           </a:xfrm>
           <a:prstGeom prst="rect">
             <a:avLst>
-              <a:gd name="adj" fmla="val 7692"/>
+              <a:gd name="adj" fmla="val 9524"/>
             </a:avLst>
           </a:prstGeom>
           <a:solidFill>
@@ -23104,14 +23491,14 @@
       </p:sp>
       <p:sp>
         <p:nvSpPr>
-          <p:cNvPr id="53" name="Text 51"/>
+          <p:cNvPr id="57" name="Text 55"/>
           <p:cNvSpPr/>
           <p:nvPr/>
         </p:nvSpPr>
         <p:spPr>
           <a:xfrm>
             <a:off x="6062472" y="4169664"/>
-            <a:ext cx="685800" cy="475488"/>
+            <a:ext cx="685800" cy="384048"/>
           </a:xfrm>
           <a:prstGeom prst="rect">
             <a:avLst/>
@@ -23135,7 +23522,7 @@
                 <a:ea typeface="Trebuchet MS" pitchFamily="34" charset="-122"/>
                 <a:cs typeface="Trebuchet MS" pitchFamily="34" charset="-120"/>
               </a:rPr>
-              <a:t>i</a:t>
+              <a:t>al</a:t>
             </a:r>
             <a:endParaRPr lang="en-US" sz="900" dirty="0"/>
           </a:p>
@@ -23143,18 +23530,18 @@
       </p:sp>
       <p:sp>
         <p:nvSpPr>
-          <p:cNvPr id="54" name="Shape 52"/>
+          <p:cNvPr id="58" name="Shape 56"/>
           <p:cNvSpPr/>
           <p:nvPr/>
         </p:nvSpPr>
         <p:spPr>
           <a:xfrm>
             <a:off x="6870192" y="4169664"/>
-            <a:ext cx="685800" cy="475488"/>
+            <a:ext cx="685800" cy="384048"/>
           </a:xfrm>
           <a:prstGeom prst="rect">
             <a:avLst>
-              <a:gd name="adj" fmla="val 7692"/>
+              <a:gd name="adj" fmla="val 9524"/>
             </a:avLst>
           </a:prstGeom>
           <a:solidFill>
@@ -23170,14 +23557,14 @@
       </p:sp>
       <p:sp>
         <p:nvSpPr>
-          <p:cNvPr id="55" name="Text 53"/>
+          <p:cNvPr id="59" name="Text 57"/>
           <p:cNvSpPr/>
           <p:nvPr/>
         </p:nvSpPr>
         <p:spPr>
           <a:xfrm>
             <a:off x="6870192" y="4169664"/>
-            <a:ext cx="685800" cy="475488"/>
+            <a:ext cx="685800" cy="384048"/>
           </a:xfrm>
           <a:prstGeom prst="rect">
             <a:avLst/>
@@ -23201,7 +23588,7 @@
                 <a:ea typeface="Trebuchet MS" pitchFamily="34" charset="-122"/>
                 <a:cs typeface="Trebuchet MS" pitchFamily="34" charset="-120"/>
               </a:rPr>
-              <a:t>t</a:t>
+              <a:t>i</a:t>
             </a:r>
             <a:endParaRPr lang="en-US" sz="900" dirty="0"/>
           </a:p>
@@ -23209,18 +23596,18 @@
       </p:sp>
       <p:sp>
         <p:nvSpPr>
-          <p:cNvPr id="56" name="Shape 54"/>
+          <p:cNvPr id="60" name="Shape 58"/>
           <p:cNvSpPr/>
           <p:nvPr/>
         </p:nvSpPr>
         <p:spPr>
           <a:xfrm>
             <a:off x="7677912" y="4169664"/>
-            <a:ext cx="685800" cy="475488"/>
+            <a:ext cx="685800" cy="384048"/>
           </a:xfrm>
           <a:prstGeom prst="rect">
             <a:avLst>
-              <a:gd name="adj" fmla="val 7692"/>
+              <a:gd name="adj" fmla="val 9524"/>
             </a:avLst>
           </a:prstGeom>
           <a:solidFill>
@@ -23236,14 +23623,14 @@
       </p:sp>
       <p:sp>
         <p:nvSpPr>
-          <p:cNvPr id="57" name="Text 55"/>
+          <p:cNvPr id="61" name="Text 59"/>
           <p:cNvSpPr/>
           <p:nvPr/>
         </p:nvSpPr>
         <p:spPr>
           <a:xfrm>
             <a:off x="7677912" y="4169664"/>
-            <a:ext cx="685800" cy="475488"/>
+            <a:ext cx="685800" cy="384048"/>
           </a:xfrm>
           <a:prstGeom prst="rect">
             <a:avLst/>
@@ -23267,9 +23654,48 @@
                 <a:ea typeface="Trebuchet MS" pitchFamily="34" charset="-122"/>
                 <a:cs typeface="Trebuchet MS" pitchFamily="34" charset="-120"/>
               </a:rPr>
-              <a:t>y</a:t>
+              <a:t>se</a:t>
             </a:r>
             <a:endParaRPr lang="en-US" sz="900" dirty="0"/>
+          </a:p>
+        </p:txBody>
+      </p:sp>
+      <p:sp>
+        <p:nvSpPr>
+          <p:cNvPr id="62" name="Text 60"/>
+          <p:cNvSpPr/>
+          <p:nvPr/>
+        </p:nvSpPr>
+        <p:spPr>
+          <a:xfrm>
+            <a:off x="7677912" y="4572000"/>
+            <a:ext cx="685800" cy="219456"/>
+          </a:xfrm>
+          <a:prstGeom prst="rect">
+            <a:avLst/>
+          </a:prstGeom>
+          <a:noFill/>
+          <a:ln/>
+        </p:spPr>
+        <p:txBody>
+          <a:bodyPr wrap="square" lIns="0" tIns="0" rIns="0" bIns="0" rtlCol="0" anchor="t"/>
+          <a:lstStyle/>
+          <a:p>
+            <a:pPr algn="ctr" indent="0" marL="0">
+              <a:buNone/>
+            </a:pPr>
+            <a:r>
+              <a:rPr lang="en-US" sz="750" i="1" dirty="0">
+                <a:solidFill>
+                  <a:srgbClr val="94A3B8"/>
+                </a:solidFill>
+                <a:latin typeface="Calibri" pitchFamily="34" charset="0"/>
+                <a:ea typeface="Calibri" pitchFamily="34" charset="-122"/>
+                <a:cs typeface="Calibri" pitchFamily="34" charset="-120"/>
+              </a:rPr>
+              <a:t>/z/</a:t>
+            </a:r>
+            <a:endParaRPr lang="en-US" sz="750" dirty="0"/>
           </a:p>
         </p:txBody>
       </p:sp>
@@ -23698,7 +24124,7 @@
                 <a:ea typeface="Trebuchet MS" pitchFamily="34" charset="-122"/>
                 <a:cs typeface="Trebuchet MS" pitchFamily="34" charset="-120"/>
               </a:rPr>
-              <a:t>vital</a:t>
+              <a:t>vitality</a:t>
             </a:r>
             <a:endParaRPr lang="en-US" sz="2800" dirty="0"/>
           </a:p>
@@ -24525,7 +24951,7 @@
                 <a:ea typeface="Trebuchet MS" pitchFamily="34" charset="-122"/>
                 <a:cs typeface="Trebuchet MS" pitchFamily="34" charset="-120"/>
               </a:rPr>
-              <a:t>vital</a:t>
+              <a:t>vitality</a:t>
             </a:r>
             <a:endParaRPr lang="en-US" sz="2800" dirty="0"/>
           </a:p>
@@ -24605,7 +25031,7 @@
         </p:nvSpPr>
         <p:spPr>
           <a:xfrm>
-            <a:off x="2938272" y="2258568"/>
+            <a:off x="2221992" y="2258568"/>
             <a:ext cx="1828800" cy="292608"/>
           </a:xfrm>
           <a:prstGeom prst="rect">
@@ -24639,7 +25065,7 @@
         </p:nvSpPr>
         <p:spPr>
           <a:xfrm>
-            <a:off x="2938272" y="2258568"/>
+            <a:off x="2221992" y="2258568"/>
             <a:ext cx="1828800" cy="292608"/>
           </a:xfrm>
           <a:prstGeom prst="rect">
@@ -24678,7 +25104,7 @@
         </p:nvSpPr>
         <p:spPr>
           <a:xfrm>
-            <a:off x="2938272" y="2569464"/>
+            <a:off x="2221992" y="2569464"/>
             <a:ext cx="1828800" cy="201168"/>
           </a:xfrm>
           <a:prstGeom prst="rect">
@@ -24717,7 +25143,7 @@
         </p:nvSpPr>
         <p:spPr>
           <a:xfrm>
-            <a:off x="5803392" y="2258568"/>
+            <a:off x="4370832" y="2258568"/>
             <a:ext cx="1828800" cy="292608"/>
           </a:xfrm>
           <a:prstGeom prst="rect">
@@ -24751,7 +25177,7 @@
         </p:nvSpPr>
         <p:spPr>
           <a:xfrm>
-            <a:off x="5803392" y="2258568"/>
+            <a:off x="4370832" y="2258568"/>
             <a:ext cx="1828800" cy="292608"/>
           </a:xfrm>
           <a:prstGeom prst="rect">
@@ -24790,7 +25216,7 @@
         </p:nvSpPr>
         <p:spPr>
           <a:xfrm>
-            <a:off x="5803392" y="2569464"/>
+            <a:off x="4370832" y="2569464"/>
             <a:ext cx="1828800" cy="201168"/>
           </a:xfrm>
           <a:prstGeom prst="rect">
@@ -24829,6 +25255,118 @@
         </p:nvSpPr>
         <p:spPr>
           <a:xfrm>
+            <a:off x="6519672" y="2258568"/>
+            <a:ext cx="1828800" cy="292608"/>
+          </a:xfrm>
+          <a:prstGeom prst="rect">
+            <a:avLst>
+              <a:gd name="adj" fmla="val 25000"/>
+            </a:avLst>
+          </a:prstGeom>
+          <a:solidFill>
+            <a:srgbClr val="FCE7F3"/>
+          </a:solidFill>
+          <a:ln w="19050">
+            <a:solidFill>
+              <a:srgbClr val="DB2777"/>
+            </a:solidFill>
+            <a:prstDash val="solid"/>
+          </a:ln>
+          <a:effectLst>
+            <a:outerShdw sx="100000" sy="100000" kx="0" ky="0" algn="bl" rotWithShape="0" blurRad="101600" dist="38100" dir="8100000">
+              <a:srgbClr val="000000">
+                <a:alpha val="12000"/>
+              </a:srgbClr>
+            </a:outerShdw>
+          </a:effectLst>
+        </p:spPr>
+      </p:sp>
+      <p:sp>
+        <p:nvSpPr>
+          <p:cNvPr id="23" name="Text 21"/>
+          <p:cNvSpPr/>
+          <p:nvPr/>
+        </p:nvSpPr>
+        <p:spPr>
+          <a:xfrm>
+            <a:off x="6519672" y="2258568"/>
+            <a:ext cx="1828800" cy="292608"/>
+          </a:xfrm>
+          <a:prstGeom prst="rect">
+            <a:avLst/>
+          </a:prstGeom>
+          <a:noFill/>
+          <a:ln/>
+        </p:spPr>
+        <p:txBody>
+          <a:bodyPr wrap="square" lIns="0" tIns="0" rIns="0" bIns="0" rtlCol="0" anchor="ctr"/>
+          <a:lstStyle/>
+          <a:p>
+            <a:pPr algn="ctr" indent="0" marL="0">
+              <a:buNone/>
+            </a:pPr>
+            <a:r>
+              <a:rPr lang="en-US" sz="1300" b="1" dirty="0">
+                <a:solidFill>
+                  <a:srgbClr val="9D174D"/>
+                </a:solidFill>
+                <a:latin typeface="Trebuchet MS" pitchFamily="34" charset="0"/>
+                <a:ea typeface="Trebuchet MS" pitchFamily="34" charset="-122"/>
+                <a:cs typeface="Trebuchet MS" pitchFamily="34" charset="-120"/>
+              </a:rPr>
+              <a:t>ity</a:t>
+            </a:r>
+            <a:endParaRPr lang="en-US" sz="1300" dirty="0"/>
+          </a:p>
+        </p:txBody>
+      </p:sp>
+      <p:sp>
+        <p:nvSpPr>
+          <p:cNvPr id="24" name="Text 22"/>
+          <p:cNvSpPr/>
+          <p:nvPr/>
+        </p:nvSpPr>
+        <p:spPr>
+          <a:xfrm>
+            <a:off x="6519672" y="2569464"/>
+            <a:ext cx="1828800" cy="201168"/>
+          </a:xfrm>
+          <a:prstGeom prst="rect">
+            <a:avLst/>
+          </a:prstGeom>
+          <a:noFill/>
+          <a:ln/>
+        </p:spPr>
+        <p:txBody>
+          <a:bodyPr wrap="square" lIns="0" tIns="0" rIns="0" bIns="0" rtlCol="0" anchor="t"/>
+          <a:lstStyle/>
+          <a:p>
+            <a:pPr algn="ctr" indent="0" marL="0">
+              <a:buNone/>
+            </a:pPr>
+            <a:r>
+              <a:rPr lang="en-US" sz="850" dirty="0">
+                <a:solidFill>
+                  <a:srgbClr val="475569"/>
+                </a:solidFill>
+                <a:latin typeface="Calibri" pitchFamily="34" charset="0"/>
+                <a:ea typeface="Calibri" pitchFamily="34" charset="-122"/>
+                <a:cs typeface="Calibri" pitchFamily="34" charset="-120"/>
+              </a:rPr>
+              <a:t>state or quality of</a:t>
+            </a:r>
+            <a:endParaRPr lang="en-US" sz="850" dirty="0"/>
+          </a:p>
+        </p:txBody>
+      </p:sp>
+      <p:sp>
+        <p:nvSpPr>
+          <p:cNvPr id="25" name="Shape 23"/>
+          <p:cNvSpPr/>
+          <p:nvPr/>
+        </p:nvSpPr>
+        <p:spPr>
+          <a:xfrm>
             <a:off x="365760" y="3273552"/>
             <a:ext cx="1371600" cy="658368"/>
           </a:xfrm>
@@ -24850,7 +25388,7 @@
       </p:sp>
       <p:sp>
         <p:nvSpPr>
-          <p:cNvPr id="23" name="Text 21"/>
+          <p:cNvPr id="26" name="Text 24"/>
           <p:cNvSpPr/>
           <p:nvPr/>
         </p:nvSpPr>
@@ -24889,7 +25427,7 @@
       </p:sp>
       <p:sp>
         <p:nvSpPr>
-          <p:cNvPr id="24" name="Shape 22"/>
+          <p:cNvPr id="27" name="Shape 25"/>
           <p:cNvSpPr/>
           <p:nvPr/>
         </p:nvSpPr>
@@ -24916,7 +25454,7 @@
       </p:sp>
       <p:sp>
         <p:nvSpPr>
-          <p:cNvPr id="25" name="Text 23"/>
+          <p:cNvPr id="28" name="Text 26"/>
           <p:cNvSpPr/>
           <p:nvPr/>
         </p:nvSpPr>
@@ -24955,7 +25493,7 @@
       </p:sp>
       <p:sp>
         <p:nvSpPr>
-          <p:cNvPr id="26" name="Shape 24"/>
+          <p:cNvPr id="29" name="Shape 27"/>
           <p:cNvSpPr/>
           <p:nvPr/>
         </p:nvSpPr>
@@ -24982,7 +25520,7 @@
       </p:sp>
       <p:sp>
         <p:nvSpPr>
-          <p:cNvPr id="27" name="Text 25"/>
+          <p:cNvPr id="30" name="Text 28"/>
           <p:cNvSpPr/>
           <p:nvPr/>
         </p:nvSpPr>
@@ -25021,7 +25559,7 @@
       </p:sp>
       <p:sp>
         <p:nvSpPr>
-          <p:cNvPr id="28" name="Shape 26"/>
+          <p:cNvPr id="31" name="Shape 29"/>
           <p:cNvSpPr/>
           <p:nvPr/>
         </p:nvSpPr>
@@ -25048,7 +25586,7 @@
       </p:sp>
       <p:sp>
         <p:nvSpPr>
-          <p:cNvPr id="29" name="Text 27"/>
+          <p:cNvPr id="32" name="Text 30"/>
           <p:cNvSpPr/>
           <p:nvPr/>
         </p:nvSpPr>
@@ -26229,7 +26767,7 @@
                 <a:ea typeface="Trebuchet MS" pitchFamily="34" charset="-122"/>
                 <a:cs typeface="Trebuchet MS" pitchFamily="34" charset="-120"/>
               </a:rPr>
-              <a:t>vital</a:t>
+              <a:t>vitality</a:t>
             </a:r>
             <a:endParaRPr lang="en-US" sz="2800" dirty="0"/>
           </a:p>
@@ -26309,7 +26847,7 @@
         </p:nvSpPr>
         <p:spPr>
           <a:xfrm>
-            <a:off x="2938272" y="2258568"/>
+            <a:off x="2221992" y="2258568"/>
             <a:ext cx="1828800" cy="292608"/>
           </a:xfrm>
           <a:prstGeom prst="rect">
@@ -26343,7 +26881,7 @@
         </p:nvSpPr>
         <p:spPr>
           <a:xfrm>
-            <a:off x="2938272" y="2258568"/>
+            <a:off x="2221992" y="2258568"/>
             <a:ext cx="1828800" cy="292608"/>
           </a:xfrm>
           <a:prstGeom prst="rect">
@@ -26382,7 +26920,7 @@
         </p:nvSpPr>
         <p:spPr>
           <a:xfrm>
-            <a:off x="2938272" y="2569464"/>
+            <a:off x="2221992" y="2569464"/>
             <a:ext cx="1828800" cy="201168"/>
           </a:xfrm>
           <a:prstGeom prst="rect">
@@ -26421,7 +26959,7 @@
         </p:nvSpPr>
         <p:spPr>
           <a:xfrm>
-            <a:off x="5803392" y="2258568"/>
+            <a:off x="4370832" y="2258568"/>
             <a:ext cx="1828800" cy="292608"/>
           </a:xfrm>
           <a:prstGeom prst="rect">
@@ -26455,7 +26993,7 @@
         </p:nvSpPr>
         <p:spPr>
           <a:xfrm>
-            <a:off x="5803392" y="2258568"/>
+            <a:off x="4370832" y="2258568"/>
             <a:ext cx="1828800" cy="292608"/>
           </a:xfrm>
           <a:prstGeom prst="rect">
@@ -26494,7 +27032,7 @@
         </p:nvSpPr>
         <p:spPr>
           <a:xfrm>
-            <a:off x="5803392" y="2569464"/>
+            <a:off x="4370832" y="2569464"/>
             <a:ext cx="1828800" cy="201168"/>
           </a:xfrm>
           <a:prstGeom prst="rect">
@@ -26533,6 +27071,118 @@
         </p:nvSpPr>
         <p:spPr>
           <a:xfrm>
+            <a:off x="6519672" y="2258568"/>
+            <a:ext cx="1828800" cy="292608"/>
+          </a:xfrm>
+          <a:prstGeom prst="rect">
+            <a:avLst>
+              <a:gd name="adj" fmla="val 25000"/>
+            </a:avLst>
+          </a:prstGeom>
+          <a:solidFill>
+            <a:srgbClr val="FCE7F3"/>
+          </a:solidFill>
+          <a:ln w="19050">
+            <a:solidFill>
+              <a:srgbClr val="DB2777"/>
+            </a:solidFill>
+            <a:prstDash val="solid"/>
+          </a:ln>
+          <a:effectLst>
+            <a:outerShdw sx="100000" sy="100000" kx="0" ky="0" algn="bl" rotWithShape="0" blurRad="101600" dist="38100" dir="8100000">
+              <a:srgbClr val="000000">
+                <a:alpha val="12000"/>
+              </a:srgbClr>
+            </a:outerShdw>
+          </a:effectLst>
+        </p:spPr>
+      </p:sp>
+      <p:sp>
+        <p:nvSpPr>
+          <p:cNvPr id="23" name="Text 21"/>
+          <p:cNvSpPr/>
+          <p:nvPr/>
+        </p:nvSpPr>
+        <p:spPr>
+          <a:xfrm>
+            <a:off x="6519672" y="2258568"/>
+            <a:ext cx="1828800" cy="292608"/>
+          </a:xfrm>
+          <a:prstGeom prst="rect">
+            <a:avLst/>
+          </a:prstGeom>
+          <a:noFill/>
+          <a:ln/>
+        </p:spPr>
+        <p:txBody>
+          <a:bodyPr wrap="square" lIns="0" tIns="0" rIns="0" bIns="0" rtlCol="0" anchor="ctr"/>
+          <a:lstStyle/>
+          <a:p>
+            <a:pPr algn="ctr" indent="0" marL="0">
+              <a:buNone/>
+            </a:pPr>
+            <a:r>
+              <a:rPr lang="en-US" sz="1300" b="1" dirty="0">
+                <a:solidFill>
+                  <a:srgbClr val="9D174D"/>
+                </a:solidFill>
+                <a:latin typeface="Trebuchet MS" pitchFamily="34" charset="0"/>
+                <a:ea typeface="Trebuchet MS" pitchFamily="34" charset="-122"/>
+                <a:cs typeface="Trebuchet MS" pitchFamily="34" charset="-120"/>
+              </a:rPr>
+              <a:t>ity</a:t>
+            </a:r>
+            <a:endParaRPr lang="en-US" sz="1300" dirty="0"/>
+          </a:p>
+        </p:txBody>
+      </p:sp>
+      <p:sp>
+        <p:nvSpPr>
+          <p:cNvPr id="24" name="Text 22"/>
+          <p:cNvSpPr/>
+          <p:nvPr/>
+        </p:nvSpPr>
+        <p:spPr>
+          <a:xfrm>
+            <a:off x="6519672" y="2569464"/>
+            <a:ext cx="1828800" cy="201168"/>
+          </a:xfrm>
+          <a:prstGeom prst="rect">
+            <a:avLst/>
+          </a:prstGeom>
+          <a:noFill/>
+          <a:ln/>
+        </p:spPr>
+        <p:txBody>
+          <a:bodyPr wrap="square" lIns="0" tIns="0" rIns="0" bIns="0" rtlCol="0" anchor="t"/>
+          <a:lstStyle/>
+          <a:p>
+            <a:pPr algn="ctr" indent="0" marL="0">
+              <a:buNone/>
+            </a:pPr>
+            <a:r>
+              <a:rPr lang="en-US" sz="850" dirty="0">
+                <a:solidFill>
+                  <a:srgbClr val="475569"/>
+                </a:solidFill>
+                <a:latin typeface="Calibri" pitchFamily="34" charset="0"/>
+                <a:ea typeface="Calibri" pitchFamily="34" charset="-122"/>
+                <a:cs typeface="Calibri" pitchFamily="34" charset="-120"/>
+              </a:rPr>
+              <a:t>state or quality of</a:t>
+            </a:r>
+            <a:endParaRPr lang="en-US" sz="850" dirty="0"/>
+          </a:p>
+        </p:txBody>
+      </p:sp>
+      <p:sp>
+        <p:nvSpPr>
+          <p:cNvPr id="25" name="Shape 23"/>
+          <p:cNvSpPr/>
+          <p:nvPr/>
+        </p:nvSpPr>
+        <p:spPr>
+          <a:xfrm>
             <a:off x="365760" y="3273552"/>
             <a:ext cx="1371600" cy="658368"/>
           </a:xfrm>
@@ -26554,7 +27204,7 @@
       </p:sp>
       <p:sp>
         <p:nvSpPr>
-          <p:cNvPr id="23" name="Text 21"/>
+          <p:cNvPr id="26" name="Text 24"/>
           <p:cNvSpPr/>
           <p:nvPr/>
         </p:nvSpPr>
@@ -26593,7 +27243,7 @@
       </p:sp>
       <p:sp>
         <p:nvSpPr>
-          <p:cNvPr id="24" name="Shape 22"/>
+          <p:cNvPr id="27" name="Shape 25"/>
           <p:cNvSpPr/>
           <p:nvPr/>
         </p:nvSpPr>
@@ -26620,14 +27270,14 @@
       </p:sp>
       <p:sp>
         <p:nvSpPr>
-          <p:cNvPr id="25" name="Shape 23"/>
-          <p:cNvSpPr/>
-          <p:nvPr/>
-        </p:nvSpPr>
-        <p:spPr>
-          <a:xfrm>
-            <a:off x="2999232" y="3364992"/>
-            <a:ext cx="1645920" cy="475488"/>
+          <p:cNvPr id="28" name="Shape 26"/>
+          <p:cNvSpPr/>
+          <p:nvPr/>
+        </p:nvSpPr>
+        <p:spPr>
+          <a:xfrm>
+            <a:off x="1975104" y="3364992"/>
+            <a:ext cx="1554480" cy="475488"/>
           </a:xfrm>
           <a:prstGeom prst="rect">
             <a:avLst>
@@ -26647,14 +27297,14 @@
       </p:sp>
       <p:sp>
         <p:nvSpPr>
-          <p:cNvPr id="26" name="Text 24"/>
-          <p:cNvSpPr/>
-          <p:nvPr/>
-        </p:nvSpPr>
-        <p:spPr>
-          <a:xfrm>
-            <a:off x="2999232" y="3364992"/>
-            <a:ext cx="1645920" cy="475488"/>
+          <p:cNvPr id="29" name="Text 27"/>
+          <p:cNvSpPr/>
+          <p:nvPr/>
+        </p:nvSpPr>
+        <p:spPr>
+          <a:xfrm>
+            <a:off x="1975104" y="3364992"/>
+            <a:ext cx="1554480" cy="475488"/>
           </a:xfrm>
           <a:prstGeom prst="rect">
             <a:avLst/>
@@ -26686,14 +27336,14 @@
       </p:sp>
       <p:sp>
         <p:nvSpPr>
-          <p:cNvPr id="27" name="Text 25"/>
-          <p:cNvSpPr/>
-          <p:nvPr/>
-        </p:nvSpPr>
-        <p:spPr>
-          <a:xfrm>
-            <a:off x="4645152" y="3364992"/>
-            <a:ext cx="1097280" cy="475488"/>
+          <p:cNvPr id="30" name="Text 28"/>
+          <p:cNvSpPr/>
+          <p:nvPr/>
+        </p:nvSpPr>
+        <p:spPr>
+          <a:xfrm>
+            <a:off x="3529584" y="3364992"/>
+            <a:ext cx="73152" cy="475488"/>
           </a:xfrm>
           <a:prstGeom prst="rect">
             <a:avLst/>
@@ -26725,14 +27375,14 @@
       </p:sp>
       <p:sp>
         <p:nvSpPr>
-          <p:cNvPr id="28" name="Shape 26"/>
-          <p:cNvSpPr/>
-          <p:nvPr/>
-        </p:nvSpPr>
-        <p:spPr>
-          <a:xfrm>
-            <a:off x="5742432" y="3364992"/>
-            <a:ext cx="1645920" cy="475488"/>
+          <p:cNvPr id="31" name="Shape 29"/>
+          <p:cNvSpPr/>
+          <p:nvPr/>
+        </p:nvSpPr>
+        <p:spPr>
+          <a:xfrm>
+            <a:off x="3602736" y="3364992"/>
+            <a:ext cx="1554480" cy="475488"/>
           </a:xfrm>
           <a:prstGeom prst="rect">
             <a:avLst>
@@ -26752,14 +27402,14 @@
       </p:sp>
       <p:sp>
         <p:nvSpPr>
-          <p:cNvPr id="29" name="Text 27"/>
-          <p:cNvSpPr/>
-          <p:nvPr/>
-        </p:nvSpPr>
-        <p:spPr>
-          <a:xfrm>
-            <a:off x="5742432" y="3364992"/>
-            <a:ext cx="1645920" cy="475488"/>
+          <p:cNvPr id="32" name="Text 30"/>
+          <p:cNvSpPr/>
+          <p:nvPr/>
+        </p:nvSpPr>
+        <p:spPr>
+          <a:xfrm>
+            <a:off x="3602736" y="3364992"/>
+            <a:ext cx="1554480" cy="475488"/>
           </a:xfrm>
           <a:prstGeom prst="rect">
             <a:avLst/>
@@ -26791,7 +27441,217 @@
       </p:sp>
       <p:sp>
         <p:nvSpPr>
-          <p:cNvPr id="30" name="Shape 28"/>
+          <p:cNvPr id="33" name="Text 31"/>
+          <p:cNvSpPr/>
+          <p:nvPr/>
+        </p:nvSpPr>
+        <p:spPr>
+          <a:xfrm>
+            <a:off x="5157216" y="3364992"/>
+            <a:ext cx="73152" cy="475488"/>
+          </a:xfrm>
+          <a:prstGeom prst="rect">
+            <a:avLst/>
+          </a:prstGeom>
+          <a:noFill/>
+          <a:ln/>
+        </p:spPr>
+        <p:txBody>
+          <a:bodyPr wrap="square" lIns="0" tIns="0" rIns="0" bIns="0" rtlCol="0" anchor="ctr"/>
+          <a:lstStyle/>
+          <a:p>
+            <a:pPr algn="ctr" indent="0" marL="0">
+              <a:buNone/>
+            </a:pPr>
+            <a:r>
+              <a:rPr lang="en-US" sz="1600" b="1" dirty="0">
+                <a:solidFill>
+                  <a:srgbClr val="0D9488"/>
+                </a:solidFill>
+                <a:latin typeface="Trebuchet MS" pitchFamily="34" charset="0"/>
+                <a:ea typeface="Trebuchet MS" pitchFamily="34" charset="-122"/>
+                <a:cs typeface="Trebuchet MS" pitchFamily="34" charset="-120"/>
+              </a:rPr>
+              <a:t>·</a:t>
+            </a:r>
+            <a:endParaRPr lang="en-US" sz="1600" dirty="0"/>
+          </a:p>
+        </p:txBody>
+      </p:sp>
+      <p:sp>
+        <p:nvSpPr>
+          <p:cNvPr id="34" name="Shape 32"/>
+          <p:cNvSpPr/>
+          <p:nvPr/>
+        </p:nvSpPr>
+        <p:spPr>
+          <a:xfrm>
+            <a:off x="5230368" y="3364992"/>
+            <a:ext cx="1554480" cy="475488"/>
+          </a:xfrm>
+          <a:prstGeom prst="rect">
+            <a:avLst>
+              <a:gd name="adj" fmla="val 9615"/>
+            </a:avLst>
+          </a:prstGeom>
+          <a:solidFill>
+            <a:srgbClr val="FFFFFF"/>
+          </a:solidFill>
+          <a:ln w="12700">
+            <a:solidFill>
+              <a:srgbClr val="0D9488"/>
+            </a:solidFill>
+            <a:prstDash val="solid"/>
+          </a:ln>
+        </p:spPr>
+      </p:sp>
+      <p:sp>
+        <p:nvSpPr>
+          <p:cNvPr id="35" name="Text 33"/>
+          <p:cNvSpPr/>
+          <p:nvPr/>
+        </p:nvSpPr>
+        <p:spPr>
+          <a:xfrm>
+            <a:off x="5230368" y="3364992"/>
+            <a:ext cx="1554480" cy="475488"/>
+          </a:xfrm>
+          <a:prstGeom prst="rect">
+            <a:avLst/>
+          </a:prstGeom>
+          <a:noFill/>
+          <a:ln/>
+        </p:spPr>
+        <p:txBody>
+          <a:bodyPr wrap="square" lIns="0" tIns="0" rIns="0" bIns="0" rtlCol="0" anchor="ctr"/>
+          <a:lstStyle/>
+          <a:p>
+            <a:pPr algn="ctr" indent="0" marL="0">
+              <a:buNone/>
+            </a:pPr>
+            <a:r>
+              <a:rPr lang="en-US" sz="1400" b="1" dirty="0">
+                <a:solidFill>
+                  <a:srgbClr val="0D9488"/>
+                </a:solidFill>
+                <a:latin typeface="Trebuchet MS" pitchFamily="34" charset="0"/>
+                <a:ea typeface="Trebuchet MS" pitchFamily="34" charset="-122"/>
+                <a:cs typeface="Trebuchet MS" pitchFamily="34" charset="-120"/>
+              </a:rPr>
+              <a:t>i</a:t>
+            </a:r>
+            <a:endParaRPr lang="en-US" sz="1400" dirty="0"/>
+          </a:p>
+        </p:txBody>
+      </p:sp>
+      <p:sp>
+        <p:nvSpPr>
+          <p:cNvPr id="36" name="Text 34"/>
+          <p:cNvSpPr/>
+          <p:nvPr/>
+        </p:nvSpPr>
+        <p:spPr>
+          <a:xfrm>
+            <a:off x="6784848" y="3364992"/>
+            <a:ext cx="73152" cy="475488"/>
+          </a:xfrm>
+          <a:prstGeom prst="rect">
+            <a:avLst/>
+          </a:prstGeom>
+          <a:noFill/>
+          <a:ln/>
+        </p:spPr>
+        <p:txBody>
+          <a:bodyPr wrap="square" lIns="0" tIns="0" rIns="0" bIns="0" rtlCol="0" anchor="ctr"/>
+          <a:lstStyle/>
+          <a:p>
+            <a:pPr algn="ctr" indent="0" marL="0">
+              <a:buNone/>
+            </a:pPr>
+            <a:r>
+              <a:rPr lang="en-US" sz="1600" b="1" dirty="0">
+                <a:solidFill>
+                  <a:srgbClr val="0D9488"/>
+                </a:solidFill>
+                <a:latin typeface="Trebuchet MS" pitchFamily="34" charset="0"/>
+                <a:ea typeface="Trebuchet MS" pitchFamily="34" charset="-122"/>
+                <a:cs typeface="Trebuchet MS" pitchFamily="34" charset="-120"/>
+              </a:rPr>
+              <a:t>·</a:t>
+            </a:r>
+            <a:endParaRPr lang="en-US" sz="1600" dirty="0"/>
+          </a:p>
+        </p:txBody>
+      </p:sp>
+      <p:sp>
+        <p:nvSpPr>
+          <p:cNvPr id="37" name="Shape 35"/>
+          <p:cNvSpPr/>
+          <p:nvPr/>
+        </p:nvSpPr>
+        <p:spPr>
+          <a:xfrm>
+            <a:off x="6858000" y="3364992"/>
+            <a:ext cx="1554480" cy="475488"/>
+          </a:xfrm>
+          <a:prstGeom prst="rect">
+            <a:avLst>
+              <a:gd name="adj" fmla="val 9615"/>
+            </a:avLst>
+          </a:prstGeom>
+          <a:solidFill>
+            <a:srgbClr val="FFFFFF"/>
+          </a:solidFill>
+          <a:ln w="12700">
+            <a:solidFill>
+              <a:srgbClr val="0D9488"/>
+            </a:solidFill>
+            <a:prstDash val="solid"/>
+          </a:ln>
+        </p:spPr>
+      </p:sp>
+      <p:sp>
+        <p:nvSpPr>
+          <p:cNvPr id="38" name="Text 36"/>
+          <p:cNvSpPr/>
+          <p:nvPr/>
+        </p:nvSpPr>
+        <p:spPr>
+          <a:xfrm>
+            <a:off x="6858000" y="3364992"/>
+            <a:ext cx="1554480" cy="475488"/>
+          </a:xfrm>
+          <a:prstGeom prst="rect">
+            <a:avLst/>
+          </a:prstGeom>
+          <a:noFill/>
+          <a:ln/>
+        </p:spPr>
+        <p:txBody>
+          <a:bodyPr wrap="square" lIns="0" tIns="0" rIns="0" bIns="0" rtlCol="0" anchor="ctr"/>
+          <a:lstStyle/>
+          <a:p>
+            <a:pPr algn="ctr" indent="0" marL="0">
+              <a:buNone/>
+            </a:pPr>
+            <a:r>
+              <a:rPr lang="en-US" sz="1400" b="1" dirty="0">
+                <a:solidFill>
+                  <a:srgbClr val="0D9488"/>
+                </a:solidFill>
+                <a:latin typeface="Trebuchet MS" pitchFamily="34" charset="0"/>
+                <a:ea typeface="Trebuchet MS" pitchFamily="34" charset="-122"/>
+                <a:cs typeface="Trebuchet MS" pitchFamily="34" charset="-120"/>
+              </a:rPr>
+              <a:t>ty</a:t>
+            </a:r>
+            <a:endParaRPr lang="en-US" sz="1400" dirty="0"/>
+          </a:p>
+        </p:txBody>
+      </p:sp>
+      <p:sp>
+        <p:nvSpPr>
+          <p:cNvPr id="39" name="Shape 37"/>
           <p:cNvSpPr/>
           <p:nvPr/>
         </p:nvSpPr>
@@ -26818,7 +27678,7 @@
       </p:sp>
       <p:sp>
         <p:nvSpPr>
-          <p:cNvPr id="31" name="Text 29"/>
+          <p:cNvPr id="40" name="Text 38"/>
           <p:cNvSpPr/>
           <p:nvPr/>
         </p:nvSpPr>
@@ -26857,7 +27717,7 @@
       </p:sp>
       <p:sp>
         <p:nvSpPr>
-          <p:cNvPr id="32" name="Shape 30"/>
+          <p:cNvPr id="41" name="Shape 39"/>
           <p:cNvSpPr/>
           <p:nvPr/>
         </p:nvSpPr>
@@ -26884,7 +27744,7 @@
       </p:sp>
       <p:sp>
         <p:nvSpPr>
-          <p:cNvPr id="33" name="Text 31"/>
+          <p:cNvPr id="42" name="Text 40"/>
           <p:cNvSpPr/>
           <p:nvPr/>
         </p:nvSpPr>
@@ -27346,7 +28206,7 @@
                 <a:ea typeface="Trebuchet MS" pitchFamily="34" charset="-122"/>
                 <a:cs typeface="Trebuchet MS" pitchFamily="34" charset="-120"/>
               </a:rPr>
-              <a:t>vital</a:t>
+              <a:t>vitality</a:t>
             </a:r>
             <a:endParaRPr lang="en-US" sz="2800" dirty="0"/>
           </a:p>
@@ -27426,7 +28286,7 @@
         </p:nvSpPr>
         <p:spPr>
           <a:xfrm>
-            <a:off x="2938272" y="2258568"/>
+            <a:off x="2221992" y="2258568"/>
             <a:ext cx="1828800" cy="292608"/>
           </a:xfrm>
           <a:prstGeom prst="rect">
@@ -27460,7 +28320,7 @@
         </p:nvSpPr>
         <p:spPr>
           <a:xfrm>
-            <a:off x="2938272" y="2258568"/>
+            <a:off x="2221992" y="2258568"/>
             <a:ext cx="1828800" cy="292608"/>
           </a:xfrm>
           <a:prstGeom prst="rect">
@@ -27499,7 +28359,7 @@
         </p:nvSpPr>
         <p:spPr>
           <a:xfrm>
-            <a:off x="2938272" y="2569464"/>
+            <a:off x="2221992" y="2569464"/>
             <a:ext cx="1828800" cy="201168"/>
           </a:xfrm>
           <a:prstGeom prst="rect">
@@ -27538,7 +28398,7 @@
         </p:nvSpPr>
         <p:spPr>
           <a:xfrm>
-            <a:off x="5803392" y="2258568"/>
+            <a:off x="4370832" y="2258568"/>
             <a:ext cx="1828800" cy="292608"/>
           </a:xfrm>
           <a:prstGeom prst="rect">
@@ -27572,7 +28432,7 @@
         </p:nvSpPr>
         <p:spPr>
           <a:xfrm>
-            <a:off x="5803392" y="2258568"/>
+            <a:off x="4370832" y="2258568"/>
             <a:ext cx="1828800" cy="292608"/>
           </a:xfrm>
           <a:prstGeom prst="rect">
@@ -27611,7 +28471,7 @@
         </p:nvSpPr>
         <p:spPr>
           <a:xfrm>
-            <a:off x="5803392" y="2569464"/>
+            <a:off x="4370832" y="2569464"/>
             <a:ext cx="1828800" cy="201168"/>
           </a:xfrm>
           <a:prstGeom prst="rect">
@@ -27650,6 +28510,118 @@
         </p:nvSpPr>
         <p:spPr>
           <a:xfrm>
+            <a:off x="6519672" y="2258568"/>
+            <a:ext cx="1828800" cy="292608"/>
+          </a:xfrm>
+          <a:prstGeom prst="rect">
+            <a:avLst>
+              <a:gd name="adj" fmla="val 25000"/>
+            </a:avLst>
+          </a:prstGeom>
+          <a:solidFill>
+            <a:srgbClr val="FCE7F3"/>
+          </a:solidFill>
+          <a:ln w="19050">
+            <a:solidFill>
+              <a:srgbClr val="DB2777"/>
+            </a:solidFill>
+            <a:prstDash val="solid"/>
+          </a:ln>
+          <a:effectLst>
+            <a:outerShdw sx="100000" sy="100000" kx="0" ky="0" algn="bl" rotWithShape="0" blurRad="101600" dist="38100" dir="8100000">
+              <a:srgbClr val="000000">
+                <a:alpha val="12000"/>
+              </a:srgbClr>
+            </a:outerShdw>
+          </a:effectLst>
+        </p:spPr>
+      </p:sp>
+      <p:sp>
+        <p:nvSpPr>
+          <p:cNvPr id="23" name="Text 21"/>
+          <p:cNvSpPr/>
+          <p:nvPr/>
+        </p:nvSpPr>
+        <p:spPr>
+          <a:xfrm>
+            <a:off x="6519672" y="2258568"/>
+            <a:ext cx="1828800" cy="292608"/>
+          </a:xfrm>
+          <a:prstGeom prst="rect">
+            <a:avLst/>
+          </a:prstGeom>
+          <a:noFill/>
+          <a:ln/>
+        </p:spPr>
+        <p:txBody>
+          <a:bodyPr wrap="square" lIns="0" tIns="0" rIns="0" bIns="0" rtlCol="0" anchor="ctr"/>
+          <a:lstStyle/>
+          <a:p>
+            <a:pPr algn="ctr" indent="0" marL="0">
+              <a:buNone/>
+            </a:pPr>
+            <a:r>
+              <a:rPr lang="en-US" sz="1300" b="1" dirty="0">
+                <a:solidFill>
+                  <a:srgbClr val="9D174D"/>
+                </a:solidFill>
+                <a:latin typeface="Trebuchet MS" pitchFamily="34" charset="0"/>
+                <a:ea typeface="Trebuchet MS" pitchFamily="34" charset="-122"/>
+                <a:cs typeface="Trebuchet MS" pitchFamily="34" charset="-120"/>
+              </a:rPr>
+              <a:t>ity</a:t>
+            </a:r>
+            <a:endParaRPr lang="en-US" sz="1300" dirty="0"/>
+          </a:p>
+        </p:txBody>
+      </p:sp>
+      <p:sp>
+        <p:nvSpPr>
+          <p:cNvPr id="24" name="Text 22"/>
+          <p:cNvSpPr/>
+          <p:nvPr/>
+        </p:nvSpPr>
+        <p:spPr>
+          <a:xfrm>
+            <a:off x="6519672" y="2569464"/>
+            <a:ext cx="1828800" cy="201168"/>
+          </a:xfrm>
+          <a:prstGeom prst="rect">
+            <a:avLst/>
+          </a:prstGeom>
+          <a:noFill/>
+          <a:ln/>
+        </p:spPr>
+        <p:txBody>
+          <a:bodyPr wrap="square" lIns="0" tIns="0" rIns="0" bIns="0" rtlCol="0" anchor="t"/>
+          <a:lstStyle/>
+          <a:p>
+            <a:pPr algn="ctr" indent="0" marL="0">
+              <a:buNone/>
+            </a:pPr>
+            <a:r>
+              <a:rPr lang="en-US" sz="850" dirty="0">
+                <a:solidFill>
+                  <a:srgbClr val="475569"/>
+                </a:solidFill>
+                <a:latin typeface="Calibri" pitchFamily="34" charset="0"/>
+                <a:ea typeface="Calibri" pitchFamily="34" charset="-122"/>
+                <a:cs typeface="Calibri" pitchFamily="34" charset="-120"/>
+              </a:rPr>
+              <a:t>state or quality of</a:t>
+            </a:r>
+            <a:endParaRPr lang="en-US" sz="850" dirty="0"/>
+          </a:p>
+        </p:txBody>
+      </p:sp>
+      <p:sp>
+        <p:nvSpPr>
+          <p:cNvPr id="25" name="Shape 23"/>
+          <p:cNvSpPr/>
+          <p:nvPr/>
+        </p:nvSpPr>
+        <p:spPr>
+          <a:xfrm>
             <a:off x="365760" y="3273552"/>
             <a:ext cx="1371600" cy="658368"/>
           </a:xfrm>
@@ -27671,7 +28643,7 @@
       </p:sp>
       <p:sp>
         <p:nvSpPr>
-          <p:cNvPr id="23" name="Text 21"/>
+          <p:cNvPr id="26" name="Text 24"/>
           <p:cNvSpPr/>
           <p:nvPr/>
         </p:nvSpPr>
@@ -27710,7 +28682,7 @@
       </p:sp>
       <p:sp>
         <p:nvSpPr>
-          <p:cNvPr id="24" name="Shape 22"/>
+          <p:cNvPr id="27" name="Shape 25"/>
           <p:cNvSpPr/>
           <p:nvPr/>
         </p:nvSpPr>
@@ -27737,14 +28709,14 @@
       </p:sp>
       <p:sp>
         <p:nvSpPr>
-          <p:cNvPr id="25" name="Shape 23"/>
-          <p:cNvSpPr/>
-          <p:nvPr/>
-        </p:nvSpPr>
-        <p:spPr>
-          <a:xfrm>
-            <a:off x="2999232" y="3364992"/>
-            <a:ext cx="1645920" cy="475488"/>
+          <p:cNvPr id="28" name="Shape 26"/>
+          <p:cNvSpPr/>
+          <p:nvPr/>
+        </p:nvSpPr>
+        <p:spPr>
+          <a:xfrm>
+            <a:off x="1975104" y="3364992"/>
+            <a:ext cx="1554480" cy="475488"/>
           </a:xfrm>
           <a:prstGeom prst="rect">
             <a:avLst>
@@ -27764,14 +28736,14 @@
       </p:sp>
       <p:sp>
         <p:nvSpPr>
-          <p:cNvPr id="26" name="Text 24"/>
-          <p:cNvSpPr/>
-          <p:nvPr/>
-        </p:nvSpPr>
-        <p:spPr>
-          <a:xfrm>
-            <a:off x="2999232" y="3364992"/>
-            <a:ext cx="1645920" cy="475488"/>
+          <p:cNvPr id="29" name="Text 27"/>
+          <p:cNvSpPr/>
+          <p:nvPr/>
+        </p:nvSpPr>
+        <p:spPr>
+          <a:xfrm>
+            <a:off x="1975104" y="3364992"/>
+            <a:ext cx="1554480" cy="475488"/>
           </a:xfrm>
           <a:prstGeom prst="rect">
             <a:avLst/>
@@ -27803,14 +28775,14 @@
       </p:sp>
       <p:sp>
         <p:nvSpPr>
-          <p:cNvPr id="27" name="Text 25"/>
-          <p:cNvSpPr/>
-          <p:nvPr/>
-        </p:nvSpPr>
-        <p:spPr>
-          <a:xfrm>
-            <a:off x="4645152" y="3364992"/>
-            <a:ext cx="1097280" cy="475488"/>
+          <p:cNvPr id="30" name="Text 28"/>
+          <p:cNvSpPr/>
+          <p:nvPr/>
+        </p:nvSpPr>
+        <p:spPr>
+          <a:xfrm>
+            <a:off x="3529584" y="3364992"/>
+            <a:ext cx="73152" cy="475488"/>
           </a:xfrm>
           <a:prstGeom prst="rect">
             <a:avLst/>
@@ -27842,14 +28814,14 @@
       </p:sp>
       <p:sp>
         <p:nvSpPr>
-          <p:cNvPr id="28" name="Shape 26"/>
-          <p:cNvSpPr/>
-          <p:nvPr/>
-        </p:nvSpPr>
-        <p:spPr>
-          <a:xfrm>
-            <a:off x="5742432" y="3364992"/>
-            <a:ext cx="1645920" cy="475488"/>
+          <p:cNvPr id="31" name="Shape 29"/>
+          <p:cNvSpPr/>
+          <p:nvPr/>
+        </p:nvSpPr>
+        <p:spPr>
+          <a:xfrm>
+            <a:off x="3602736" y="3364992"/>
+            <a:ext cx="1554480" cy="475488"/>
           </a:xfrm>
           <a:prstGeom prst="rect">
             <a:avLst>
@@ -27869,14 +28841,14 @@
       </p:sp>
       <p:sp>
         <p:nvSpPr>
-          <p:cNvPr id="29" name="Text 27"/>
-          <p:cNvSpPr/>
-          <p:nvPr/>
-        </p:nvSpPr>
-        <p:spPr>
-          <a:xfrm>
-            <a:off x="5742432" y="3364992"/>
-            <a:ext cx="1645920" cy="475488"/>
+          <p:cNvPr id="32" name="Text 30"/>
+          <p:cNvSpPr/>
+          <p:nvPr/>
+        </p:nvSpPr>
+        <p:spPr>
+          <a:xfrm>
+            <a:off x="3602736" y="3364992"/>
+            <a:ext cx="1554480" cy="475488"/>
           </a:xfrm>
           <a:prstGeom prst="rect">
             <a:avLst/>
@@ -27908,7 +28880,217 @@
       </p:sp>
       <p:sp>
         <p:nvSpPr>
-          <p:cNvPr id="30" name="Shape 28"/>
+          <p:cNvPr id="33" name="Text 31"/>
+          <p:cNvSpPr/>
+          <p:nvPr/>
+        </p:nvSpPr>
+        <p:spPr>
+          <a:xfrm>
+            <a:off x="5157216" y="3364992"/>
+            <a:ext cx="73152" cy="475488"/>
+          </a:xfrm>
+          <a:prstGeom prst="rect">
+            <a:avLst/>
+          </a:prstGeom>
+          <a:noFill/>
+          <a:ln/>
+        </p:spPr>
+        <p:txBody>
+          <a:bodyPr wrap="square" lIns="0" tIns="0" rIns="0" bIns="0" rtlCol="0" anchor="ctr"/>
+          <a:lstStyle/>
+          <a:p>
+            <a:pPr algn="ctr" indent="0" marL="0">
+              <a:buNone/>
+            </a:pPr>
+            <a:r>
+              <a:rPr lang="en-US" sz="1600" b="1" dirty="0">
+                <a:solidFill>
+                  <a:srgbClr val="0D9488"/>
+                </a:solidFill>
+                <a:latin typeface="Trebuchet MS" pitchFamily="34" charset="0"/>
+                <a:ea typeface="Trebuchet MS" pitchFamily="34" charset="-122"/>
+                <a:cs typeface="Trebuchet MS" pitchFamily="34" charset="-120"/>
+              </a:rPr>
+              <a:t>·</a:t>
+            </a:r>
+            <a:endParaRPr lang="en-US" sz="1600" dirty="0"/>
+          </a:p>
+        </p:txBody>
+      </p:sp>
+      <p:sp>
+        <p:nvSpPr>
+          <p:cNvPr id="34" name="Shape 32"/>
+          <p:cNvSpPr/>
+          <p:nvPr/>
+        </p:nvSpPr>
+        <p:spPr>
+          <a:xfrm>
+            <a:off x="5230368" y="3364992"/>
+            <a:ext cx="1554480" cy="475488"/>
+          </a:xfrm>
+          <a:prstGeom prst="rect">
+            <a:avLst>
+              <a:gd name="adj" fmla="val 9615"/>
+            </a:avLst>
+          </a:prstGeom>
+          <a:solidFill>
+            <a:srgbClr val="FFFFFF"/>
+          </a:solidFill>
+          <a:ln w="12700">
+            <a:solidFill>
+              <a:srgbClr val="0D9488"/>
+            </a:solidFill>
+            <a:prstDash val="solid"/>
+          </a:ln>
+        </p:spPr>
+      </p:sp>
+      <p:sp>
+        <p:nvSpPr>
+          <p:cNvPr id="35" name="Text 33"/>
+          <p:cNvSpPr/>
+          <p:nvPr/>
+        </p:nvSpPr>
+        <p:spPr>
+          <a:xfrm>
+            <a:off x="5230368" y="3364992"/>
+            <a:ext cx="1554480" cy="475488"/>
+          </a:xfrm>
+          <a:prstGeom prst="rect">
+            <a:avLst/>
+          </a:prstGeom>
+          <a:noFill/>
+          <a:ln/>
+        </p:spPr>
+        <p:txBody>
+          <a:bodyPr wrap="square" lIns="0" tIns="0" rIns="0" bIns="0" rtlCol="0" anchor="ctr"/>
+          <a:lstStyle/>
+          <a:p>
+            <a:pPr algn="ctr" indent="0" marL="0">
+              <a:buNone/>
+            </a:pPr>
+            <a:r>
+              <a:rPr lang="en-US" sz="1400" b="1" dirty="0">
+                <a:solidFill>
+                  <a:srgbClr val="0D9488"/>
+                </a:solidFill>
+                <a:latin typeface="Trebuchet MS" pitchFamily="34" charset="0"/>
+                <a:ea typeface="Trebuchet MS" pitchFamily="34" charset="-122"/>
+                <a:cs typeface="Trebuchet MS" pitchFamily="34" charset="-120"/>
+              </a:rPr>
+              <a:t>i</a:t>
+            </a:r>
+            <a:endParaRPr lang="en-US" sz="1400" dirty="0"/>
+          </a:p>
+        </p:txBody>
+      </p:sp>
+      <p:sp>
+        <p:nvSpPr>
+          <p:cNvPr id="36" name="Text 34"/>
+          <p:cNvSpPr/>
+          <p:nvPr/>
+        </p:nvSpPr>
+        <p:spPr>
+          <a:xfrm>
+            <a:off x="6784848" y="3364992"/>
+            <a:ext cx="73152" cy="475488"/>
+          </a:xfrm>
+          <a:prstGeom prst="rect">
+            <a:avLst/>
+          </a:prstGeom>
+          <a:noFill/>
+          <a:ln/>
+        </p:spPr>
+        <p:txBody>
+          <a:bodyPr wrap="square" lIns="0" tIns="0" rIns="0" bIns="0" rtlCol="0" anchor="ctr"/>
+          <a:lstStyle/>
+          <a:p>
+            <a:pPr algn="ctr" indent="0" marL="0">
+              <a:buNone/>
+            </a:pPr>
+            <a:r>
+              <a:rPr lang="en-US" sz="1600" b="1" dirty="0">
+                <a:solidFill>
+                  <a:srgbClr val="0D9488"/>
+                </a:solidFill>
+                <a:latin typeface="Trebuchet MS" pitchFamily="34" charset="0"/>
+                <a:ea typeface="Trebuchet MS" pitchFamily="34" charset="-122"/>
+                <a:cs typeface="Trebuchet MS" pitchFamily="34" charset="-120"/>
+              </a:rPr>
+              <a:t>·</a:t>
+            </a:r>
+            <a:endParaRPr lang="en-US" sz="1600" dirty="0"/>
+          </a:p>
+        </p:txBody>
+      </p:sp>
+      <p:sp>
+        <p:nvSpPr>
+          <p:cNvPr id="37" name="Shape 35"/>
+          <p:cNvSpPr/>
+          <p:nvPr/>
+        </p:nvSpPr>
+        <p:spPr>
+          <a:xfrm>
+            <a:off x="6858000" y="3364992"/>
+            <a:ext cx="1554480" cy="475488"/>
+          </a:xfrm>
+          <a:prstGeom prst="rect">
+            <a:avLst>
+              <a:gd name="adj" fmla="val 9615"/>
+            </a:avLst>
+          </a:prstGeom>
+          <a:solidFill>
+            <a:srgbClr val="FFFFFF"/>
+          </a:solidFill>
+          <a:ln w="12700">
+            <a:solidFill>
+              <a:srgbClr val="0D9488"/>
+            </a:solidFill>
+            <a:prstDash val="solid"/>
+          </a:ln>
+        </p:spPr>
+      </p:sp>
+      <p:sp>
+        <p:nvSpPr>
+          <p:cNvPr id="38" name="Text 36"/>
+          <p:cNvSpPr/>
+          <p:nvPr/>
+        </p:nvSpPr>
+        <p:spPr>
+          <a:xfrm>
+            <a:off x="6858000" y="3364992"/>
+            <a:ext cx="1554480" cy="475488"/>
+          </a:xfrm>
+          <a:prstGeom prst="rect">
+            <a:avLst/>
+          </a:prstGeom>
+          <a:noFill/>
+          <a:ln/>
+        </p:spPr>
+        <p:txBody>
+          <a:bodyPr wrap="square" lIns="0" tIns="0" rIns="0" bIns="0" rtlCol="0" anchor="ctr"/>
+          <a:lstStyle/>
+          <a:p>
+            <a:pPr algn="ctr" indent="0" marL="0">
+              <a:buNone/>
+            </a:pPr>
+            <a:r>
+              <a:rPr lang="en-US" sz="1400" b="1" dirty="0">
+                <a:solidFill>
+                  <a:srgbClr val="0D9488"/>
+                </a:solidFill>
+                <a:latin typeface="Trebuchet MS" pitchFamily="34" charset="0"/>
+                <a:ea typeface="Trebuchet MS" pitchFamily="34" charset="-122"/>
+                <a:cs typeface="Trebuchet MS" pitchFamily="34" charset="-120"/>
+              </a:rPr>
+              <a:t>ty</a:t>
+            </a:r>
+            <a:endParaRPr lang="en-US" sz="1400" dirty="0"/>
+          </a:p>
+        </p:txBody>
+      </p:sp>
+      <p:sp>
+        <p:nvSpPr>
+          <p:cNvPr id="39" name="Shape 37"/>
           <p:cNvSpPr/>
           <p:nvPr/>
         </p:nvSpPr>
@@ -27935,7 +29117,7 @@
       </p:sp>
       <p:sp>
         <p:nvSpPr>
-          <p:cNvPr id="31" name="Text 29"/>
+          <p:cNvPr id="40" name="Text 38"/>
           <p:cNvSpPr/>
           <p:nvPr/>
         </p:nvSpPr>
@@ -27974,7 +29156,7 @@
       </p:sp>
       <p:sp>
         <p:nvSpPr>
-          <p:cNvPr id="32" name="Shape 30"/>
+          <p:cNvPr id="41" name="Shape 39"/>
           <p:cNvSpPr/>
           <p:nvPr/>
         </p:nvSpPr>
@@ -28001,13 +29183,13 @@
       </p:sp>
       <p:sp>
         <p:nvSpPr>
-          <p:cNvPr id="33" name="Shape 31"/>
-          <p:cNvSpPr/>
-          <p:nvPr/>
-        </p:nvSpPr>
-        <p:spPr>
-          <a:xfrm>
-            <a:off x="2427732" y="4169664"/>
+          <p:cNvPr id="42" name="Shape 40"/>
+          <p:cNvSpPr/>
+          <p:nvPr/>
+        </p:nvSpPr>
+        <p:spPr>
+          <a:xfrm>
+            <a:off x="2124837" y="4169664"/>
             <a:ext cx="685800" cy="475488"/>
           </a:xfrm>
           <a:prstGeom prst="rect">
@@ -28028,13 +29210,13 @@
       </p:sp>
       <p:sp>
         <p:nvSpPr>
-          <p:cNvPr id="34" name="Text 32"/>
-          <p:cNvSpPr/>
-          <p:nvPr/>
-        </p:nvSpPr>
-        <p:spPr>
-          <a:xfrm>
-            <a:off x="2427732" y="4169664"/>
+          <p:cNvPr id="43" name="Text 41"/>
+          <p:cNvSpPr/>
+          <p:nvPr/>
+        </p:nvSpPr>
+        <p:spPr>
+          <a:xfrm>
+            <a:off x="2124837" y="4169664"/>
             <a:ext cx="685800" cy="475488"/>
           </a:xfrm>
           <a:prstGeom prst="rect">
@@ -28067,13 +29249,13 @@
       </p:sp>
       <p:sp>
         <p:nvSpPr>
-          <p:cNvPr id="35" name="Shape 33"/>
-          <p:cNvSpPr/>
-          <p:nvPr/>
-        </p:nvSpPr>
-        <p:spPr>
-          <a:xfrm>
-            <a:off x="3639312" y="4169664"/>
+          <p:cNvPr id="44" name="Shape 42"/>
+          <p:cNvSpPr/>
+          <p:nvPr/>
+        </p:nvSpPr>
+        <p:spPr>
+          <a:xfrm>
+            <a:off x="3033522" y="4169664"/>
             <a:ext cx="685800" cy="475488"/>
           </a:xfrm>
           <a:prstGeom prst="rect">
@@ -28094,13 +29276,13 @@
       </p:sp>
       <p:sp>
         <p:nvSpPr>
-          <p:cNvPr id="36" name="Text 34"/>
-          <p:cNvSpPr/>
-          <p:nvPr/>
-        </p:nvSpPr>
-        <p:spPr>
-          <a:xfrm>
-            <a:off x="3639312" y="4169664"/>
+          <p:cNvPr id="45" name="Text 43"/>
+          <p:cNvSpPr/>
+          <p:nvPr/>
+        </p:nvSpPr>
+        <p:spPr>
+          <a:xfrm>
+            <a:off x="3033522" y="4169664"/>
             <a:ext cx="685800" cy="475488"/>
           </a:xfrm>
           <a:prstGeom prst="rect">
@@ -28133,13 +29315,13 @@
       </p:sp>
       <p:sp>
         <p:nvSpPr>
-          <p:cNvPr id="37" name="Shape 35"/>
-          <p:cNvSpPr/>
-          <p:nvPr/>
-        </p:nvSpPr>
-        <p:spPr>
-          <a:xfrm>
-            <a:off x="4850892" y="4169664"/>
+          <p:cNvPr id="46" name="Shape 44"/>
+          <p:cNvSpPr/>
+          <p:nvPr/>
+        </p:nvSpPr>
+        <p:spPr>
+          <a:xfrm>
+            <a:off x="3942207" y="4169664"/>
             <a:ext cx="685800" cy="475488"/>
           </a:xfrm>
           <a:prstGeom prst="rect">
@@ -28160,13 +29342,13 @@
       </p:sp>
       <p:sp>
         <p:nvSpPr>
-          <p:cNvPr id="38" name="Text 36"/>
-          <p:cNvSpPr/>
-          <p:nvPr/>
-        </p:nvSpPr>
-        <p:spPr>
-          <a:xfrm>
-            <a:off x="4850892" y="4169664"/>
+          <p:cNvPr id="47" name="Text 45"/>
+          <p:cNvSpPr/>
+          <p:nvPr/>
+        </p:nvSpPr>
+        <p:spPr>
+          <a:xfrm>
+            <a:off x="3942207" y="4169664"/>
             <a:ext cx="685800" cy="475488"/>
           </a:xfrm>
           <a:prstGeom prst="rect">
@@ -28199,13 +29381,13 @@
       </p:sp>
       <p:sp>
         <p:nvSpPr>
-          <p:cNvPr id="39" name="Shape 37"/>
-          <p:cNvSpPr/>
-          <p:nvPr/>
-        </p:nvSpPr>
-        <p:spPr>
-          <a:xfrm>
-            <a:off x="6062472" y="4169664"/>
+          <p:cNvPr id="48" name="Shape 46"/>
+          <p:cNvSpPr/>
+          <p:nvPr/>
+        </p:nvSpPr>
+        <p:spPr>
+          <a:xfrm>
+            <a:off x="4850892" y="4169664"/>
             <a:ext cx="685800" cy="475488"/>
           </a:xfrm>
           <a:prstGeom prst="rect">
@@ -28226,13 +29408,13 @@
       </p:sp>
       <p:sp>
         <p:nvSpPr>
-          <p:cNvPr id="40" name="Text 38"/>
-          <p:cNvSpPr/>
-          <p:nvPr/>
-        </p:nvSpPr>
-        <p:spPr>
-          <a:xfrm>
-            <a:off x="6062472" y="4169664"/>
+          <p:cNvPr id="49" name="Text 47"/>
+          <p:cNvSpPr/>
+          <p:nvPr/>
+        </p:nvSpPr>
+        <p:spPr>
+          <a:xfrm>
+            <a:off x="4850892" y="4169664"/>
             <a:ext cx="685800" cy="475488"/>
           </a:xfrm>
           <a:prstGeom prst="rect">
@@ -28257,7 +29439,7 @@
                 <a:ea typeface="Trebuchet MS" pitchFamily="34" charset="-122"/>
                 <a:cs typeface="Trebuchet MS" pitchFamily="34" charset="-120"/>
               </a:rPr>
-              <a:t>a</a:t>
+              <a:t>al</a:t>
             </a:r>
             <a:endParaRPr lang="en-US" sz="900" dirty="0"/>
           </a:p>
@@ -28265,13 +29447,13 @@
       </p:sp>
       <p:sp>
         <p:nvSpPr>
-          <p:cNvPr id="41" name="Shape 39"/>
-          <p:cNvSpPr/>
-          <p:nvPr/>
-        </p:nvSpPr>
-        <p:spPr>
-          <a:xfrm>
-            <a:off x="7274052" y="4169664"/>
+          <p:cNvPr id="50" name="Shape 48"/>
+          <p:cNvSpPr/>
+          <p:nvPr/>
+        </p:nvSpPr>
+        <p:spPr>
+          <a:xfrm>
+            <a:off x="5759577" y="4169664"/>
             <a:ext cx="685800" cy="475488"/>
           </a:xfrm>
           <a:prstGeom prst="rect">
@@ -28292,13 +29474,13 @@
       </p:sp>
       <p:sp>
         <p:nvSpPr>
-          <p:cNvPr id="42" name="Text 40"/>
-          <p:cNvSpPr/>
-          <p:nvPr/>
-        </p:nvSpPr>
-        <p:spPr>
-          <a:xfrm>
-            <a:off x="7274052" y="4169664"/>
+          <p:cNvPr id="51" name="Text 49"/>
+          <p:cNvSpPr/>
+          <p:nvPr/>
+        </p:nvSpPr>
+        <p:spPr>
+          <a:xfrm>
+            <a:off x="5759577" y="4169664"/>
             <a:ext cx="685800" cy="475488"/>
           </a:xfrm>
           <a:prstGeom prst="rect">
@@ -28323,7 +29505,139 @@
                 <a:ea typeface="Trebuchet MS" pitchFamily="34" charset="-122"/>
                 <a:cs typeface="Trebuchet MS" pitchFamily="34" charset="-120"/>
               </a:rPr>
-              <a:t>l</a:t>
+              <a:t>i</a:t>
+            </a:r>
+            <a:endParaRPr lang="en-US" sz="900" dirty="0"/>
+          </a:p>
+        </p:txBody>
+      </p:sp>
+      <p:sp>
+        <p:nvSpPr>
+          <p:cNvPr id="52" name="Shape 50"/>
+          <p:cNvSpPr/>
+          <p:nvPr/>
+        </p:nvSpPr>
+        <p:spPr>
+          <a:xfrm>
+            <a:off x="6668262" y="4169664"/>
+            <a:ext cx="685800" cy="475488"/>
+          </a:xfrm>
+          <a:prstGeom prst="rect">
+            <a:avLst>
+              <a:gd name="adj" fmla="val 7692"/>
+            </a:avLst>
+          </a:prstGeom>
+          <a:solidFill>
+            <a:srgbClr val="FFFFFF"/>
+          </a:solidFill>
+          <a:ln w="12700">
+            <a:solidFill>
+              <a:srgbClr val="DB2777"/>
+            </a:solidFill>
+            <a:prstDash val="solid"/>
+          </a:ln>
+        </p:spPr>
+      </p:sp>
+      <p:sp>
+        <p:nvSpPr>
+          <p:cNvPr id="53" name="Text 51"/>
+          <p:cNvSpPr/>
+          <p:nvPr/>
+        </p:nvSpPr>
+        <p:spPr>
+          <a:xfrm>
+            <a:off x="6668262" y="4169664"/>
+            <a:ext cx="685800" cy="475488"/>
+          </a:xfrm>
+          <a:prstGeom prst="rect">
+            <a:avLst/>
+          </a:prstGeom>
+          <a:noFill/>
+          <a:ln/>
+        </p:spPr>
+        <p:txBody>
+          <a:bodyPr wrap="square" lIns="0" tIns="0" rIns="0" bIns="0" rtlCol="0" anchor="ctr"/>
+          <a:lstStyle/>
+          <a:p>
+            <a:pPr algn="ctr" indent="0" marL="0">
+              <a:buNone/>
+            </a:pPr>
+            <a:r>
+              <a:rPr lang="en-US" sz="900" b="1" dirty="0">
+                <a:solidFill>
+                  <a:srgbClr val="9D174D"/>
+                </a:solidFill>
+                <a:latin typeface="Trebuchet MS" pitchFamily="34" charset="0"/>
+                <a:ea typeface="Trebuchet MS" pitchFamily="34" charset="-122"/>
+                <a:cs typeface="Trebuchet MS" pitchFamily="34" charset="-120"/>
+              </a:rPr>
+              <a:t>t</a:t>
+            </a:r>
+            <a:endParaRPr lang="en-US" sz="900" dirty="0"/>
+          </a:p>
+        </p:txBody>
+      </p:sp>
+      <p:sp>
+        <p:nvSpPr>
+          <p:cNvPr id="54" name="Shape 52"/>
+          <p:cNvSpPr/>
+          <p:nvPr/>
+        </p:nvSpPr>
+        <p:spPr>
+          <a:xfrm>
+            <a:off x="7576947" y="4169664"/>
+            <a:ext cx="685800" cy="475488"/>
+          </a:xfrm>
+          <a:prstGeom prst="rect">
+            <a:avLst>
+              <a:gd name="adj" fmla="val 7692"/>
+            </a:avLst>
+          </a:prstGeom>
+          <a:solidFill>
+            <a:srgbClr val="FFFFFF"/>
+          </a:solidFill>
+          <a:ln w="12700">
+            <a:solidFill>
+              <a:srgbClr val="DB2777"/>
+            </a:solidFill>
+            <a:prstDash val="solid"/>
+          </a:ln>
+        </p:spPr>
+      </p:sp>
+      <p:sp>
+        <p:nvSpPr>
+          <p:cNvPr id="55" name="Text 53"/>
+          <p:cNvSpPr/>
+          <p:nvPr/>
+        </p:nvSpPr>
+        <p:spPr>
+          <a:xfrm>
+            <a:off x="7576947" y="4169664"/>
+            <a:ext cx="685800" cy="475488"/>
+          </a:xfrm>
+          <a:prstGeom prst="rect">
+            <a:avLst/>
+          </a:prstGeom>
+          <a:noFill/>
+          <a:ln/>
+        </p:spPr>
+        <p:txBody>
+          <a:bodyPr wrap="square" lIns="0" tIns="0" rIns="0" bIns="0" rtlCol="0" anchor="ctr"/>
+          <a:lstStyle/>
+          <a:p>
+            <a:pPr algn="ctr" indent="0" marL="0">
+              <a:buNone/>
+            </a:pPr>
+            <a:r>
+              <a:rPr lang="en-US" sz="900" b="1" dirty="0">
+                <a:solidFill>
+                  <a:srgbClr val="9D174D"/>
+                </a:solidFill>
+                <a:latin typeface="Trebuchet MS" pitchFamily="34" charset="0"/>
+                <a:ea typeface="Trebuchet MS" pitchFamily="34" charset="-122"/>
+                <a:cs typeface="Trebuchet MS" pitchFamily="34" charset="-120"/>
+              </a:rPr>
+              <a:t>y</a:t>
             </a:r>
             <a:endParaRPr lang="en-US" sz="900" dirty="0"/>
           </a:p>
@@ -28754,7 +30068,7 @@
                 <a:ea typeface="Trebuchet MS" pitchFamily="34" charset="-122"/>
                 <a:cs typeface="Trebuchet MS" pitchFamily="34" charset="-120"/>
               </a:rPr>
-              <a:t>revitalise</a:t>
+              <a:t>survival</a:t>
             </a:r>
             <a:endParaRPr lang="en-US" sz="2800" dirty="0"/>
           </a:p>
@@ -29581,7 +30895,7 @@
                 <a:ea typeface="Trebuchet MS" pitchFamily="34" charset="-122"/>
                 <a:cs typeface="Trebuchet MS" pitchFamily="34" charset="-120"/>
               </a:rPr>
-              <a:t>revitalise</a:t>
+              <a:t>survival</a:t>
             </a:r>
             <a:endParaRPr lang="en-US" sz="2800" dirty="0"/>
           </a:p>
@@ -29661,8 +30975,8 @@
         </p:nvSpPr>
         <p:spPr>
           <a:xfrm>
-            <a:off x="1989734" y="2258568"/>
-            <a:ext cx="1581912" cy="292608"/>
+            <a:off x="2221992" y="2258568"/>
+            <a:ext cx="1828800" cy="292608"/>
           </a:xfrm>
           <a:prstGeom prst="rect">
             <a:avLst>
@@ -29695,8 +31009,8 @@
         </p:nvSpPr>
         <p:spPr>
           <a:xfrm>
-            <a:off x="1989734" y="2258568"/>
-            <a:ext cx="1581912" cy="292608"/>
+            <a:off x="2221992" y="2258568"/>
+            <a:ext cx="1828800" cy="292608"/>
           </a:xfrm>
           <a:prstGeom prst="rect">
             <a:avLst/>
@@ -29720,7 +31034,7 @@
                 <a:ea typeface="Trebuchet MS" pitchFamily="34" charset="-122"/>
                 <a:cs typeface="Trebuchet MS" pitchFamily="34" charset="-120"/>
               </a:rPr>
-              <a:t>re</a:t>
+              <a:t>sur</a:t>
             </a:r>
             <a:endParaRPr lang="en-US" sz="1300" dirty="0"/>
           </a:p>
@@ -29734,8 +31048,8 @@
         </p:nvSpPr>
         <p:spPr>
           <a:xfrm>
-            <a:off x="1989734" y="2569464"/>
-            <a:ext cx="1581912" cy="201168"/>
+            <a:off x="2221992" y="2569464"/>
+            <a:ext cx="1828800" cy="201168"/>
           </a:xfrm>
           <a:prstGeom prst="rect">
             <a:avLst/>
@@ -29759,7 +31073,7 @@
                 <a:ea typeface="Calibri" pitchFamily="34" charset="-122"/>
                 <a:cs typeface="Calibri" pitchFamily="34" charset="-120"/>
               </a:rPr>
-              <a:t>again</a:t>
+              <a:t>over, beyond</a:t>
             </a:r>
             <a:endParaRPr lang="en-US" sz="850" dirty="0"/>
           </a:p>
@@ -29773,8 +31087,8 @@
         </p:nvSpPr>
         <p:spPr>
           <a:xfrm>
-            <a:off x="3659429" y="2258568"/>
-            <a:ext cx="1581912" cy="292608"/>
+            <a:off x="4370832" y="2258568"/>
+            <a:ext cx="1828800" cy="292608"/>
           </a:xfrm>
           <a:prstGeom prst="rect">
             <a:avLst>
@@ -29807,8 +31121,8 @@
         </p:nvSpPr>
         <p:spPr>
           <a:xfrm>
-            <a:off x="3659429" y="2258568"/>
-            <a:ext cx="1581912" cy="292608"/>
+            <a:off x="4370832" y="2258568"/>
+            <a:ext cx="1828800" cy="292608"/>
           </a:xfrm>
           <a:prstGeom prst="rect">
             <a:avLst/>
@@ -29846,8 +31160,8 @@
         </p:nvSpPr>
         <p:spPr>
           <a:xfrm>
-            <a:off x="3659429" y="2569464"/>
-            <a:ext cx="1581912" cy="201168"/>
+            <a:off x="4370832" y="2569464"/>
+            <a:ext cx="1828800" cy="201168"/>
           </a:xfrm>
           <a:prstGeom prst="rect">
             <a:avLst/>
@@ -29885,8 +31199,8 @@
         </p:nvSpPr>
         <p:spPr>
           <a:xfrm>
-            <a:off x="5329123" y="2258568"/>
-            <a:ext cx="1581912" cy="292608"/>
+            <a:off x="6519672" y="2258568"/>
+            <a:ext cx="1828800" cy="292608"/>
           </a:xfrm>
           <a:prstGeom prst="rect">
             <a:avLst>
@@ -29919,8 +31233,8 @@
         </p:nvSpPr>
         <p:spPr>
           <a:xfrm>
-            <a:off x="5329123" y="2258568"/>
-            <a:ext cx="1581912" cy="292608"/>
+            <a:off x="6519672" y="2258568"/>
+            <a:ext cx="1828800" cy="292608"/>
           </a:xfrm>
           <a:prstGeom prst="rect">
             <a:avLst/>
@@ -29958,8 +31272,8 @@
         </p:nvSpPr>
         <p:spPr>
           <a:xfrm>
-            <a:off x="5329123" y="2569464"/>
-            <a:ext cx="1581912" cy="201168"/>
+            <a:off x="6519672" y="2569464"/>
+            <a:ext cx="1828800" cy="201168"/>
           </a:xfrm>
           <a:prstGeom prst="rect">
             <a:avLst/>
@@ -29991,130 +31305,189 @@
       </p:sp>
       <p:sp>
         <p:nvSpPr>
-          <p:cNvPr id="25" name="Shape 23"/>
-          <p:cNvSpPr/>
-          <p:nvPr/>
-        </p:nvSpPr>
-        <p:spPr>
-          <a:xfrm>
-            <a:off x="6998818" y="2258568"/>
-            <a:ext cx="1581912" cy="292608"/>
+          <p:cNvPr id="25" name="Text 23"/>
+          <p:cNvSpPr/>
+          <p:nvPr/>
+        </p:nvSpPr>
+        <p:spPr>
+          <a:xfrm>
+            <a:off x="6519672" y="2752344"/>
+            <a:ext cx="1828800" cy="182880"/>
+          </a:xfrm>
+          <a:prstGeom prst="rect">
+            <a:avLst/>
+          </a:prstGeom>
+          <a:noFill/>
+          <a:ln/>
+        </p:spPr>
+        <p:txBody>
+          <a:bodyPr wrap="square" lIns="0" tIns="0" rIns="0" bIns="0" rtlCol="0" anchor="t"/>
+          <a:lstStyle/>
+          <a:p>
+            <a:pPr algn="ctr" indent="0" marL="0">
+              <a:buNone/>
+            </a:pPr>
+            <a:r>
+              <a:rPr lang="en-US" sz="700" i="1" dirty="0">
+                <a:solidFill>
+                  <a:srgbClr val="94A3B8"/>
+                </a:solidFill>
+                <a:latin typeface="Calibri" pitchFamily="34" charset="0"/>
+                <a:ea typeface="Calibri" pitchFamily="34" charset="-122"/>
+                <a:cs typeface="Calibri" pitchFamily="34" charset="-120"/>
+              </a:rPr>
+              <a:t>'vit' shifts to 'viv' in some forms; here 'sur/viv' → 'surviv' before -al</a:t>
+            </a:r>
+            <a:endParaRPr lang="en-US" sz="700" dirty="0"/>
+          </a:p>
+        </p:txBody>
+      </p:sp>
+      <p:sp>
+        <p:nvSpPr>
+          <p:cNvPr id="26" name="Shape 24"/>
+          <p:cNvSpPr/>
+          <p:nvPr/>
+        </p:nvSpPr>
+        <p:spPr>
+          <a:xfrm>
+            <a:off x="365760" y="3273552"/>
+            <a:ext cx="1371600" cy="658368"/>
           </a:xfrm>
           <a:prstGeom prst="rect">
             <a:avLst>
-              <a:gd name="adj" fmla="val 25000"/>
+              <a:gd name="adj" fmla="val 8333"/>
             </a:avLst>
           </a:prstGeom>
           <a:solidFill>
-            <a:srgbClr val="FCE7F3"/>
-          </a:solidFill>
-          <a:ln w="19050">
-            <a:solidFill>
-              <a:srgbClr val="DB2777"/>
-            </a:solidFill>
-            <a:prstDash val="solid"/>
-          </a:ln>
-          <a:effectLst>
-            <a:outerShdw sx="100000" sy="100000" kx="0" ky="0" algn="bl" rotWithShape="0" blurRad="101600" dist="38100" dir="8100000">
-              <a:srgbClr val="000000">
-                <a:alpha val="12000"/>
-              </a:srgbClr>
-            </a:outerShdw>
-          </a:effectLst>
-        </p:spPr>
-      </p:sp>
-      <p:sp>
-        <p:nvSpPr>
-          <p:cNvPr id="26" name="Text 24"/>
-          <p:cNvSpPr/>
-          <p:nvPr/>
-        </p:nvSpPr>
-        <p:spPr>
-          <a:xfrm>
-            <a:off x="6998818" y="2258568"/>
-            <a:ext cx="1581912" cy="292608"/>
-          </a:xfrm>
-          <a:prstGeom prst="rect">
-            <a:avLst/>
-          </a:prstGeom>
-          <a:noFill/>
-          <a:ln/>
-        </p:spPr>
-        <p:txBody>
-          <a:bodyPr wrap="square" lIns="0" tIns="0" rIns="0" bIns="0" rtlCol="0" anchor="ctr"/>
-          <a:lstStyle/>
-          <a:p>
-            <a:pPr algn="ctr" indent="0" marL="0">
-              <a:buNone/>
-            </a:pPr>
-            <a:r>
-              <a:rPr lang="en-US" sz="1300" b="1" dirty="0">
-                <a:solidFill>
-                  <a:srgbClr val="9D174D"/>
+            <a:srgbClr val="E2E8F0"/>
+          </a:solidFill>
+          <a:ln w="12700">
+            <a:solidFill>
+              <a:srgbClr val="E2E8F0"/>
+            </a:solidFill>
+            <a:prstDash val="solid"/>
+          </a:ln>
+        </p:spPr>
+      </p:sp>
+      <p:sp>
+        <p:nvSpPr>
+          <p:cNvPr id="27" name="Text 25"/>
+          <p:cNvSpPr/>
+          <p:nvPr/>
+        </p:nvSpPr>
+        <p:spPr>
+          <a:xfrm>
+            <a:off x="365760" y="3273552"/>
+            <a:ext cx="1371600" cy="658368"/>
+          </a:xfrm>
+          <a:prstGeom prst="rect">
+            <a:avLst/>
+          </a:prstGeom>
+          <a:noFill/>
+          <a:ln/>
+        </p:spPr>
+        <p:txBody>
+          <a:bodyPr wrap="square" lIns="0" tIns="0" rIns="0" bIns="0" rtlCol="0" anchor="ctr"/>
+          <a:lstStyle/>
+          <a:p>
+            <a:pPr algn="ctr" indent="0" marL="0">
+              <a:buNone/>
+            </a:pPr>
+            <a:r>
+              <a:rPr lang="en-US" sz="1100" b="1" dirty="0">
+                <a:solidFill>
+                  <a:srgbClr val="475569"/>
                 </a:solidFill>
                 <a:latin typeface="Trebuchet MS" pitchFamily="34" charset="0"/>
                 <a:ea typeface="Trebuchet MS" pitchFamily="34" charset="-122"/>
                 <a:cs typeface="Trebuchet MS" pitchFamily="34" charset="-120"/>
               </a:rPr>
-              <a:t>ise</a:t>
-            </a:r>
-            <a:endParaRPr lang="en-US" sz="1300" dirty="0"/>
-          </a:p>
-        </p:txBody>
-      </p:sp>
-      <p:sp>
-        <p:nvSpPr>
-          <p:cNvPr id="27" name="Text 25"/>
-          <p:cNvSpPr/>
-          <p:nvPr/>
-        </p:nvSpPr>
-        <p:spPr>
-          <a:xfrm>
-            <a:off x="6998818" y="2569464"/>
-            <a:ext cx="1581912" cy="201168"/>
-          </a:xfrm>
-          <a:prstGeom prst="rect">
-            <a:avLst/>
-          </a:prstGeom>
-          <a:noFill/>
-          <a:ln/>
-        </p:spPr>
-        <p:txBody>
-          <a:bodyPr wrap="square" lIns="0" tIns="0" rIns="0" bIns="0" rtlCol="0" anchor="t"/>
-          <a:lstStyle/>
-          <a:p>
-            <a:pPr algn="ctr" indent="0" marL="0">
-              <a:buNone/>
-            </a:pPr>
-            <a:r>
-              <a:rPr lang="en-US" sz="850" dirty="0">
-                <a:solidFill>
-                  <a:srgbClr val="475569"/>
+              <a:t>Syllables</a:t>
+            </a:r>
+            <a:endParaRPr lang="en-US" sz="1100" dirty="0"/>
+          </a:p>
+        </p:txBody>
+      </p:sp>
+      <p:sp>
+        <p:nvSpPr>
+          <p:cNvPr id="28" name="Shape 26"/>
+          <p:cNvSpPr/>
+          <p:nvPr/>
+        </p:nvSpPr>
+        <p:spPr>
+          <a:xfrm>
+            <a:off x="1874520" y="3273552"/>
+            <a:ext cx="6903720" cy="658368"/>
+          </a:xfrm>
+          <a:prstGeom prst="rect">
+            <a:avLst>
+              <a:gd name="adj" fmla="val 8333"/>
+            </a:avLst>
+          </a:prstGeom>
+          <a:solidFill>
+            <a:srgbClr val="F8FAFC"/>
+          </a:solidFill>
+          <a:ln w="12700">
+            <a:solidFill>
+              <a:srgbClr val="E2E8F0"/>
+            </a:solidFill>
+            <a:prstDash val="dash"/>
+          </a:ln>
+        </p:spPr>
+      </p:sp>
+      <p:sp>
+        <p:nvSpPr>
+          <p:cNvPr id="29" name="Text 27"/>
+          <p:cNvSpPr/>
+          <p:nvPr/>
+        </p:nvSpPr>
+        <p:spPr>
+          <a:xfrm>
+            <a:off x="1874520" y="3273552"/>
+            <a:ext cx="6903720" cy="658368"/>
+          </a:xfrm>
+          <a:prstGeom prst="rect">
+            <a:avLst/>
+          </a:prstGeom>
+          <a:noFill/>
+          <a:ln/>
+        </p:spPr>
+        <p:txBody>
+          <a:bodyPr wrap="square" rtlCol="0" anchor="ctr"/>
+          <a:lstStyle/>
+          <a:p>
+            <a:pPr algn="ctr" indent="0" marL="0">
+              <a:buNone/>
+            </a:pPr>
+            <a:r>
+              <a:rPr lang="en-US" sz="1100" i="1" dirty="0">
+                <a:solidFill>
+                  <a:srgbClr val="CBD5E1"/>
                 </a:solidFill>
                 <a:latin typeface="Calibri" pitchFamily="34" charset="0"/>
                 <a:ea typeface="Calibri" pitchFamily="34" charset="-122"/>
                 <a:cs typeface="Calibri" pitchFamily="34" charset="-120"/>
               </a:rPr>
-              <a:t>to make or become</a:t>
-            </a:r>
-            <a:endParaRPr lang="en-US" sz="850" dirty="0"/>
-          </a:p>
-        </p:txBody>
-      </p:sp>
-      <p:sp>
-        <p:nvSpPr>
-          <p:cNvPr id="28" name="Shape 26"/>
-          <p:cNvSpPr/>
-          <p:nvPr/>
-        </p:nvSpPr>
-        <p:spPr>
-          <a:xfrm>
-            <a:off x="365760" y="3273552"/>
-            <a:ext cx="1371600" cy="658368"/>
+              <a:t>Write here...</a:t>
+            </a:r>
+            <a:endParaRPr lang="en-US" sz="1100" dirty="0"/>
+          </a:p>
+        </p:txBody>
+      </p:sp>
+      <p:sp>
+        <p:nvSpPr>
+          <p:cNvPr id="30" name="Shape 28"/>
+          <p:cNvSpPr/>
+          <p:nvPr/>
+        </p:nvSpPr>
+        <p:spPr>
+          <a:xfrm>
+            <a:off x="365760" y="4096512"/>
+            <a:ext cx="1371600" cy="804672"/>
           </a:xfrm>
           <a:prstGeom prst="rect">
             <a:avLst>
-              <a:gd name="adj" fmla="val 8333"/>
+              <a:gd name="adj" fmla="val 6818"/>
             </a:avLst>
           </a:prstGeom>
           <a:solidFill>
@@ -30130,14 +31503,14 @@
       </p:sp>
       <p:sp>
         <p:nvSpPr>
-          <p:cNvPr id="29" name="Text 27"/>
-          <p:cNvSpPr/>
-          <p:nvPr/>
-        </p:nvSpPr>
-        <p:spPr>
-          <a:xfrm>
-            <a:off x="365760" y="3273552"/>
-            <a:ext cx="1371600" cy="658368"/>
+          <p:cNvPr id="31" name="Text 29"/>
+          <p:cNvSpPr/>
+          <p:nvPr/>
+        </p:nvSpPr>
+        <p:spPr>
+          <a:xfrm>
+            <a:off x="365760" y="4096512"/>
+            <a:ext cx="1371600" cy="804672"/>
           </a:xfrm>
           <a:prstGeom prst="rect">
             <a:avLst/>
@@ -30161,7 +31534,7 @@
                 <a:ea typeface="Trebuchet MS" pitchFamily="34" charset="-122"/>
                 <a:cs typeface="Trebuchet MS" pitchFamily="34" charset="-120"/>
               </a:rPr>
-              <a:t>Syllables</a:t>
+              <a:t>Phonemes</a:t>
             </a:r>
             <a:endParaRPr lang="en-US" sz="1100" dirty="0"/>
           </a:p>
@@ -30169,80 +31542,14 @@
       </p:sp>
       <p:sp>
         <p:nvSpPr>
-          <p:cNvPr id="30" name="Shape 28"/>
-          <p:cNvSpPr/>
-          <p:nvPr/>
-        </p:nvSpPr>
-        <p:spPr>
-          <a:xfrm>
-            <a:off x="1874520" y="3273552"/>
-            <a:ext cx="6903720" cy="658368"/>
-          </a:xfrm>
-          <a:prstGeom prst="rect">
-            <a:avLst>
-              <a:gd name="adj" fmla="val 8333"/>
-            </a:avLst>
-          </a:prstGeom>
-          <a:solidFill>
-            <a:srgbClr val="F8FAFC"/>
-          </a:solidFill>
-          <a:ln w="12700">
-            <a:solidFill>
-              <a:srgbClr val="E2E8F0"/>
-            </a:solidFill>
-            <a:prstDash val="dash"/>
-          </a:ln>
-        </p:spPr>
-      </p:sp>
-      <p:sp>
-        <p:nvSpPr>
-          <p:cNvPr id="31" name="Text 29"/>
-          <p:cNvSpPr/>
-          <p:nvPr/>
-        </p:nvSpPr>
-        <p:spPr>
-          <a:xfrm>
-            <a:off x="1874520" y="3273552"/>
-            <a:ext cx="6903720" cy="658368"/>
-          </a:xfrm>
-          <a:prstGeom prst="rect">
-            <a:avLst/>
-          </a:prstGeom>
-          <a:noFill/>
-          <a:ln/>
-        </p:spPr>
-        <p:txBody>
-          <a:bodyPr wrap="square" rtlCol="0" anchor="ctr"/>
-          <a:lstStyle/>
-          <a:p>
-            <a:pPr algn="ctr" indent="0" marL="0">
-              <a:buNone/>
-            </a:pPr>
-            <a:r>
-              <a:rPr lang="en-US" sz="1100" i="1" dirty="0">
-                <a:solidFill>
-                  <a:srgbClr val="CBD5E1"/>
-                </a:solidFill>
-                <a:latin typeface="Calibri" pitchFamily="34" charset="0"/>
-                <a:ea typeface="Calibri" pitchFamily="34" charset="-122"/>
-                <a:cs typeface="Calibri" pitchFamily="34" charset="-120"/>
-              </a:rPr>
-              <a:t>Write here...</a:t>
-            </a:r>
-            <a:endParaRPr lang="en-US" sz="1100" dirty="0"/>
-          </a:p>
-        </p:txBody>
-      </p:sp>
-      <p:sp>
-        <p:nvSpPr>
           <p:cNvPr id="32" name="Shape 30"/>
           <p:cNvSpPr/>
           <p:nvPr/>
         </p:nvSpPr>
         <p:spPr>
           <a:xfrm>
-            <a:off x="365760" y="4096512"/>
-            <a:ext cx="1371600" cy="804672"/>
+            <a:off x="1874520" y="4096512"/>
+            <a:ext cx="6903720" cy="804672"/>
           </a:xfrm>
           <a:prstGeom prst="rect">
             <a:avLst>
@@ -30250,85 +31557,19 @@
             </a:avLst>
           </a:prstGeom>
           <a:solidFill>
-            <a:srgbClr val="E2E8F0"/>
+            <a:srgbClr val="F8FAFC"/>
           </a:solidFill>
           <a:ln w="12700">
             <a:solidFill>
               <a:srgbClr val="E2E8F0"/>
             </a:solidFill>
-            <a:prstDash val="solid"/>
+            <a:prstDash val="dash"/>
           </a:ln>
         </p:spPr>
       </p:sp>
       <p:sp>
         <p:nvSpPr>
           <p:cNvPr id="33" name="Text 31"/>
-          <p:cNvSpPr/>
-          <p:nvPr/>
-        </p:nvSpPr>
-        <p:spPr>
-          <a:xfrm>
-            <a:off x="365760" y="4096512"/>
-            <a:ext cx="1371600" cy="804672"/>
-          </a:xfrm>
-          <a:prstGeom prst="rect">
-            <a:avLst/>
-          </a:prstGeom>
-          <a:noFill/>
-          <a:ln/>
-        </p:spPr>
-        <p:txBody>
-          <a:bodyPr wrap="square" lIns="0" tIns="0" rIns="0" bIns="0" rtlCol="0" anchor="ctr"/>
-          <a:lstStyle/>
-          <a:p>
-            <a:pPr algn="ctr" indent="0" marL="0">
-              <a:buNone/>
-            </a:pPr>
-            <a:r>
-              <a:rPr lang="en-US" sz="1100" b="1" dirty="0">
-                <a:solidFill>
-                  <a:srgbClr val="475569"/>
-                </a:solidFill>
-                <a:latin typeface="Trebuchet MS" pitchFamily="34" charset="0"/>
-                <a:ea typeface="Trebuchet MS" pitchFamily="34" charset="-122"/>
-                <a:cs typeface="Trebuchet MS" pitchFamily="34" charset="-120"/>
-              </a:rPr>
-              <a:t>Phonemes</a:t>
-            </a:r>
-            <a:endParaRPr lang="en-US" sz="1100" dirty="0"/>
-          </a:p>
-        </p:txBody>
-      </p:sp>
-      <p:sp>
-        <p:nvSpPr>
-          <p:cNvPr id="34" name="Shape 32"/>
-          <p:cNvSpPr/>
-          <p:nvPr/>
-        </p:nvSpPr>
-        <p:spPr>
-          <a:xfrm>
-            <a:off x="1874520" y="4096512"/>
-            <a:ext cx="6903720" cy="804672"/>
-          </a:xfrm>
-          <a:prstGeom prst="rect">
-            <a:avLst>
-              <a:gd name="adj" fmla="val 6818"/>
-            </a:avLst>
-          </a:prstGeom>
-          <a:solidFill>
-            <a:srgbClr val="F8FAFC"/>
-          </a:solidFill>
-          <a:ln w="12700">
-            <a:solidFill>
-              <a:srgbClr val="E2E8F0"/>
-            </a:solidFill>
-            <a:prstDash val="dash"/>
-          </a:ln>
-        </p:spPr>
-      </p:sp>
-      <p:sp>
-        <p:nvSpPr>
-          <p:cNvPr id="35" name="Text 33"/>
           <p:cNvSpPr/>
           <p:nvPr/>
         </p:nvSpPr>
@@ -30790,7 +32031,7 @@
                 <a:ea typeface="Trebuchet MS" pitchFamily="34" charset="-122"/>
                 <a:cs typeface="Trebuchet MS" pitchFamily="34" charset="-120"/>
               </a:rPr>
-              <a:t>revitalise</a:t>
+              <a:t>survival</a:t>
             </a:r>
             <a:endParaRPr lang="en-US" sz="2800" dirty="0"/>
           </a:p>
@@ -30870,8 +32111,8 @@
         </p:nvSpPr>
         <p:spPr>
           <a:xfrm>
-            <a:off x="1989734" y="2258568"/>
-            <a:ext cx="1581912" cy="292608"/>
+            <a:off x="2221992" y="2258568"/>
+            <a:ext cx="1828800" cy="292608"/>
           </a:xfrm>
           <a:prstGeom prst="rect">
             <a:avLst>
@@ -30904,8 +32145,8 @@
         </p:nvSpPr>
         <p:spPr>
           <a:xfrm>
-            <a:off x="1989734" y="2258568"/>
-            <a:ext cx="1581912" cy="292608"/>
+            <a:off x="2221992" y="2258568"/>
+            <a:ext cx="1828800" cy="292608"/>
           </a:xfrm>
           <a:prstGeom prst="rect">
             <a:avLst/>
@@ -30929,7 +32170,7 @@
                 <a:ea typeface="Trebuchet MS" pitchFamily="34" charset="-122"/>
                 <a:cs typeface="Trebuchet MS" pitchFamily="34" charset="-120"/>
               </a:rPr>
-              <a:t>re</a:t>
+              <a:t>sur</a:t>
             </a:r>
             <a:endParaRPr lang="en-US" sz="1300" dirty="0"/>
           </a:p>
@@ -30943,8 +32184,8 @@
         </p:nvSpPr>
         <p:spPr>
           <a:xfrm>
-            <a:off x="1989734" y="2569464"/>
-            <a:ext cx="1581912" cy="201168"/>
+            <a:off x="2221992" y="2569464"/>
+            <a:ext cx="1828800" cy="201168"/>
           </a:xfrm>
           <a:prstGeom prst="rect">
             <a:avLst/>
@@ -30968,7 +32209,7 @@
                 <a:ea typeface="Calibri" pitchFamily="34" charset="-122"/>
                 <a:cs typeface="Calibri" pitchFamily="34" charset="-120"/>
               </a:rPr>
-              <a:t>again</a:t>
+              <a:t>over, beyond</a:t>
             </a:r>
             <a:endParaRPr lang="en-US" sz="850" dirty="0"/>
           </a:p>
@@ -30982,8 +32223,8 @@
         </p:nvSpPr>
         <p:spPr>
           <a:xfrm>
-            <a:off x="3659429" y="2258568"/>
-            <a:ext cx="1581912" cy="292608"/>
+            <a:off x="4370832" y="2258568"/>
+            <a:ext cx="1828800" cy="292608"/>
           </a:xfrm>
           <a:prstGeom prst="rect">
             <a:avLst>
@@ -31016,8 +32257,8 @@
         </p:nvSpPr>
         <p:spPr>
           <a:xfrm>
-            <a:off x="3659429" y="2258568"/>
-            <a:ext cx="1581912" cy="292608"/>
+            <a:off x="4370832" y="2258568"/>
+            <a:ext cx="1828800" cy="292608"/>
           </a:xfrm>
           <a:prstGeom prst="rect">
             <a:avLst/>
@@ -31055,8 +32296,8 @@
         </p:nvSpPr>
         <p:spPr>
           <a:xfrm>
-            <a:off x="3659429" y="2569464"/>
-            <a:ext cx="1581912" cy="201168"/>
+            <a:off x="4370832" y="2569464"/>
+            <a:ext cx="1828800" cy="201168"/>
           </a:xfrm>
           <a:prstGeom prst="rect">
             <a:avLst/>
@@ -31094,8 +32335,8 @@
         </p:nvSpPr>
         <p:spPr>
           <a:xfrm>
-            <a:off x="5329123" y="2258568"/>
-            <a:ext cx="1581912" cy="292608"/>
+            <a:off x="6519672" y="2258568"/>
+            <a:ext cx="1828800" cy="292608"/>
           </a:xfrm>
           <a:prstGeom prst="rect">
             <a:avLst>
@@ -31128,8 +32369,8 @@
         </p:nvSpPr>
         <p:spPr>
           <a:xfrm>
-            <a:off x="5329123" y="2258568"/>
-            <a:ext cx="1581912" cy="292608"/>
+            <a:off x="6519672" y="2258568"/>
+            <a:ext cx="1828800" cy="292608"/>
           </a:xfrm>
           <a:prstGeom prst="rect">
             <a:avLst/>
@@ -31167,8 +32408,8 @@
         </p:nvSpPr>
         <p:spPr>
           <a:xfrm>
-            <a:off x="5329123" y="2569464"/>
-            <a:ext cx="1581912" cy="201168"/>
+            <a:off x="6519672" y="2569464"/>
+            <a:ext cx="1828800" cy="201168"/>
           </a:xfrm>
           <a:prstGeom prst="rect">
             <a:avLst/>
@@ -31200,113 +32441,106 @@
       </p:sp>
       <p:sp>
         <p:nvSpPr>
-          <p:cNvPr id="25" name="Shape 23"/>
-          <p:cNvSpPr/>
-          <p:nvPr/>
-        </p:nvSpPr>
-        <p:spPr>
-          <a:xfrm>
-            <a:off x="6998818" y="2258568"/>
-            <a:ext cx="1581912" cy="292608"/>
+          <p:cNvPr id="25" name="Text 23"/>
+          <p:cNvSpPr/>
+          <p:nvPr/>
+        </p:nvSpPr>
+        <p:spPr>
+          <a:xfrm>
+            <a:off x="6519672" y="2752344"/>
+            <a:ext cx="1828800" cy="182880"/>
+          </a:xfrm>
+          <a:prstGeom prst="rect">
+            <a:avLst/>
+          </a:prstGeom>
+          <a:noFill/>
+          <a:ln/>
+        </p:spPr>
+        <p:txBody>
+          <a:bodyPr wrap="square" lIns="0" tIns="0" rIns="0" bIns="0" rtlCol="0" anchor="t"/>
+          <a:lstStyle/>
+          <a:p>
+            <a:pPr algn="ctr" indent="0" marL="0">
+              <a:buNone/>
+            </a:pPr>
+            <a:r>
+              <a:rPr lang="en-US" sz="700" i="1" dirty="0">
+                <a:solidFill>
+                  <a:srgbClr val="94A3B8"/>
+                </a:solidFill>
+                <a:latin typeface="Calibri" pitchFamily="34" charset="0"/>
+                <a:ea typeface="Calibri" pitchFamily="34" charset="-122"/>
+                <a:cs typeface="Calibri" pitchFamily="34" charset="-120"/>
+              </a:rPr>
+              <a:t>'vit' shifts to 'viv' in some forms; here 'sur/viv' → 'surviv' before -al</a:t>
+            </a:r>
+            <a:endParaRPr lang="en-US" sz="700" dirty="0"/>
+          </a:p>
+        </p:txBody>
+      </p:sp>
+      <p:sp>
+        <p:nvSpPr>
+          <p:cNvPr id="26" name="Shape 24"/>
+          <p:cNvSpPr/>
+          <p:nvPr/>
+        </p:nvSpPr>
+        <p:spPr>
+          <a:xfrm>
+            <a:off x="365760" y="3273552"/>
+            <a:ext cx="1371600" cy="658368"/>
           </a:xfrm>
           <a:prstGeom prst="rect">
             <a:avLst>
-              <a:gd name="adj" fmla="val 25000"/>
+              <a:gd name="adj" fmla="val 8333"/>
             </a:avLst>
           </a:prstGeom>
           <a:solidFill>
-            <a:srgbClr val="FCE7F3"/>
-          </a:solidFill>
-          <a:ln w="19050">
-            <a:solidFill>
-              <a:srgbClr val="DB2777"/>
-            </a:solidFill>
-            <a:prstDash val="solid"/>
-          </a:ln>
-          <a:effectLst>
-            <a:outerShdw sx="100000" sy="100000" kx="0" ky="0" algn="bl" rotWithShape="0" blurRad="101600" dist="38100" dir="8100000">
-              <a:srgbClr val="000000">
-                <a:alpha val="12000"/>
-              </a:srgbClr>
-            </a:outerShdw>
-          </a:effectLst>
-        </p:spPr>
-      </p:sp>
-      <p:sp>
-        <p:nvSpPr>
-          <p:cNvPr id="26" name="Text 24"/>
-          <p:cNvSpPr/>
-          <p:nvPr/>
-        </p:nvSpPr>
-        <p:spPr>
-          <a:xfrm>
-            <a:off x="6998818" y="2258568"/>
-            <a:ext cx="1581912" cy="292608"/>
-          </a:xfrm>
-          <a:prstGeom prst="rect">
-            <a:avLst/>
-          </a:prstGeom>
-          <a:noFill/>
-          <a:ln/>
-        </p:spPr>
-        <p:txBody>
-          <a:bodyPr wrap="square" lIns="0" tIns="0" rIns="0" bIns="0" rtlCol="0" anchor="ctr"/>
-          <a:lstStyle/>
-          <a:p>
-            <a:pPr algn="ctr" indent="0" marL="0">
-              <a:buNone/>
-            </a:pPr>
-            <a:r>
-              <a:rPr lang="en-US" sz="1300" b="1" dirty="0">
-                <a:solidFill>
-                  <a:srgbClr val="9D174D"/>
+            <a:srgbClr val="E2E8F0"/>
+          </a:solidFill>
+          <a:ln w="12700">
+            <a:solidFill>
+              <a:srgbClr val="E2E8F0"/>
+            </a:solidFill>
+            <a:prstDash val="solid"/>
+          </a:ln>
+        </p:spPr>
+      </p:sp>
+      <p:sp>
+        <p:nvSpPr>
+          <p:cNvPr id="27" name="Text 25"/>
+          <p:cNvSpPr/>
+          <p:nvPr/>
+        </p:nvSpPr>
+        <p:spPr>
+          <a:xfrm>
+            <a:off x="365760" y="3273552"/>
+            <a:ext cx="1371600" cy="658368"/>
+          </a:xfrm>
+          <a:prstGeom prst="rect">
+            <a:avLst/>
+          </a:prstGeom>
+          <a:noFill/>
+          <a:ln/>
+        </p:spPr>
+        <p:txBody>
+          <a:bodyPr wrap="square" lIns="0" tIns="0" rIns="0" bIns="0" rtlCol="0" anchor="ctr"/>
+          <a:lstStyle/>
+          <a:p>
+            <a:pPr algn="ctr" indent="0" marL="0">
+              <a:buNone/>
+            </a:pPr>
+            <a:r>
+              <a:rPr lang="en-US" sz="1100" b="1" dirty="0">
+                <a:solidFill>
+                  <a:srgbClr val="475569"/>
                 </a:solidFill>
                 <a:latin typeface="Trebuchet MS" pitchFamily="34" charset="0"/>
                 <a:ea typeface="Trebuchet MS" pitchFamily="34" charset="-122"/>
                 <a:cs typeface="Trebuchet MS" pitchFamily="34" charset="-120"/>
               </a:rPr>
-              <a:t>ise</a:t>
-            </a:r>
-            <a:endParaRPr lang="en-US" sz="1300" dirty="0"/>
-          </a:p>
-        </p:txBody>
-      </p:sp>
-      <p:sp>
-        <p:nvSpPr>
-          <p:cNvPr id="27" name="Text 25"/>
-          <p:cNvSpPr/>
-          <p:nvPr/>
-        </p:nvSpPr>
-        <p:spPr>
-          <a:xfrm>
-            <a:off x="6998818" y="2569464"/>
-            <a:ext cx="1581912" cy="201168"/>
-          </a:xfrm>
-          <a:prstGeom prst="rect">
-            <a:avLst/>
-          </a:prstGeom>
-          <a:noFill/>
-          <a:ln/>
-        </p:spPr>
-        <p:txBody>
-          <a:bodyPr wrap="square" lIns="0" tIns="0" rIns="0" bIns="0" rtlCol="0" anchor="t"/>
-          <a:lstStyle/>
-          <a:p>
-            <a:pPr algn="ctr" indent="0" marL="0">
-              <a:buNone/>
-            </a:pPr>
-            <a:r>
-              <a:rPr lang="en-US" sz="850" dirty="0">
-                <a:solidFill>
-                  <a:srgbClr val="475569"/>
-                </a:solidFill>
-                <a:latin typeface="Calibri" pitchFamily="34" charset="0"/>
-                <a:ea typeface="Calibri" pitchFamily="34" charset="-122"/>
-                <a:cs typeface="Calibri" pitchFamily="34" charset="-120"/>
-              </a:rPr>
-              <a:t>to make or become</a:t>
-            </a:r>
-            <a:endParaRPr lang="en-US" sz="850" dirty="0"/>
+              <a:t>Syllables</a:t>
+            </a:r>
+            <a:endParaRPr lang="en-US" sz="1100" dirty="0"/>
           </a:p>
         </p:txBody>
       </p:sp>
@@ -31318,8 +32552,8 @@
         </p:nvSpPr>
         <p:spPr>
           <a:xfrm>
-            <a:off x="365760" y="3273552"/>
-            <a:ext cx="1371600" cy="658368"/>
+            <a:off x="1874520" y="3273552"/>
+            <a:ext cx="6903720" cy="658368"/>
           </a:xfrm>
           <a:prstGeom prst="rect">
             <a:avLst>
@@ -31327,92 +32561,131 @@
             </a:avLst>
           </a:prstGeom>
           <a:solidFill>
-            <a:srgbClr val="E2E8F0"/>
-          </a:solidFill>
-          <a:ln w="12700">
-            <a:solidFill>
-              <a:srgbClr val="E2E8F0"/>
-            </a:solidFill>
-            <a:prstDash val="solid"/>
-          </a:ln>
-        </p:spPr>
-      </p:sp>
-      <p:sp>
-        <p:nvSpPr>
-          <p:cNvPr id="29" name="Text 27"/>
-          <p:cNvSpPr/>
-          <p:nvPr/>
-        </p:nvSpPr>
-        <p:spPr>
-          <a:xfrm>
-            <a:off x="365760" y="3273552"/>
-            <a:ext cx="1371600" cy="658368"/>
-          </a:xfrm>
-          <a:prstGeom prst="rect">
-            <a:avLst/>
-          </a:prstGeom>
-          <a:noFill/>
-          <a:ln/>
-        </p:spPr>
-        <p:txBody>
-          <a:bodyPr wrap="square" lIns="0" tIns="0" rIns="0" bIns="0" rtlCol="0" anchor="ctr"/>
-          <a:lstStyle/>
-          <a:p>
-            <a:pPr algn="ctr" indent="0" marL="0">
-              <a:buNone/>
-            </a:pPr>
-            <a:r>
-              <a:rPr lang="en-US" sz="1100" b="1" dirty="0">
-                <a:solidFill>
-                  <a:srgbClr val="475569"/>
+            <a:srgbClr val="CCFBF1"/>
+          </a:solidFill>
+          <a:ln w="12700">
+            <a:solidFill>
+              <a:srgbClr val="0D9488"/>
+            </a:solidFill>
+            <a:prstDash val="solid"/>
+          </a:ln>
+        </p:spPr>
+      </p:sp>
+      <p:sp>
+        <p:nvSpPr>
+          <p:cNvPr id="29" name="Shape 27"/>
+          <p:cNvSpPr/>
+          <p:nvPr/>
+        </p:nvSpPr>
+        <p:spPr>
+          <a:xfrm>
+            <a:off x="2313432" y="3364992"/>
+            <a:ext cx="1645920" cy="475488"/>
+          </a:xfrm>
+          <a:prstGeom prst="rect">
+            <a:avLst>
+              <a:gd name="adj" fmla="val 9615"/>
+            </a:avLst>
+          </a:prstGeom>
+          <a:solidFill>
+            <a:srgbClr val="FFFFFF"/>
+          </a:solidFill>
+          <a:ln w="12700">
+            <a:solidFill>
+              <a:srgbClr val="0D9488"/>
+            </a:solidFill>
+            <a:prstDash val="solid"/>
+          </a:ln>
+        </p:spPr>
+      </p:sp>
+      <p:sp>
+        <p:nvSpPr>
+          <p:cNvPr id="30" name="Text 28"/>
+          <p:cNvSpPr/>
+          <p:nvPr/>
+        </p:nvSpPr>
+        <p:spPr>
+          <a:xfrm>
+            <a:off x="2313432" y="3364992"/>
+            <a:ext cx="1645920" cy="475488"/>
+          </a:xfrm>
+          <a:prstGeom prst="rect">
+            <a:avLst/>
+          </a:prstGeom>
+          <a:noFill/>
+          <a:ln/>
+        </p:spPr>
+        <p:txBody>
+          <a:bodyPr wrap="square" lIns="0" tIns="0" rIns="0" bIns="0" rtlCol="0" anchor="ctr"/>
+          <a:lstStyle/>
+          <a:p>
+            <a:pPr algn="ctr" indent="0" marL="0">
+              <a:buNone/>
+            </a:pPr>
+            <a:r>
+              <a:rPr lang="en-US" sz="1400" b="1" dirty="0">
+                <a:solidFill>
+                  <a:srgbClr val="0D9488"/>
                 </a:solidFill>
                 <a:latin typeface="Trebuchet MS" pitchFamily="34" charset="0"/>
                 <a:ea typeface="Trebuchet MS" pitchFamily="34" charset="-122"/>
                 <a:cs typeface="Trebuchet MS" pitchFamily="34" charset="-120"/>
               </a:rPr>
-              <a:t>Syllables</a:t>
-            </a:r>
-            <a:endParaRPr lang="en-US" sz="1100" dirty="0"/>
-          </a:p>
-        </p:txBody>
-      </p:sp>
-      <p:sp>
-        <p:nvSpPr>
-          <p:cNvPr id="30" name="Shape 28"/>
-          <p:cNvSpPr/>
-          <p:nvPr/>
-        </p:nvSpPr>
-        <p:spPr>
-          <a:xfrm>
-            <a:off x="1874520" y="3273552"/>
-            <a:ext cx="6903720" cy="658368"/>
-          </a:xfrm>
-          <a:prstGeom prst="rect">
-            <a:avLst>
-              <a:gd name="adj" fmla="val 8333"/>
-            </a:avLst>
-          </a:prstGeom>
-          <a:solidFill>
-            <a:srgbClr val="CCFBF1"/>
-          </a:solidFill>
-          <a:ln w="12700">
-            <a:solidFill>
-              <a:srgbClr val="0D9488"/>
-            </a:solidFill>
-            <a:prstDash val="solid"/>
-          </a:ln>
-        </p:spPr>
-      </p:sp>
-      <p:sp>
-        <p:nvSpPr>
-          <p:cNvPr id="31" name="Shape 29"/>
-          <p:cNvSpPr/>
-          <p:nvPr/>
-        </p:nvSpPr>
-        <p:spPr>
-          <a:xfrm>
-            <a:off x="1975104" y="3364992"/>
-            <a:ext cx="1554480" cy="475488"/>
+              <a:t>sur</a:t>
+            </a:r>
+            <a:endParaRPr lang="en-US" sz="1400" dirty="0"/>
+          </a:p>
+        </p:txBody>
+      </p:sp>
+      <p:sp>
+        <p:nvSpPr>
+          <p:cNvPr id="31" name="Text 29"/>
+          <p:cNvSpPr/>
+          <p:nvPr/>
+        </p:nvSpPr>
+        <p:spPr>
+          <a:xfrm>
+            <a:off x="3959352" y="3364992"/>
+            <a:ext cx="411480" cy="475488"/>
+          </a:xfrm>
+          <a:prstGeom prst="rect">
+            <a:avLst/>
+          </a:prstGeom>
+          <a:noFill/>
+          <a:ln/>
+        </p:spPr>
+        <p:txBody>
+          <a:bodyPr wrap="square" lIns="0" tIns="0" rIns="0" bIns="0" rtlCol="0" anchor="ctr"/>
+          <a:lstStyle/>
+          <a:p>
+            <a:pPr algn="ctr" indent="0" marL="0">
+              <a:buNone/>
+            </a:pPr>
+            <a:r>
+              <a:rPr lang="en-US" sz="1600" b="1" dirty="0">
+                <a:solidFill>
+                  <a:srgbClr val="0D9488"/>
+                </a:solidFill>
+                <a:latin typeface="Trebuchet MS" pitchFamily="34" charset="0"/>
+                <a:ea typeface="Trebuchet MS" pitchFamily="34" charset="-122"/>
+                <a:cs typeface="Trebuchet MS" pitchFamily="34" charset="-120"/>
+              </a:rPr>
+              <a:t>·</a:t>
+            </a:r>
+            <a:endParaRPr lang="en-US" sz="1600" dirty="0"/>
+          </a:p>
+        </p:txBody>
+      </p:sp>
+      <p:sp>
+        <p:nvSpPr>
+          <p:cNvPr id="32" name="Shape 30"/>
+          <p:cNvSpPr/>
+          <p:nvPr/>
+        </p:nvSpPr>
+        <p:spPr>
+          <a:xfrm>
+            <a:off x="4370832" y="3364992"/>
+            <a:ext cx="1645920" cy="475488"/>
           </a:xfrm>
           <a:prstGeom prst="rect">
             <a:avLst>
@@ -31432,14 +32705,14 @@
       </p:sp>
       <p:sp>
         <p:nvSpPr>
-          <p:cNvPr id="32" name="Text 30"/>
-          <p:cNvSpPr/>
-          <p:nvPr/>
-        </p:nvSpPr>
-        <p:spPr>
-          <a:xfrm>
-            <a:off x="1975104" y="3364992"/>
-            <a:ext cx="1554480" cy="475488"/>
+          <p:cNvPr id="33" name="Text 31"/>
+          <p:cNvSpPr/>
+          <p:nvPr/>
+        </p:nvSpPr>
+        <p:spPr>
+          <a:xfrm>
+            <a:off x="4370832" y="3364992"/>
+            <a:ext cx="1645920" cy="475488"/>
           </a:xfrm>
           <a:prstGeom prst="rect">
             <a:avLst/>
@@ -31463,7 +32736,7 @@
                 <a:ea typeface="Trebuchet MS" pitchFamily="34" charset="-122"/>
                 <a:cs typeface="Trebuchet MS" pitchFamily="34" charset="-120"/>
               </a:rPr>
-              <a:t>re</a:t>
+              <a:t>viv</a:t>
             </a:r>
             <a:endParaRPr lang="en-US" sz="1400" dirty="0"/>
           </a:p>
@@ -31471,14 +32744,14 @@
       </p:sp>
       <p:sp>
         <p:nvSpPr>
-          <p:cNvPr id="33" name="Text 31"/>
-          <p:cNvSpPr/>
-          <p:nvPr/>
-        </p:nvSpPr>
-        <p:spPr>
-          <a:xfrm>
-            <a:off x="3529584" y="3364992"/>
-            <a:ext cx="73152" cy="475488"/>
+          <p:cNvPr id="34" name="Text 32"/>
+          <p:cNvSpPr/>
+          <p:nvPr/>
+        </p:nvSpPr>
+        <p:spPr>
+          <a:xfrm>
+            <a:off x="6016752" y="3364992"/>
+            <a:ext cx="411480" cy="475488"/>
           </a:xfrm>
           <a:prstGeom prst="rect">
             <a:avLst/>
@@ -31510,14 +32783,14 @@
       </p:sp>
       <p:sp>
         <p:nvSpPr>
-          <p:cNvPr id="34" name="Shape 32"/>
-          <p:cNvSpPr/>
-          <p:nvPr/>
-        </p:nvSpPr>
-        <p:spPr>
-          <a:xfrm>
-            <a:off x="3602736" y="3364992"/>
-            <a:ext cx="1554480" cy="475488"/>
+          <p:cNvPr id="35" name="Shape 33"/>
+          <p:cNvSpPr/>
+          <p:nvPr/>
+        </p:nvSpPr>
+        <p:spPr>
+          <a:xfrm>
+            <a:off x="6428232" y="3364992"/>
+            <a:ext cx="1645920" cy="475488"/>
           </a:xfrm>
           <a:prstGeom prst="rect">
             <a:avLst>
@@ -31537,14 +32810,14 @@
       </p:sp>
       <p:sp>
         <p:nvSpPr>
-          <p:cNvPr id="35" name="Text 33"/>
-          <p:cNvSpPr/>
-          <p:nvPr/>
-        </p:nvSpPr>
-        <p:spPr>
-          <a:xfrm>
-            <a:off x="3602736" y="3364992"/>
-            <a:ext cx="1554480" cy="475488"/>
+          <p:cNvPr id="36" name="Text 34"/>
+          <p:cNvSpPr/>
+          <p:nvPr/>
+        </p:nvSpPr>
+        <p:spPr>
+          <a:xfrm>
+            <a:off x="6428232" y="3364992"/>
+            <a:ext cx="1645920" cy="475488"/>
           </a:xfrm>
           <a:prstGeom prst="rect">
             <a:avLst/>
@@ -31568,7 +32841,7 @@
                 <a:ea typeface="Trebuchet MS" pitchFamily="34" charset="-122"/>
                 <a:cs typeface="Trebuchet MS" pitchFamily="34" charset="-120"/>
               </a:rPr>
-              <a:t>vi</a:t>
+              <a:t>al</a:t>
             </a:r>
             <a:endParaRPr lang="en-US" sz="1400" dirty="0"/>
           </a:p>
@@ -31576,224 +32849,80 @@
       </p:sp>
       <p:sp>
         <p:nvSpPr>
-          <p:cNvPr id="36" name="Text 34"/>
-          <p:cNvSpPr/>
-          <p:nvPr/>
-        </p:nvSpPr>
-        <p:spPr>
-          <a:xfrm>
-            <a:off x="5157216" y="3364992"/>
-            <a:ext cx="73152" cy="475488"/>
-          </a:xfrm>
-          <a:prstGeom prst="rect">
-            <a:avLst/>
-          </a:prstGeom>
-          <a:noFill/>
-          <a:ln/>
-        </p:spPr>
-        <p:txBody>
-          <a:bodyPr wrap="square" lIns="0" tIns="0" rIns="0" bIns="0" rtlCol="0" anchor="ctr"/>
-          <a:lstStyle/>
-          <a:p>
-            <a:pPr algn="ctr" indent="0" marL="0">
-              <a:buNone/>
-            </a:pPr>
-            <a:r>
-              <a:rPr lang="en-US" sz="1600" b="1" dirty="0">
-                <a:solidFill>
-                  <a:srgbClr val="0D9488"/>
+          <p:cNvPr id="37" name="Shape 35"/>
+          <p:cNvSpPr/>
+          <p:nvPr/>
+        </p:nvSpPr>
+        <p:spPr>
+          <a:xfrm>
+            <a:off x="365760" y="4096512"/>
+            <a:ext cx="1371600" cy="804672"/>
+          </a:xfrm>
+          <a:prstGeom prst="rect">
+            <a:avLst>
+              <a:gd name="adj" fmla="val 6818"/>
+            </a:avLst>
+          </a:prstGeom>
+          <a:solidFill>
+            <a:srgbClr val="E2E8F0"/>
+          </a:solidFill>
+          <a:ln w="12700">
+            <a:solidFill>
+              <a:srgbClr val="E2E8F0"/>
+            </a:solidFill>
+            <a:prstDash val="solid"/>
+          </a:ln>
+        </p:spPr>
+      </p:sp>
+      <p:sp>
+        <p:nvSpPr>
+          <p:cNvPr id="38" name="Text 36"/>
+          <p:cNvSpPr/>
+          <p:nvPr/>
+        </p:nvSpPr>
+        <p:spPr>
+          <a:xfrm>
+            <a:off x="365760" y="4096512"/>
+            <a:ext cx="1371600" cy="804672"/>
+          </a:xfrm>
+          <a:prstGeom prst="rect">
+            <a:avLst/>
+          </a:prstGeom>
+          <a:noFill/>
+          <a:ln/>
+        </p:spPr>
+        <p:txBody>
+          <a:bodyPr wrap="square" lIns="0" tIns="0" rIns="0" bIns="0" rtlCol="0" anchor="ctr"/>
+          <a:lstStyle/>
+          <a:p>
+            <a:pPr algn="ctr" indent="0" marL="0">
+              <a:buNone/>
+            </a:pPr>
+            <a:r>
+              <a:rPr lang="en-US" sz="1100" b="1" dirty="0">
+                <a:solidFill>
+                  <a:srgbClr val="475569"/>
                 </a:solidFill>
                 <a:latin typeface="Trebuchet MS" pitchFamily="34" charset="0"/>
                 <a:ea typeface="Trebuchet MS" pitchFamily="34" charset="-122"/>
                 <a:cs typeface="Trebuchet MS" pitchFamily="34" charset="-120"/>
               </a:rPr>
-              <a:t>·</a:t>
-            </a:r>
-            <a:endParaRPr lang="en-US" sz="1600" dirty="0"/>
-          </a:p>
-        </p:txBody>
-      </p:sp>
-      <p:sp>
-        <p:nvSpPr>
-          <p:cNvPr id="37" name="Shape 35"/>
-          <p:cNvSpPr/>
-          <p:nvPr/>
-        </p:nvSpPr>
-        <p:spPr>
-          <a:xfrm>
-            <a:off x="5230368" y="3364992"/>
-            <a:ext cx="1554480" cy="475488"/>
-          </a:xfrm>
-          <a:prstGeom prst="rect">
-            <a:avLst>
-              <a:gd name="adj" fmla="val 9615"/>
-            </a:avLst>
-          </a:prstGeom>
-          <a:solidFill>
-            <a:srgbClr val="FFFFFF"/>
-          </a:solidFill>
-          <a:ln w="12700">
-            <a:solidFill>
-              <a:srgbClr val="0D9488"/>
-            </a:solidFill>
-            <a:prstDash val="solid"/>
-          </a:ln>
-        </p:spPr>
-      </p:sp>
-      <p:sp>
-        <p:nvSpPr>
-          <p:cNvPr id="38" name="Text 36"/>
-          <p:cNvSpPr/>
-          <p:nvPr/>
-        </p:nvSpPr>
-        <p:spPr>
-          <a:xfrm>
-            <a:off x="5230368" y="3364992"/>
-            <a:ext cx="1554480" cy="475488"/>
-          </a:xfrm>
-          <a:prstGeom prst="rect">
-            <a:avLst/>
-          </a:prstGeom>
-          <a:noFill/>
-          <a:ln/>
-        </p:spPr>
-        <p:txBody>
-          <a:bodyPr wrap="square" lIns="0" tIns="0" rIns="0" bIns="0" rtlCol="0" anchor="ctr"/>
-          <a:lstStyle/>
-          <a:p>
-            <a:pPr algn="ctr" indent="0" marL="0">
-              <a:buNone/>
-            </a:pPr>
-            <a:r>
-              <a:rPr lang="en-US" sz="1400" b="1" dirty="0">
-                <a:solidFill>
-                  <a:srgbClr val="0D9488"/>
-                </a:solidFill>
-                <a:latin typeface="Trebuchet MS" pitchFamily="34" charset="0"/>
-                <a:ea typeface="Trebuchet MS" pitchFamily="34" charset="-122"/>
-                <a:cs typeface="Trebuchet MS" pitchFamily="34" charset="-120"/>
-              </a:rPr>
-              <a:t>tal</a:t>
-            </a:r>
-            <a:endParaRPr lang="en-US" sz="1400" dirty="0"/>
-          </a:p>
-        </p:txBody>
-      </p:sp>
-      <p:sp>
-        <p:nvSpPr>
-          <p:cNvPr id="39" name="Text 37"/>
-          <p:cNvSpPr/>
-          <p:nvPr/>
-        </p:nvSpPr>
-        <p:spPr>
-          <a:xfrm>
-            <a:off x="6784848" y="3364992"/>
-            <a:ext cx="73152" cy="475488"/>
-          </a:xfrm>
-          <a:prstGeom prst="rect">
-            <a:avLst/>
-          </a:prstGeom>
-          <a:noFill/>
-          <a:ln/>
-        </p:spPr>
-        <p:txBody>
-          <a:bodyPr wrap="square" lIns="0" tIns="0" rIns="0" bIns="0" rtlCol="0" anchor="ctr"/>
-          <a:lstStyle/>
-          <a:p>
-            <a:pPr algn="ctr" indent="0" marL="0">
-              <a:buNone/>
-            </a:pPr>
-            <a:r>
-              <a:rPr lang="en-US" sz="1600" b="1" dirty="0">
-                <a:solidFill>
-                  <a:srgbClr val="0D9488"/>
-                </a:solidFill>
-                <a:latin typeface="Trebuchet MS" pitchFamily="34" charset="0"/>
-                <a:ea typeface="Trebuchet MS" pitchFamily="34" charset="-122"/>
-                <a:cs typeface="Trebuchet MS" pitchFamily="34" charset="-120"/>
-              </a:rPr>
-              <a:t>·</a:t>
-            </a:r>
-            <a:endParaRPr lang="en-US" sz="1600" dirty="0"/>
-          </a:p>
-        </p:txBody>
-      </p:sp>
-      <p:sp>
-        <p:nvSpPr>
-          <p:cNvPr id="40" name="Shape 38"/>
-          <p:cNvSpPr/>
-          <p:nvPr/>
-        </p:nvSpPr>
-        <p:spPr>
-          <a:xfrm>
-            <a:off x="6858000" y="3364992"/>
-            <a:ext cx="1554480" cy="475488"/>
-          </a:xfrm>
-          <a:prstGeom prst="rect">
-            <a:avLst>
-              <a:gd name="adj" fmla="val 9615"/>
-            </a:avLst>
-          </a:prstGeom>
-          <a:solidFill>
-            <a:srgbClr val="FFFFFF"/>
-          </a:solidFill>
-          <a:ln w="12700">
-            <a:solidFill>
-              <a:srgbClr val="0D9488"/>
-            </a:solidFill>
-            <a:prstDash val="solid"/>
-          </a:ln>
-        </p:spPr>
-      </p:sp>
-      <p:sp>
-        <p:nvSpPr>
-          <p:cNvPr id="41" name="Text 39"/>
-          <p:cNvSpPr/>
-          <p:nvPr/>
-        </p:nvSpPr>
-        <p:spPr>
-          <a:xfrm>
-            <a:off x="6858000" y="3364992"/>
-            <a:ext cx="1554480" cy="475488"/>
-          </a:xfrm>
-          <a:prstGeom prst="rect">
-            <a:avLst/>
-          </a:prstGeom>
-          <a:noFill/>
-          <a:ln/>
-        </p:spPr>
-        <p:txBody>
-          <a:bodyPr wrap="square" lIns="0" tIns="0" rIns="0" bIns="0" rtlCol="0" anchor="ctr"/>
-          <a:lstStyle/>
-          <a:p>
-            <a:pPr algn="ctr" indent="0" marL="0">
-              <a:buNone/>
-            </a:pPr>
-            <a:r>
-              <a:rPr lang="en-US" sz="1400" b="1" dirty="0">
-                <a:solidFill>
-                  <a:srgbClr val="0D9488"/>
-                </a:solidFill>
-                <a:latin typeface="Trebuchet MS" pitchFamily="34" charset="0"/>
-                <a:ea typeface="Trebuchet MS" pitchFamily="34" charset="-122"/>
-                <a:cs typeface="Trebuchet MS" pitchFamily="34" charset="-120"/>
-              </a:rPr>
-              <a:t>ise</a:t>
-            </a:r>
-            <a:endParaRPr lang="en-US" sz="1400" dirty="0"/>
-          </a:p>
-        </p:txBody>
-      </p:sp>
-      <p:sp>
-        <p:nvSpPr>
-          <p:cNvPr id="42" name="Shape 40"/>
-          <p:cNvSpPr/>
-          <p:nvPr/>
-        </p:nvSpPr>
-        <p:spPr>
-          <a:xfrm>
-            <a:off x="365760" y="4096512"/>
-            <a:ext cx="1371600" cy="804672"/>
+              <a:t>Phonemes</a:t>
+            </a:r>
+            <a:endParaRPr lang="en-US" sz="1100" dirty="0"/>
+          </a:p>
+        </p:txBody>
+      </p:sp>
+      <p:sp>
+        <p:nvSpPr>
+          <p:cNvPr id="39" name="Shape 37"/>
+          <p:cNvSpPr/>
+          <p:nvPr/>
+        </p:nvSpPr>
+        <p:spPr>
+          <a:xfrm>
+            <a:off x="1874520" y="4096512"/>
+            <a:ext cx="6903720" cy="804672"/>
           </a:xfrm>
           <a:prstGeom prst="rect">
             <a:avLst>
@@ -31801,85 +32930,19 @@
             </a:avLst>
           </a:prstGeom>
           <a:solidFill>
-            <a:srgbClr val="E2E8F0"/>
+            <a:srgbClr val="F8FAFC"/>
           </a:solidFill>
           <a:ln w="12700">
             <a:solidFill>
               <a:srgbClr val="E2E8F0"/>
             </a:solidFill>
-            <a:prstDash val="solid"/>
-          </a:ln>
-        </p:spPr>
-      </p:sp>
-      <p:sp>
-        <p:nvSpPr>
-          <p:cNvPr id="43" name="Text 41"/>
-          <p:cNvSpPr/>
-          <p:nvPr/>
-        </p:nvSpPr>
-        <p:spPr>
-          <a:xfrm>
-            <a:off x="365760" y="4096512"/>
-            <a:ext cx="1371600" cy="804672"/>
-          </a:xfrm>
-          <a:prstGeom prst="rect">
-            <a:avLst/>
-          </a:prstGeom>
-          <a:noFill/>
-          <a:ln/>
-        </p:spPr>
-        <p:txBody>
-          <a:bodyPr wrap="square" lIns="0" tIns="0" rIns="0" bIns="0" rtlCol="0" anchor="ctr"/>
-          <a:lstStyle/>
-          <a:p>
-            <a:pPr algn="ctr" indent="0" marL="0">
-              <a:buNone/>
-            </a:pPr>
-            <a:r>
-              <a:rPr lang="en-US" sz="1100" b="1" dirty="0">
-                <a:solidFill>
-                  <a:srgbClr val="475569"/>
-                </a:solidFill>
-                <a:latin typeface="Trebuchet MS" pitchFamily="34" charset="0"/>
-                <a:ea typeface="Trebuchet MS" pitchFamily="34" charset="-122"/>
-                <a:cs typeface="Trebuchet MS" pitchFamily="34" charset="-120"/>
-              </a:rPr>
-              <a:t>Phonemes</a:t>
-            </a:r>
-            <a:endParaRPr lang="en-US" sz="1100" dirty="0"/>
-          </a:p>
-        </p:txBody>
-      </p:sp>
-      <p:sp>
-        <p:nvSpPr>
-          <p:cNvPr id="44" name="Shape 42"/>
-          <p:cNvSpPr/>
-          <p:nvPr/>
-        </p:nvSpPr>
-        <p:spPr>
-          <a:xfrm>
-            <a:off x="1874520" y="4096512"/>
-            <a:ext cx="6903720" cy="804672"/>
-          </a:xfrm>
-          <a:prstGeom prst="rect">
-            <a:avLst>
-              <a:gd name="adj" fmla="val 6818"/>
-            </a:avLst>
-          </a:prstGeom>
-          <a:solidFill>
-            <a:srgbClr val="F8FAFC"/>
-          </a:solidFill>
-          <a:ln w="12700">
-            <a:solidFill>
-              <a:srgbClr val="E2E8F0"/>
-            </a:solidFill>
             <a:prstDash val="dash"/>
           </a:ln>
         </p:spPr>
       </p:sp>
       <p:sp>
         <p:nvSpPr>
-          <p:cNvPr id="45" name="Text 43"/>
+          <p:cNvPr id="40" name="Text 38"/>
           <p:cNvSpPr/>
           <p:nvPr/>
         </p:nvSpPr>
@@ -32341,7 +33404,7 @@
                 <a:ea typeface="Trebuchet MS" pitchFamily="34" charset="-122"/>
                 <a:cs typeface="Trebuchet MS" pitchFamily="34" charset="-120"/>
               </a:rPr>
-              <a:t>revitalise</a:t>
+              <a:t>survival</a:t>
             </a:r>
             <a:endParaRPr lang="en-US" sz="2800" dirty="0"/>
           </a:p>
@@ -32421,8 +33484,8 @@
         </p:nvSpPr>
         <p:spPr>
           <a:xfrm>
-            <a:off x="1989734" y="2258568"/>
-            <a:ext cx="1581912" cy="292608"/>
+            <a:off x="2221992" y="2258568"/>
+            <a:ext cx="1828800" cy="292608"/>
           </a:xfrm>
           <a:prstGeom prst="rect">
             <a:avLst>
@@ -32455,8 +33518,8 @@
         </p:nvSpPr>
         <p:spPr>
           <a:xfrm>
-            <a:off x="1989734" y="2258568"/>
-            <a:ext cx="1581912" cy="292608"/>
+            <a:off x="2221992" y="2258568"/>
+            <a:ext cx="1828800" cy="292608"/>
           </a:xfrm>
           <a:prstGeom prst="rect">
             <a:avLst/>
@@ -32480,7 +33543,7 @@
                 <a:ea typeface="Trebuchet MS" pitchFamily="34" charset="-122"/>
                 <a:cs typeface="Trebuchet MS" pitchFamily="34" charset="-120"/>
               </a:rPr>
-              <a:t>re</a:t>
+              <a:t>sur</a:t>
             </a:r>
             <a:endParaRPr lang="en-US" sz="1300" dirty="0"/>
           </a:p>
@@ -32494,8 +33557,8 @@
         </p:nvSpPr>
         <p:spPr>
           <a:xfrm>
-            <a:off x="1989734" y="2569464"/>
-            <a:ext cx="1581912" cy="201168"/>
+            <a:off x="2221992" y="2569464"/>
+            <a:ext cx="1828800" cy="201168"/>
           </a:xfrm>
           <a:prstGeom prst="rect">
             <a:avLst/>
@@ -32519,7 +33582,7 @@
                 <a:ea typeface="Calibri" pitchFamily="34" charset="-122"/>
                 <a:cs typeface="Calibri" pitchFamily="34" charset="-120"/>
               </a:rPr>
-              <a:t>again</a:t>
+              <a:t>over, beyond</a:t>
             </a:r>
             <a:endParaRPr lang="en-US" sz="850" dirty="0"/>
           </a:p>
@@ -32533,8 +33596,8 @@
         </p:nvSpPr>
         <p:spPr>
           <a:xfrm>
-            <a:off x="3659429" y="2258568"/>
-            <a:ext cx="1581912" cy="292608"/>
+            <a:off x="4370832" y="2258568"/>
+            <a:ext cx="1828800" cy="292608"/>
           </a:xfrm>
           <a:prstGeom prst="rect">
             <a:avLst>
@@ -32567,8 +33630,8 @@
         </p:nvSpPr>
         <p:spPr>
           <a:xfrm>
-            <a:off x="3659429" y="2258568"/>
-            <a:ext cx="1581912" cy="292608"/>
+            <a:off x="4370832" y="2258568"/>
+            <a:ext cx="1828800" cy="292608"/>
           </a:xfrm>
           <a:prstGeom prst="rect">
             <a:avLst/>
@@ -32606,8 +33669,8 @@
         </p:nvSpPr>
         <p:spPr>
           <a:xfrm>
-            <a:off x="3659429" y="2569464"/>
-            <a:ext cx="1581912" cy="201168"/>
+            <a:off x="4370832" y="2569464"/>
+            <a:ext cx="1828800" cy="201168"/>
           </a:xfrm>
           <a:prstGeom prst="rect">
             <a:avLst/>
@@ -32645,8 +33708,8 @@
         </p:nvSpPr>
         <p:spPr>
           <a:xfrm>
-            <a:off x="5329123" y="2258568"/>
-            <a:ext cx="1581912" cy="292608"/>
+            <a:off x="6519672" y="2258568"/>
+            <a:ext cx="1828800" cy="292608"/>
           </a:xfrm>
           <a:prstGeom prst="rect">
             <a:avLst>
@@ -32679,8 +33742,8 @@
         </p:nvSpPr>
         <p:spPr>
           <a:xfrm>
-            <a:off x="5329123" y="2258568"/>
-            <a:ext cx="1581912" cy="292608"/>
+            <a:off x="6519672" y="2258568"/>
+            <a:ext cx="1828800" cy="292608"/>
           </a:xfrm>
           <a:prstGeom prst="rect">
             <a:avLst/>
@@ -32718,8 +33781,8 @@
         </p:nvSpPr>
         <p:spPr>
           <a:xfrm>
-            <a:off x="5329123" y="2569464"/>
-            <a:ext cx="1581912" cy="201168"/>
+            <a:off x="6519672" y="2569464"/>
+            <a:ext cx="1828800" cy="201168"/>
           </a:xfrm>
           <a:prstGeom prst="rect">
             <a:avLst/>
@@ -32751,113 +33814,106 @@
       </p:sp>
       <p:sp>
         <p:nvSpPr>
-          <p:cNvPr id="25" name="Shape 23"/>
-          <p:cNvSpPr/>
-          <p:nvPr/>
-        </p:nvSpPr>
-        <p:spPr>
-          <a:xfrm>
-            <a:off x="6998818" y="2258568"/>
-            <a:ext cx="1581912" cy="292608"/>
+          <p:cNvPr id="25" name="Text 23"/>
+          <p:cNvSpPr/>
+          <p:nvPr/>
+        </p:nvSpPr>
+        <p:spPr>
+          <a:xfrm>
+            <a:off x="6519672" y="2752344"/>
+            <a:ext cx="1828800" cy="182880"/>
+          </a:xfrm>
+          <a:prstGeom prst="rect">
+            <a:avLst/>
+          </a:prstGeom>
+          <a:noFill/>
+          <a:ln/>
+        </p:spPr>
+        <p:txBody>
+          <a:bodyPr wrap="square" lIns="0" tIns="0" rIns="0" bIns="0" rtlCol="0" anchor="t"/>
+          <a:lstStyle/>
+          <a:p>
+            <a:pPr algn="ctr" indent="0" marL="0">
+              <a:buNone/>
+            </a:pPr>
+            <a:r>
+              <a:rPr lang="en-US" sz="700" i="1" dirty="0">
+                <a:solidFill>
+                  <a:srgbClr val="94A3B8"/>
+                </a:solidFill>
+                <a:latin typeface="Calibri" pitchFamily="34" charset="0"/>
+                <a:ea typeface="Calibri" pitchFamily="34" charset="-122"/>
+                <a:cs typeface="Calibri" pitchFamily="34" charset="-120"/>
+              </a:rPr>
+              <a:t>'vit' shifts to 'viv' in some forms; here 'sur/viv' → 'surviv' before -al</a:t>
+            </a:r>
+            <a:endParaRPr lang="en-US" sz="700" dirty="0"/>
+          </a:p>
+        </p:txBody>
+      </p:sp>
+      <p:sp>
+        <p:nvSpPr>
+          <p:cNvPr id="26" name="Shape 24"/>
+          <p:cNvSpPr/>
+          <p:nvPr/>
+        </p:nvSpPr>
+        <p:spPr>
+          <a:xfrm>
+            <a:off x="365760" y="3273552"/>
+            <a:ext cx="1371600" cy="658368"/>
           </a:xfrm>
           <a:prstGeom prst="rect">
             <a:avLst>
-              <a:gd name="adj" fmla="val 25000"/>
+              <a:gd name="adj" fmla="val 8333"/>
             </a:avLst>
           </a:prstGeom>
           <a:solidFill>
-            <a:srgbClr val="FCE7F3"/>
-          </a:solidFill>
-          <a:ln w="19050">
-            <a:solidFill>
-              <a:srgbClr val="DB2777"/>
-            </a:solidFill>
-            <a:prstDash val="solid"/>
-          </a:ln>
-          <a:effectLst>
-            <a:outerShdw sx="100000" sy="100000" kx="0" ky="0" algn="bl" rotWithShape="0" blurRad="101600" dist="38100" dir="8100000">
-              <a:srgbClr val="000000">
-                <a:alpha val="12000"/>
-              </a:srgbClr>
-            </a:outerShdw>
-          </a:effectLst>
-        </p:spPr>
-      </p:sp>
-      <p:sp>
-        <p:nvSpPr>
-          <p:cNvPr id="26" name="Text 24"/>
-          <p:cNvSpPr/>
-          <p:nvPr/>
-        </p:nvSpPr>
-        <p:spPr>
-          <a:xfrm>
-            <a:off x="6998818" y="2258568"/>
-            <a:ext cx="1581912" cy="292608"/>
-          </a:xfrm>
-          <a:prstGeom prst="rect">
-            <a:avLst/>
-          </a:prstGeom>
-          <a:noFill/>
-          <a:ln/>
-        </p:spPr>
-        <p:txBody>
-          <a:bodyPr wrap="square" lIns="0" tIns="0" rIns="0" bIns="0" rtlCol="0" anchor="ctr"/>
-          <a:lstStyle/>
-          <a:p>
-            <a:pPr algn="ctr" indent="0" marL="0">
-              <a:buNone/>
-            </a:pPr>
-            <a:r>
-              <a:rPr lang="en-US" sz="1300" b="1" dirty="0">
-                <a:solidFill>
-                  <a:srgbClr val="9D174D"/>
+            <a:srgbClr val="E2E8F0"/>
+          </a:solidFill>
+          <a:ln w="12700">
+            <a:solidFill>
+              <a:srgbClr val="E2E8F0"/>
+            </a:solidFill>
+            <a:prstDash val="solid"/>
+          </a:ln>
+        </p:spPr>
+      </p:sp>
+      <p:sp>
+        <p:nvSpPr>
+          <p:cNvPr id="27" name="Text 25"/>
+          <p:cNvSpPr/>
+          <p:nvPr/>
+        </p:nvSpPr>
+        <p:spPr>
+          <a:xfrm>
+            <a:off x="365760" y="3273552"/>
+            <a:ext cx="1371600" cy="658368"/>
+          </a:xfrm>
+          <a:prstGeom prst="rect">
+            <a:avLst/>
+          </a:prstGeom>
+          <a:noFill/>
+          <a:ln/>
+        </p:spPr>
+        <p:txBody>
+          <a:bodyPr wrap="square" lIns="0" tIns="0" rIns="0" bIns="0" rtlCol="0" anchor="ctr"/>
+          <a:lstStyle/>
+          <a:p>
+            <a:pPr algn="ctr" indent="0" marL="0">
+              <a:buNone/>
+            </a:pPr>
+            <a:r>
+              <a:rPr lang="en-US" sz="1100" b="1" dirty="0">
+                <a:solidFill>
+                  <a:srgbClr val="475569"/>
                 </a:solidFill>
                 <a:latin typeface="Trebuchet MS" pitchFamily="34" charset="0"/>
                 <a:ea typeface="Trebuchet MS" pitchFamily="34" charset="-122"/>
                 <a:cs typeface="Trebuchet MS" pitchFamily="34" charset="-120"/>
               </a:rPr>
-              <a:t>ise</a:t>
-            </a:r>
-            <a:endParaRPr lang="en-US" sz="1300" dirty="0"/>
-          </a:p>
-        </p:txBody>
-      </p:sp>
-      <p:sp>
-        <p:nvSpPr>
-          <p:cNvPr id="27" name="Text 25"/>
-          <p:cNvSpPr/>
-          <p:nvPr/>
-        </p:nvSpPr>
-        <p:spPr>
-          <a:xfrm>
-            <a:off x="6998818" y="2569464"/>
-            <a:ext cx="1581912" cy="201168"/>
-          </a:xfrm>
-          <a:prstGeom prst="rect">
-            <a:avLst/>
-          </a:prstGeom>
-          <a:noFill/>
-          <a:ln/>
-        </p:spPr>
-        <p:txBody>
-          <a:bodyPr wrap="square" lIns="0" tIns="0" rIns="0" bIns="0" rtlCol="0" anchor="t"/>
-          <a:lstStyle/>
-          <a:p>
-            <a:pPr algn="ctr" indent="0" marL="0">
-              <a:buNone/>
-            </a:pPr>
-            <a:r>
-              <a:rPr lang="en-US" sz="850" dirty="0">
-                <a:solidFill>
-                  <a:srgbClr val="475569"/>
-                </a:solidFill>
-                <a:latin typeface="Calibri" pitchFamily="34" charset="0"/>
-                <a:ea typeface="Calibri" pitchFamily="34" charset="-122"/>
-                <a:cs typeface="Calibri" pitchFamily="34" charset="-120"/>
-              </a:rPr>
-              <a:t>to make or become</a:t>
-            </a:r>
-            <a:endParaRPr lang="en-US" sz="850" dirty="0"/>
+              <a:t>Syllables</a:t>
+            </a:r>
+            <a:endParaRPr lang="en-US" sz="1100" dirty="0"/>
           </a:p>
         </p:txBody>
       </p:sp>
@@ -32869,8 +33925,8 @@
         </p:nvSpPr>
         <p:spPr>
           <a:xfrm>
-            <a:off x="365760" y="3273552"/>
-            <a:ext cx="1371600" cy="658368"/>
+            <a:off x="1874520" y="3273552"/>
+            <a:ext cx="6903720" cy="658368"/>
           </a:xfrm>
           <a:prstGeom prst="rect">
             <a:avLst>
@@ -32878,50 +33934,353 @@
             </a:avLst>
           </a:prstGeom>
           <a:solidFill>
-            <a:srgbClr val="E2E8F0"/>
-          </a:solidFill>
-          <a:ln w="12700">
-            <a:solidFill>
-              <a:srgbClr val="E2E8F0"/>
-            </a:solidFill>
-            <a:prstDash val="solid"/>
-          </a:ln>
-        </p:spPr>
-      </p:sp>
-      <p:sp>
-        <p:nvSpPr>
-          <p:cNvPr id="29" name="Text 27"/>
-          <p:cNvSpPr/>
-          <p:nvPr/>
-        </p:nvSpPr>
-        <p:spPr>
-          <a:xfrm>
-            <a:off x="365760" y="3273552"/>
-            <a:ext cx="1371600" cy="658368"/>
-          </a:xfrm>
-          <a:prstGeom prst="rect">
-            <a:avLst/>
-          </a:prstGeom>
-          <a:noFill/>
-          <a:ln/>
-        </p:spPr>
-        <p:txBody>
-          <a:bodyPr wrap="square" lIns="0" tIns="0" rIns="0" bIns="0" rtlCol="0" anchor="ctr"/>
-          <a:lstStyle/>
-          <a:p>
-            <a:pPr algn="ctr" indent="0" marL="0">
-              <a:buNone/>
-            </a:pPr>
-            <a:r>
-              <a:rPr lang="en-US" sz="1100" b="1" dirty="0">
-                <a:solidFill>
-                  <a:srgbClr val="475569"/>
+            <a:srgbClr val="CCFBF1"/>
+          </a:solidFill>
+          <a:ln w="12700">
+            <a:solidFill>
+              <a:srgbClr val="0D9488"/>
+            </a:solidFill>
+            <a:prstDash val="solid"/>
+          </a:ln>
+        </p:spPr>
+      </p:sp>
+      <p:sp>
+        <p:nvSpPr>
+          <p:cNvPr id="29" name="Shape 27"/>
+          <p:cNvSpPr/>
+          <p:nvPr/>
+        </p:nvSpPr>
+        <p:spPr>
+          <a:xfrm>
+            <a:off x="2313432" y="3364992"/>
+            <a:ext cx="1645920" cy="475488"/>
+          </a:xfrm>
+          <a:prstGeom prst="rect">
+            <a:avLst>
+              <a:gd name="adj" fmla="val 9615"/>
+            </a:avLst>
+          </a:prstGeom>
+          <a:solidFill>
+            <a:srgbClr val="FFFFFF"/>
+          </a:solidFill>
+          <a:ln w="12700">
+            <a:solidFill>
+              <a:srgbClr val="0D9488"/>
+            </a:solidFill>
+            <a:prstDash val="solid"/>
+          </a:ln>
+        </p:spPr>
+      </p:sp>
+      <p:sp>
+        <p:nvSpPr>
+          <p:cNvPr id="30" name="Text 28"/>
+          <p:cNvSpPr/>
+          <p:nvPr/>
+        </p:nvSpPr>
+        <p:spPr>
+          <a:xfrm>
+            <a:off x="2313432" y="3364992"/>
+            <a:ext cx="1645920" cy="475488"/>
+          </a:xfrm>
+          <a:prstGeom prst="rect">
+            <a:avLst/>
+          </a:prstGeom>
+          <a:noFill/>
+          <a:ln/>
+        </p:spPr>
+        <p:txBody>
+          <a:bodyPr wrap="square" lIns="0" tIns="0" rIns="0" bIns="0" rtlCol="0" anchor="ctr"/>
+          <a:lstStyle/>
+          <a:p>
+            <a:pPr algn="ctr" indent="0" marL="0">
+              <a:buNone/>
+            </a:pPr>
+            <a:r>
+              <a:rPr lang="en-US" sz="1400" b="1" dirty="0">
+                <a:solidFill>
+                  <a:srgbClr val="0D9488"/>
                 </a:solidFill>
                 <a:latin typeface="Trebuchet MS" pitchFamily="34" charset="0"/>
                 <a:ea typeface="Trebuchet MS" pitchFamily="34" charset="-122"/>
                 <a:cs typeface="Trebuchet MS" pitchFamily="34" charset="-120"/>
               </a:rPr>
-              <a:t>Syllables</a:t>
+              <a:t>sur</a:t>
+            </a:r>
+            <a:endParaRPr lang="en-US" sz="1400" dirty="0"/>
+          </a:p>
+        </p:txBody>
+      </p:sp>
+      <p:sp>
+        <p:nvSpPr>
+          <p:cNvPr id="31" name="Text 29"/>
+          <p:cNvSpPr/>
+          <p:nvPr/>
+        </p:nvSpPr>
+        <p:spPr>
+          <a:xfrm>
+            <a:off x="3959352" y="3364992"/>
+            <a:ext cx="411480" cy="475488"/>
+          </a:xfrm>
+          <a:prstGeom prst="rect">
+            <a:avLst/>
+          </a:prstGeom>
+          <a:noFill/>
+          <a:ln/>
+        </p:spPr>
+        <p:txBody>
+          <a:bodyPr wrap="square" lIns="0" tIns="0" rIns="0" bIns="0" rtlCol="0" anchor="ctr"/>
+          <a:lstStyle/>
+          <a:p>
+            <a:pPr algn="ctr" indent="0" marL="0">
+              <a:buNone/>
+            </a:pPr>
+            <a:r>
+              <a:rPr lang="en-US" sz="1600" b="1" dirty="0">
+                <a:solidFill>
+                  <a:srgbClr val="0D9488"/>
+                </a:solidFill>
+                <a:latin typeface="Trebuchet MS" pitchFamily="34" charset="0"/>
+                <a:ea typeface="Trebuchet MS" pitchFamily="34" charset="-122"/>
+                <a:cs typeface="Trebuchet MS" pitchFamily="34" charset="-120"/>
+              </a:rPr>
+              <a:t>·</a:t>
+            </a:r>
+            <a:endParaRPr lang="en-US" sz="1600" dirty="0"/>
+          </a:p>
+        </p:txBody>
+      </p:sp>
+      <p:sp>
+        <p:nvSpPr>
+          <p:cNvPr id="32" name="Shape 30"/>
+          <p:cNvSpPr/>
+          <p:nvPr/>
+        </p:nvSpPr>
+        <p:spPr>
+          <a:xfrm>
+            <a:off x="4370832" y="3364992"/>
+            <a:ext cx="1645920" cy="475488"/>
+          </a:xfrm>
+          <a:prstGeom prst="rect">
+            <a:avLst>
+              <a:gd name="adj" fmla="val 9615"/>
+            </a:avLst>
+          </a:prstGeom>
+          <a:solidFill>
+            <a:srgbClr val="FFFFFF"/>
+          </a:solidFill>
+          <a:ln w="12700">
+            <a:solidFill>
+              <a:srgbClr val="0D9488"/>
+            </a:solidFill>
+            <a:prstDash val="solid"/>
+          </a:ln>
+        </p:spPr>
+      </p:sp>
+      <p:sp>
+        <p:nvSpPr>
+          <p:cNvPr id="33" name="Text 31"/>
+          <p:cNvSpPr/>
+          <p:nvPr/>
+        </p:nvSpPr>
+        <p:spPr>
+          <a:xfrm>
+            <a:off x="4370832" y="3364992"/>
+            <a:ext cx="1645920" cy="475488"/>
+          </a:xfrm>
+          <a:prstGeom prst="rect">
+            <a:avLst/>
+          </a:prstGeom>
+          <a:noFill/>
+          <a:ln/>
+        </p:spPr>
+        <p:txBody>
+          <a:bodyPr wrap="square" lIns="0" tIns="0" rIns="0" bIns="0" rtlCol="0" anchor="ctr"/>
+          <a:lstStyle/>
+          <a:p>
+            <a:pPr algn="ctr" indent="0" marL="0">
+              <a:buNone/>
+            </a:pPr>
+            <a:r>
+              <a:rPr lang="en-US" sz="1400" b="1" dirty="0">
+                <a:solidFill>
+                  <a:srgbClr val="0D9488"/>
+                </a:solidFill>
+                <a:latin typeface="Trebuchet MS" pitchFamily="34" charset="0"/>
+                <a:ea typeface="Trebuchet MS" pitchFamily="34" charset="-122"/>
+                <a:cs typeface="Trebuchet MS" pitchFamily="34" charset="-120"/>
+              </a:rPr>
+              <a:t>viv</a:t>
+            </a:r>
+            <a:endParaRPr lang="en-US" sz="1400" dirty="0"/>
+          </a:p>
+        </p:txBody>
+      </p:sp>
+      <p:sp>
+        <p:nvSpPr>
+          <p:cNvPr id="34" name="Text 32"/>
+          <p:cNvSpPr/>
+          <p:nvPr/>
+        </p:nvSpPr>
+        <p:spPr>
+          <a:xfrm>
+            <a:off x="6016752" y="3364992"/>
+            <a:ext cx="411480" cy="475488"/>
+          </a:xfrm>
+          <a:prstGeom prst="rect">
+            <a:avLst/>
+          </a:prstGeom>
+          <a:noFill/>
+          <a:ln/>
+        </p:spPr>
+        <p:txBody>
+          <a:bodyPr wrap="square" lIns="0" tIns="0" rIns="0" bIns="0" rtlCol="0" anchor="ctr"/>
+          <a:lstStyle/>
+          <a:p>
+            <a:pPr algn="ctr" indent="0" marL="0">
+              <a:buNone/>
+            </a:pPr>
+            <a:r>
+              <a:rPr lang="en-US" sz="1600" b="1" dirty="0">
+                <a:solidFill>
+                  <a:srgbClr val="0D9488"/>
+                </a:solidFill>
+                <a:latin typeface="Trebuchet MS" pitchFamily="34" charset="0"/>
+                <a:ea typeface="Trebuchet MS" pitchFamily="34" charset="-122"/>
+                <a:cs typeface="Trebuchet MS" pitchFamily="34" charset="-120"/>
+              </a:rPr>
+              <a:t>·</a:t>
+            </a:r>
+            <a:endParaRPr lang="en-US" sz="1600" dirty="0"/>
+          </a:p>
+        </p:txBody>
+      </p:sp>
+      <p:sp>
+        <p:nvSpPr>
+          <p:cNvPr id="35" name="Shape 33"/>
+          <p:cNvSpPr/>
+          <p:nvPr/>
+        </p:nvSpPr>
+        <p:spPr>
+          <a:xfrm>
+            <a:off x="6428232" y="3364992"/>
+            <a:ext cx="1645920" cy="475488"/>
+          </a:xfrm>
+          <a:prstGeom prst="rect">
+            <a:avLst>
+              <a:gd name="adj" fmla="val 9615"/>
+            </a:avLst>
+          </a:prstGeom>
+          <a:solidFill>
+            <a:srgbClr val="FFFFFF"/>
+          </a:solidFill>
+          <a:ln w="12700">
+            <a:solidFill>
+              <a:srgbClr val="0D9488"/>
+            </a:solidFill>
+            <a:prstDash val="solid"/>
+          </a:ln>
+        </p:spPr>
+      </p:sp>
+      <p:sp>
+        <p:nvSpPr>
+          <p:cNvPr id="36" name="Text 34"/>
+          <p:cNvSpPr/>
+          <p:nvPr/>
+        </p:nvSpPr>
+        <p:spPr>
+          <a:xfrm>
+            <a:off x="6428232" y="3364992"/>
+            <a:ext cx="1645920" cy="475488"/>
+          </a:xfrm>
+          <a:prstGeom prst="rect">
+            <a:avLst/>
+          </a:prstGeom>
+          <a:noFill/>
+          <a:ln/>
+        </p:spPr>
+        <p:txBody>
+          <a:bodyPr wrap="square" lIns="0" tIns="0" rIns="0" bIns="0" rtlCol="0" anchor="ctr"/>
+          <a:lstStyle/>
+          <a:p>
+            <a:pPr algn="ctr" indent="0" marL="0">
+              <a:buNone/>
+            </a:pPr>
+            <a:r>
+              <a:rPr lang="en-US" sz="1400" b="1" dirty="0">
+                <a:solidFill>
+                  <a:srgbClr val="0D9488"/>
+                </a:solidFill>
+                <a:latin typeface="Trebuchet MS" pitchFamily="34" charset="0"/>
+                <a:ea typeface="Trebuchet MS" pitchFamily="34" charset="-122"/>
+                <a:cs typeface="Trebuchet MS" pitchFamily="34" charset="-120"/>
+              </a:rPr>
+              <a:t>al</a:t>
+            </a:r>
+            <a:endParaRPr lang="en-US" sz="1400" dirty="0"/>
+          </a:p>
+        </p:txBody>
+      </p:sp>
+      <p:sp>
+        <p:nvSpPr>
+          <p:cNvPr id="37" name="Shape 35"/>
+          <p:cNvSpPr/>
+          <p:nvPr/>
+        </p:nvSpPr>
+        <p:spPr>
+          <a:xfrm>
+            <a:off x="365760" y="4096512"/>
+            <a:ext cx="1371600" cy="804672"/>
+          </a:xfrm>
+          <a:prstGeom prst="rect">
+            <a:avLst>
+              <a:gd name="adj" fmla="val 6818"/>
+            </a:avLst>
+          </a:prstGeom>
+          <a:solidFill>
+            <a:srgbClr val="E2E8F0"/>
+          </a:solidFill>
+          <a:ln w="12700">
+            <a:solidFill>
+              <a:srgbClr val="E2E8F0"/>
+            </a:solidFill>
+            <a:prstDash val="solid"/>
+          </a:ln>
+        </p:spPr>
+      </p:sp>
+      <p:sp>
+        <p:nvSpPr>
+          <p:cNvPr id="38" name="Text 36"/>
+          <p:cNvSpPr/>
+          <p:nvPr/>
+        </p:nvSpPr>
+        <p:spPr>
+          <a:xfrm>
+            <a:off x="365760" y="4096512"/>
+            <a:ext cx="1371600" cy="804672"/>
+          </a:xfrm>
+          <a:prstGeom prst="rect">
+            <a:avLst/>
+          </a:prstGeom>
+          <a:noFill/>
+          <a:ln/>
+        </p:spPr>
+        <p:txBody>
+          <a:bodyPr wrap="square" lIns="0" tIns="0" rIns="0" bIns="0" rtlCol="0" anchor="ctr"/>
+          <a:lstStyle/>
+          <a:p>
+            <a:pPr algn="ctr" indent="0" marL="0">
+              <a:buNone/>
+            </a:pPr>
+            <a:r>
+              <a:rPr lang="en-US" sz="1100" b="1" dirty="0">
+                <a:solidFill>
+                  <a:srgbClr val="475569"/>
+                </a:solidFill>
+                <a:latin typeface="Trebuchet MS" pitchFamily="34" charset="0"/>
+                <a:ea typeface="Trebuchet MS" pitchFamily="34" charset="-122"/>
+                <a:cs typeface="Trebuchet MS" pitchFamily="34" charset="-120"/>
+              </a:rPr>
+              <a:t>Phonemes</a:t>
             </a:r>
             <a:endParaRPr lang="en-US" sz="1100" dirty="0"/>
           </a:p>
@@ -32929,13 +34288,13 @@
       </p:sp>
       <p:sp>
         <p:nvSpPr>
-          <p:cNvPr id="30" name="Shape 28"/>
-          <p:cNvSpPr/>
-          <p:nvPr/>
-        </p:nvSpPr>
-        <p:spPr>
-          <a:xfrm>
-            <a:off x="1874520" y="3273552"/>
+          <p:cNvPr id="39" name="Shape 37"/>
+          <p:cNvSpPr/>
+          <p:nvPr/>
+        </p:nvSpPr>
+        <p:spPr>
+          <a:xfrm>
+            <a:off x="1874520" y="4096512"/>
             <a:ext cx="6903720" cy="658368"/>
           </a:xfrm>
           <a:prstGeom prst="rect">
@@ -32944,30 +34303,30 @@
             </a:avLst>
           </a:prstGeom>
           <a:solidFill>
-            <a:srgbClr val="CCFBF1"/>
-          </a:solidFill>
-          <a:ln w="12700">
-            <a:solidFill>
-              <a:srgbClr val="0D9488"/>
-            </a:solidFill>
-            <a:prstDash val="solid"/>
-          </a:ln>
-        </p:spPr>
-      </p:sp>
-      <p:sp>
-        <p:nvSpPr>
-          <p:cNvPr id="31" name="Shape 29"/>
-          <p:cNvSpPr/>
-          <p:nvPr/>
-        </p:nvSpPr>
-        <p:spPr>
-          <a:xfrm>
-            <a:off x="1975104" y="3364992"/>
-            <a:ext cx="1554480" cy="475488"/>
+            <a:srgbClr val="FCE7F3"/>
+          </a:solidFill>
+          <a:ln w="12700">
+            <a:solidFill>
+              <a:srgbClr val="DB2777"/>
+            </a:solidFill>
+            <a:prstDash val="solid"/>
+          </a:ln>
+        </p:spPr>
+      </p:sp>
+      <p:sp>
+        <p:nvSpPr>
+          <p:cNvPr id="40" name="Shape 38"/>
+          <p:cNvSpPr/>
+          <p:nvPr/>
+        </p:nvSpPr>
+        <p:spPr>
+          <a:xfrm>
+            <a:off x="2254649" y="4169664"/>
+            <a:ext cx="685800" cy="475488"/>
           </a:xfrm>
           <a:prstGeom prst="rect">
             <a:avLst>
-              <a:gd name="adj" fmla="val 9615"/>
+              <a:gd name="adj" fmla="val 7692"/>
             </a:avLst>
           </a:prstGeom>
           <a:solidFill>
@@ -32975,104 +34334,131 @@
           </a:solidFill>
           <a:ln w="12700">
             <a:solidFill>
-              <a:srgbClr val="0D9488"/>
-            </a:solidFill>
-            <a:prstDash val="solid"/>
-          </a:ln>
-        </p:spPr>
-      </p:sp>
-      <p:sp>
-        <p:nvSpPr>
-          <p:cNvPr id="32" name="Text 30"/>
-          <p:cNvSpPr/>
-          <p:nvPr/>
-        </p:nvSpPr>
-        <p:spPr>
-          <a:xfrm>
-            <a:off x="1975104" y="3364992"/>
-            <a:ext cx="1554480" cy="475488"/>
-          </a:xfrm>
-          <a:prstGeom prst="rect">
-            <a:avLst/>
-          </a:prstGeom>
-          <a:noFill/>
-          <a:ln/>
-        </p:spPr>
-        <p:txBody>
-          <a:bodyPr wrap="square" lIns="0" tIns="0" rIns="0" bIns="0" rtlCol="0" anchor="ctr"/>
-          <a:lstStyle/>
-          <a:p>
-            <a:pPr algn="ctr" indent="0" marL="0">
-              <a:buNone/>
-            </a:pPr>
-            <a:r>
-              <a:rPr lang="en-US" sz="1400" b="1" dirty="0">
-                <a:solidFill>
-                  <a:srgbClr val="0D9488"/>
+              <a:srgbClr val="DB2777"/>
+            </a:solidFill>
+            <a:prstDash val="solid"/>
+          </a:ln>
+        </p:spPr>
+      </p:sp>
+      <p:sp>
+        <p:nvSpPr>
+          <p:cNvPr id="41" name="Text 39"/>
+          <p:cNvSpPr/>
+          <p:nvPr/>
+        </p:nvSpPr>
+        <p:spPr>
+          <a:xfrm>
+            <a:off x="2254649" y="4169664"/>
+            <a:ext cx="685800" cy="475488"/>
+          </a:xfrm>
+          <a:prstGeom prst="rect">
+            <a:avLst/>
+          </a:prstGeom>
+          <a:noFill/>
+          <a:ln/>
+        </p:spPr>
+        <p:txBody>
+          <a:bodyPr wrap="square" lIns="0" tIns="0" rIns="0" bIns="0" rtlCol="0" anchor="ctr"/>
+          <a:lstStyle/>
+          <a:p>
+            <a:pPr algn="ctr" indent="0" marL="0">
+              <a:buNone/>
+            </a:pPr>
+            <a:r>
+              <a:rPr lang="en-US" sz="900" b="1" dirty="0">
+                <a:solidFill>
+                  <a:srgbClr val="9D174D"/>
                 </a:solidFill>
                 <a:latin typeface="Trebuchet MS" pitchFamily="34" charset="0"/>
                 <a:ea typeface="Trebuchet MS" pitchFamily="34" charset="-122"/>
                 <a:cs typeface="Trebuchet MS" pitchFamily="34" charset="-120"/>
               </a:rPr>
-              <a:t>re</a:t>
-            </a:r>
-            <a:endParaRPr lang="en-US" sz="1400" dirty="0"/>
-          </a:p>
-        </p:txBody>
-      </p:sp>
-      <p:sp>
-        <p:nvSpPr>
-          <p:cNvPr id="33" name="Text 31"/>
-          <p:cNvSpPr/>
-          <p:nvPr/>
-        </p:nvSpPr>
-        <p:spPr>
-          <a:xfrm>
-            <a:off x="3529584" y="3364992"/>
-            <a:ext cx="73152" cy="475488"/>
-          </a:xfrm>
-          <a:prstGeom prst="rect">
-            <a:avLst/>
-          </a:prstGeom>
-          <a:noFill/>
-          <a:ln/>
-        </p:spPr>
-        <p:txBody>
-          <a:bodyPr wrap="square" lIns="0" tIns="0" rIns="0" bIns="0" rtlCol="0" anchor="ctr"/>
-          <a:lstStyle/>
-          <a:p>
-            <a:pPr algn="ctr" indent="0" marL="0">
-              <a:buNone/>
-            </a:pPr>
-            <a:r>
-              <a:rPr lang="en-US" sz="1600" b="1" dirty="0">
-                <a:solidFill>
-                  <a:srgbClr val="0D9488"/>
+              <a:t>s</a:t>
+            </a:r>
+            <a:endParaRPr lang="en-US" sz="900" dirty="0"/>
+          </a:p>
+        </p:txBody>
+      </p:sp>
+      <p:sp>
+        <p:nvSpPr>
+          <p:cNvPr id="42" name="Shape 40"/>
+          <p:cNvSpPr/>
+          <p:nvPr/>
+        </p:nvSpPr>
+        <p:spPr>
+          <a:xfrm>
+            <a:off x="3293146" y="4169664"/>
+            <a:ext cx="685800" cy="475488"/>
+          </a:xfrm>
+          <a:prstGeom prst="rect">
+            <a:avLst>
+              <a:gd name="adj" fmla="val 7692"/>
+            </a:avLst>
+          </a:prstGeom>
+          <a:solidFill>
+            <a:srgbClr val="FFFFFF"/>
+          </a:solidFill>
+          <a:ln w="12700">
+            <a:solidFill>
+              <a:srgbClr val="DB2777"/>
+            </a:solidFill>
+            <a:prstDash val="solid"/>
+          </a:ln>
+        </p:spPr>
+      </p:sp>
+      <p:sp>
+        <p:nvSpPr>
+          <p:cNvPr id="43" name="Text 41"/>
+          <p:cNvSpPr/>
+          <p:nvPr/>
+        </p:nvSpPr>
+        <p:spPr>
+          <a:xfrm>
+            <a:off x="3293146" y="4169664"/>
+            <a:ext cx="685800" cy="475488"/>
+          </a:xfrm>
+          <a:prstGeom prst="rect">
+            <a:avLst/>
+          </a:prstGeom>
+          <a:noFill/>
+          <a:ln/>
+        </p:spPr>
+        <p:txBody>
+          <a:bodyPr wrap="square" lIns="0" tIns="0" rIns="0" bIns="0" rtlCol="0" anchor="ctr"/>
+          <a:lstStyle/>
+          <a:p>
+            <a:pPr algn="ctr" indent="0" marL="0">
+              <a:buNone/>
+            </a:pPr>
+            <a:r>
+              <a:rPr lang="en-US" sz="900" b="1" dirty="0">
+                <a:solidFill>
+                  <a:srgbClr val="9D174D"/>
                 </a:solidFill>
                 <a:latin typeface="Trebuchet MS" pitchFamily="34" charset="0"/>
                 <a:ea typeface="Trebuchet MS" pitchFamily="34" charset="-122"/>
                 <a:cs typeface="Trebuchet MS" pitchFamily="34" charset="-120"/>
               </a:rPr>
-              <a:t>·</a:t>
-            </a:r>
-            <a:endParaRPr lang="en-US" sz="1600" dirty="0"/>
-          </a:p>
-        </p:txBody>
-      </p:sp>
-      <p:sp>
-        <p:nvSpPr>
-          <p:cNvPr id="34" name="Shape 32"/>
-          <p:cNvSpPr/>
-          <p:nvPr/>
-        </p:nvSpPr>
-        <p:spPr>
-          <a:xfrm>
-            <a:off x="3602736" y="3364992"/>
-            <a:ext cx="1554480" cy="475488"/>
+              <a:t>ur</a:t>
+            </a:r>
+            <a:endParaRPr lang="en-US" sz="900" dirty="0"/>
+          </a:p>
+        </p:txBody>
+      </p:sp>
+      <p:sp>
+        <p:nvSpPr>
+          <p:cNvPr id="44" name="Shape 42"/>
+          <p:cNvSpPr/>
+          <p:nvPr/>
+        </p:nvSpPr>
+        <p:spPr>
+          <a:xfrm>
+            <a:off x="4331643" y="4169664"/>
+            <a:ext cx="685800" cy="475488"/>
           </a:xfrm>
           <a:prstGeom prst="rect">
             <a:avLst>
-              <a:gd name="adj" fmla="val 9615"/>
+              <a:gd name="adj" fmla="val 7692"/>
             </a:avLst>
           </a:prstGeom>
           <a:solidFill>
@@ -33080,104 +34466,131 @@
           </a:solidFill>
           <a:ln w="12700">
             <a:solidFill>
-              <a:srgbClr val="0D9488"/>
-            </a:solidFill>
-            <a:prstDash val="solid"/>
-          </a:ln>
-        </p:spPr>
-      </p:sp>
-      <p:sp>
-        <p:nvSpPr>
-          <p:cNvPr id="35" name="Text 33"/>
-          <p:cNvSpPr/>
-          <p:nvPr/>
-        </p:nvSpPr>
-        <p:spPr>
-          <a:xfrm>
-            <a:off x="3602736" y="3364992"/>
-            <a:ext cx="1554480" cy="475488"/>
-          </a:xfrm>
-          <a:prstGeom prst="rect">
-            <a:avLst/>
-          </a:prstGeom>
-          <a:noFill/>
-          <a:ln/>
-        </p:spPr>
-        <p:txBody>
-          <a:bodyPr wrap="square" lIns="0" tIns="0" rIns="0" bIns="0" rtlCol="0" anchor="ctr"/>
-          <a:lstStyle/>
-          <a:p>
-            <a:pPr algn="ctr" indent="0" marL="0">
-              <a:buNone/>
-            </a:pPr>
-            <a:r>
-              <a:rPr lang="en-US" sz="1400" b="1" dirty="0">
-                <a:solidFill>
-                  <a:srgbClr val="0D9488"/>
+              <a:srgbClr val="DB2777"/>
+            </a:solidFill>
+            <a:prstDash val="solid"/>
+          </a:ln>
+        </p:spPr>
+      </p:sp>
+      <p:sp>
+        <p:nvSpPr>
+          <p:cNvPr id="45" name="Text 43"/>
+          <p:cNvSpPr/>
+          <p:nvPr/>
+        </p:nvSpPr>
+        <p:spPr>
+          <a:xfrm>
+            <a:off x="4331643" y="4169664"/>
+            <a:ext cx="685800" cy="475488"/>
+          </a:xfrm>
+          <a:prstGeom prst="rect">
+            <a:avLst/>
+          </a:prstGeom>
+          <a:noFill/>
+          <a:ln/>
+        </p:spPr>
+        <p:txBody>
+          <a:bodyPr wrap="square" lIns="0" tIns="0" rIns="0" bIns="0" rtlCol="0" anchor="ctr"/>
+          <a:lstStyle/>
+          <a:p>
+            <a:pPr algn="ctr" indent="0" marL="0">
+              <a:buNone/>
+            </a:pPr>
+            <a:r>
+              <a:rPr lang="en-US" sz="900" b="1" dirty="0">
+                <a:solidFill>
+                  <a:srgbClr val="9D174D"/>
                 </a:solidFill>
                 <a:latin typeface="Trebuchet MS" pitchFamily="34" charset="0"/>
                 <a:ea typeface="Trebuchet MS" pitchFamily="34" charset="-122"/>
                 <a:cs typeface="Trebuchet MS" pitchFamily="34" charset="-120"/>
               </a:rPr>
-              <a:t>vi</a:t>
-            </a:r>
-            <a:endParaRPr lang="en-US" sz="1400" dirty="0"/>
-          </a:p>
-        </p:txBody>
-      </p:sp>
-      <p:sp>
-        <p:nvSpPr>
-          <p:cNvPr id="36" name="Text 34"/>
-          <p:cNvSpPr/>
-          <p:nvPr/>
-        </p:nvSpPr>
-        <p:spPr>
-          <a:xfrm>
-            <a:off x="5157216" y="3364992"/>
-            <a:ext cx="73152" cy="475488"/>
-          </a:xfrm>
-          <a:prstGeom prst="rect">
-            <a:avLst/>
-          </a:prstGeom>
-          <a:noFill/>
-          <a:ln/>
-        </p:spPr>
-        <p:txBody>
-          <a:bodyPr wrap="square" lIns="0" tIns="0" rIns="0" bIns="0" rtlCol="0" anchor="ctr"/>
-          <a:lstStyle/>
-          <a:p>
-            <a:pPr algn="ctr" indent="0" marL="0">
-              <a:buNone/>
-            </a:pPr>
-            <a:r>
-              <a:rPr lang="en-US" sz="1600" b="1" dirty="0">
-                <a:solidFill>
-                  <a:srgbClr val="0D9488"/>
+              <a:t>v</a:t>
+            </a:r>
+            <a:endParaRPr lang="en-US" sz="900" dirty="0"/>
+          </a:p>
+        </p:txBody>
+      </p:sp>
+      <p:sp>
+        <p:nvSpPr>
+          <p:cNvPr id="46" name="Shape 44"/>
+          <p:cNvSpPr/>
+          <p:nvPr/>
+        </p:nvSpPr>
+        <p:spPr>
+          <a:xfrm>
+            <a:off x="5370141" y="4169664"/>
+            <a:ext cx="685800" cy="475488"/>
+          </a:xfrm>
+          <a:prstGeom prst="rect">
+            <a:avLst>
+              <a:gd name="adj" fmla="val 7692"/>
+            </a:avLst>
+          </a:prstGeom>
+          <a:solidFill>
+            <a:srgbClr val="FFFFFF"/>
+          </a:solidFill>
+          <a:ln w="12700">
+            <a:solidFill>
+              <a:srgbClr val="DB2777"/>
+            </a:solidFill>
+            <a:prstDash val="solid"/>
+          </a:ln>
+        </p:spPr>
+      </p:sp>
+      <p:sp>
+        <p:nvSpPr>
+          <p:cNvPr id="47" name="Text 45"/>
+          <p:cNvSpPr/>
+          <p:nvPr/>
+        </p:nvSpPr>
+        <p:spPr>
+          <a:xfrm>
+            <a:off x="5370141" y="4169664"/>
+            <a:ext cx="685800" cy="475488"/>
+          </a:xfrm>
+          <a:prstGeom prst="rect">
+            <a:avLst/>
+          </a:prstGeom>
+          <a:noFill/>
+          <a:ln/>
+        </p:spPr>
+        <p:txBody>
+          <a:bodyPr wrap="square" lIns="0" tIns="0" rIns="0" bIns="0" rtlCol="0" anchor="ctr"/>
+          <a:lstStyle/>
+          <a:p>
+            <a:pPr algn="ctr" indent="0" marL="0">
+              <a:buNone/>
+            </a:pPr>
+            <a:r>
+              <a:rPr lang="en-US" sz="900" b="1" dirty="0">
+                <a:solidFill>
+                  <a:srgbClr val="9D174D"/>
                 </a:solidFill>
                 <a:latin typeface="Trebuchet MS" pitchFamily="34" charset="0"/>
                 <a:ea typeface="Trebuchet MS" pitchFamily="34" charset="-122"/>
                 <a:cs typeface="Trebuchet MS" pitchFamily="34" charset="-120"/>
               </a:rPr>
-              <a:t>·</a:t>
-            </a:r>
-            <a:endParaRPr lang="en-US" sz="1600" dirty="0"/>
-          </a:p>
-        </p:txBody>
-      </p:sp>
-      <p:sp>
-        <p:nvSpPr>
-          <p:cNvPr id="37" name="Shape 35"/>
-          <p:cNvSpPr/>
-          <p:nvPr/>
-        </p:nvSpPr>
-        <p:spPr>
-          <a:xfrm>
-            <a:off x="5230368" y="3364992"/>
-            <a:ext cx="1554480" cy="475488"/>
+              <a:t>i</a:t>
+            </a:r>
+            <a:endParaRPr lang="en-US" sz="900" dirty="0"/>
+          </a:p>
+        </p:txBody>
+      </p:sp>
+      <p:sp>
+        <p:nvSpPr>
+          <p:cNvPr id="48" name="Shape 46"/>
+          <p:cNvSpPr/>
+          <p:nvPr/>
+        </p:nvSpPr>
+        <p:spPr>
+          <a:xfrm>
+            <a:off x="6408638" y="4169664"/>
+            <a:ext cx="685800" cy="475488"/>
           </a:xfrm>
           <a:prstGeom prst="rect">
             <a:avLst>
-              <a:gd name="adj" fmla="val 9615"/>
+              <a:gd name="adj" fmla="val 7692"/>
             </a:avLst>
           </a:prstGeom>
           <a:solidFill>
@@ -33185,879 +34598,114 @@
           </a:solidFill>
           <a:ln w="12700">
             <a:solidFill>
-              <a:srgbClr val="0D9488"/>
-            </a:solidFill>
-            <a:prstDash val="solid"/>
-          </a:ln>
-        </p:spPr>
-      </p:sp>
-      <p:sp>
-        <p:nvSpPr>
-          <p:cNvPr id="38" name="Text 36"/>
-          <p:cNvSpPr/>
-          <p:nvPr/>
-        </p:nvSpPr>
-        <p:spPr>
-          <a:xfrm>
-            <a:off x="5230368" y="3364992"/>
-            <a:ext cx="1554480" cy="475488"/>
-          </a:xfrm>
-          <a:prstGeom prst="rect">
-            <a:avLst/>
-          </a:prstGeom>
-          <a:noFill/>
-          <a:ln/>
-        </p:spPr>
-        <p:txBody>
-          <a:bodyPr wrap="square" lIns="0" tIns="0" rIns="0" bIns="0" rtlCol="0" anchor="ctr"/>
-          <a:lstStyle/>
-          <a:p>
-            <a:pPr algn="ctr" indent="0" marL="0">
-              <a:buNone/>
-            </a:pPr>
-            <a:r>
-              <a:rPr lang="en-US" sz="1400" b="1" dirty="0">
-                <a:solidFill>
-                  <a:srgbClr val="0D9488"/>
+              <a:srgbClr val="DB2777"/>
+            </a:solidFill>
+            <a:prstDash val="solid"/>
+          </a:ln>
+        </p:spPr>
+      </p:sp>
+      <p:sp>
+        <p:nvSpPr>
+          <p:cNvPr id="49" name="Text 47"/>
+          <p:cNvSpPr/>
+          <p:nvPr/>
+        </p:nvSpPr>
+        <p:spPr>
+          <a:xfrm>
+            <a:off x="6408638" y="4169664"/>
+            <a:ext cx="685800" cy="475488"/>
+          </a:xfrm>
+          <a:prstGeom prst="rect">
+            <a:avLst/>
+          </a:prstGeom>
+          <a:noFill/>
+          <a:ln/>
+        </p:spPr>
+        <p:txBody>
+          <a:bodyPr wrap="square" lIns="0" tIns="0" rIns="0" bIns="0" rtlCol="0" anchor="ctr"/>
+          <a:lstStyle/>
+          <a:p>
+            <a:pPr algn="ctr" indent="0" marL="0">
+              <a:buNone/>
+            </a:pPr>
+            <a:r>
+              <a:rPr lang="en-US" sz="900" b="1" dirty="0">
+                <a:solidFill>
+                  <a:srgbClr val="9D174D"/>
                 </a:solidFill>
                 <a:latin typeface="Trebuchet MS" pitchFamily="34" charset="0"/>
                 <a:ea typeface="Trebuchet MS" pitchFamily="34" charset="-122"/>
                 <a:cs typeface="Trebuchet MS" pitchFamily="34" charset="-120"/>
               </a:rPr>
-              <a:t>tal</a:t>
-            </a:r>
-            <a:endParaRPr lang="en-US" sz="1400" dirty="0"/>
-          </a:p>
-        </p:txBody>
-      </p:sp>
-      <p:sp>
-        <p:nvSpPr>
-          <p:cNvPr id="39" name="Text 37"/>
-          <p:cNvSpPr/>
-          <p:nvPr/>
-        </p:nvSpPr>
-        <p:spPr>
-          <a:xfrm>
-            <a:off x="6784848" y="3364992"/>
-            <a:ext cx="73152" cy="475488"/>
-          </a:xfrm>
-          <a:prstGeom prst="rect">
-            <a:avLst/>
-          </a:prstGeom>
-          <a:noFill/>
-          <a:ln/>
-        </p:spPr>
-        <p:txBody>
-          <a:bodyPr wrap="square" lIns="0" tIns="0" rIns="0" bIns="0" rtlCol="0" anchor="ctr"/>
-          <a:lstStyle/>
-          <a:p>
-            <a:pPr algn="ctr" indent="0" marL="0">
-              <a:buNone/>
-            </a:pPr>
-            <a:r>
-              <a:rPr lang="en-US" sz="1600" b="1" dirty="0">
-                <a:solidFill>
-                  <a:srgbClr val="0D9488"/>
+              <a:t>v</a:t>
+            </a:r>
+            <a:endParaRPr lang="en-US" sz="900" dirty="0"/>
+          </a:p>
+        </p:txBody>
+      </p:sp>
+      <p:sp>
+        <p:nvSpPr>
+          <p:cNvPr id="50" name="Shape 48"/>
+          <p:cNvSpPr/>
+          <p:nvPr/>
+        </p:nvSpPr>
+        <p:spPr>
+          <a:xfrm>
+            <a:off x="7447135" y="4169664"/>
+            <a:ext cx="685800" cy="475488"/>
+          </a:xfrm>
+          <a:prstGeom prst="rect">
+            <a:avLst>
+              <a:gd name="adj" fmla="val 7692"/>
+            </a:avLst>
+          </a:prstGeom>
+          <a:solidFill>
+            <a:srgbClr val="FFFFFF"/>
+          </a:solidFill>
+          <a:ln w="12700">
+            <a:solidFill>
+              <a:srgbClr val="DB2777"/>
+            </a:solidFill>
+            <a:prstDash val="solid"/>
+          </a:ln>
+        </p:spPr>
+      </p:sp>
+      <p:sp>
+        <p:nvSpPr>
+          <p:cNvPr id="51" name="Text 49"/>
+          <p:cNvSpPr/>
+          <p:nvPr/>
+        </p:nvSpPr>
+        <p:spPr>
+          <a:xfrm>
+            <a:off x="7447135" y="4169664"/>
+            <a:ext cx="685800" cy="475488"/>
+          </a:xfrm>
+          <a:prstGeom prst="rect">
+            <a:avLst/>
+          </a:prstGeom>
+          <a:noFill/>
+          <a:ln/>
+        </p:spPr>
+        <p:txBody>
+          <a:bodyPr wrap="square" lIns="0" tIns="0" rIns="0" bIns="0" rtlCol="0" anchor="ctr"/>
+          <a:lstStyle/>
+          <a:p>
+            <a:pPr algn="ctr" indent="0" marL="0">
+              <a:buNone/>
+            </a:pPr>
+            <a:r>
+              <a:rPr lang="en-US" sz="900" b="1" dirty="0">
+                <a:solidFill>
+                  <a:srgbClr val="9D174D"/>
                 </a:solidFill>
                 <a:latin typeface="Trebuchet MS" pitchFamily="34" charset="0"/>
                 <a:ea typeface="Trebuchet MS" pitchFamily="34" charset="-122"/>
                 <a:cs typeface="Trebuchet MS" pitchFamily="34" charset="-120"/>
               </a:rPr>
-              <a:t>·</a:t>
-            </a:r>
-            <a:endParaRPr lang="en-US" sz="1600" dirty="0"/>
-          </a:p>
-        </p:txBody>
-      </p:sp>
-      <p:sp>
-        <p:nvSpPr>
-          <p:cNvPr id="40" name="Shape 38"/>
-          <p:cNvSpPr/>
-          <p:nvPr/>
-        </p:nvSpPr>
-        <p:spPr>
-          <a:xfrm>
-            <a:off x="6858000" y="3364992"/>
-            <a:ext cx="1554480" cy="475488"/>
-          </a:xfrm>
-          <a:prstGeom prst="rect">
-            <a:avLst>
-              <a:gd name="adj" fmla="val 9615"/>
-            </a:avLst>
-          </a:prstGeom>
-          <a:solidFill>
-            <a:srgbClr val="FFFFFF"/>
-          </a:solidFill>
-          <a:ln w="12700">
-            <a:solidFill>
-              <a:srgbClr val="0D9488"/>
-            </a:solidFill>
-            <a:prstDash val="solid"/>
-          </a:ln>
-        </p:spPr>
-      </p:sp>
-      <p:sp>
-        <p:nvSpPr>
-          <p:cNvPr id="41" name="Text 39"/>
-          <p:cNvSpPr/>
-          <p:nvPr/>
-        </p:nvSpPr>
-        <p:spPr>
-          <a:xfrm>
-            <a:off x="6858000" y="3364992"/>
-            <a:ext cx="1554480" cy="475488"/>
-          </a:xfrm>
-          <a:prstGeom prst="rect">
-            <a:avLst/>
-          </a:prstGeom>
-          <a:noFill/>
-          <a:ln/>
-        </p:spPr>
-        <p:txBody>
-          <a:bodyPr wrap="square" lIns="0" tIns="0" rIns="0" bIns="0" rtlCol="0" anchor="ctr"/>
-          <a:lstStyle/>
-          <a:p>
-            <a:pPr algn="ctr" indent="0" marL="0">
-              <a:buNone/>
-            </a:pPr>
-            <a:r>
-              <a:rPr lang="en-US" sz="1400" b="1" dirty="0">
-                <a:solidFill>
-                  <a:srgbClr val="0D9488"/>
-                </a:solidFill>
-                <a:latin typeface="Trebuchet MS" pitchFamily="34" charset="0"/>
-                <a:ea typeface="Trebuchet MS" pitchFamily="34" charset="-122"/>
-                <a:cs typeface="Trebuchet MS" pitchFamily="34" charset="-120"/>
-              </a:rPr>
-              <a:t>ise</a:t>
-            </a:r>
-            <a:endParaRPr lang="en-US" sz="1400" dirty="0"/>
-          </a:p>
-        </p:txBody>
-      </p:sp>
-      <p:sp>
-        <p:nvSpPr>
-          <p:cNvPr id="42" name="Shape 40"/>
-          <p:cNvSpPr/>
-          <p:nvPr/>
-        </p:nvSpPr>
-        <p:spPr>
-          <a:xfrm>
-            <a:off x="365760" y="4096512"/>
-            <a:ext cx="1371600" cy="804672"/>
-          </a:xfrm>
-          <a:prstGeom prst="rect">
-            <a:avLst>
-              <a:gd name="adj" fmla="val 6818"/>
-            </a:avLst>
-          </a:prstGeom>
-          <a:solidFill>
-            <a:srgbClr val="E2E8F0"/>
-          </a:solidFill>
-          <a:ln w="12700">
-            <a:solidFill>
-              <a:srgbClr val="E2E8F0"/>
-            </a:solidFill>
-            <a:prstDash val="solid"/>
-          </a:ln>
-        </p:spPr>
-      </p:sp>
-      <p:sp>
-        <p:nvSpPr>
-          <p:cNvPr id="43" name="Text 41"/>
-          <p:cNvSpPr/>
-          <p:nvPr/>
-        </p:nvSpPr>
-        <p:spPr>
-          <a:xfrm>
-            <a:off x="365760" y="4096512"/>
-            <a:ext cx="1371600" cy="804672"/>
-          </a:xfrm>
-          <a:prstGeom prst="rect">
-            <a:avLst/>
-          </a:prstGeom>
-          <a:noFill/>
-          <a:ln/>
-        </p:spPr>
-        <p:txBody>
-          <a:bodyPr wrap="square" lIns="0" tIns="0" rIns="0" bIns="0" rtlCol="0" anchor="ctr"/>
-          <a:lstStyle/>
-          <a:p>
-            <a:pPr algn="ctr" indent="0" marL="0">
-              <a:buNone/>
-            </a:pPr>
-            <a:r>
-              <a:rPr lang="en-US" sz="1100" b="1" dirty="0">
-                <a:solidFill>
-                  <a:srgbClr val="475569"/>
-                </a:solidFill>
-                <a:latin typeface="Trebuchet MS" pitchFamily="34" charset="0"/>
-                <a:ea typeface="Trebuchet MS" pitchFamily="34" charset="-122"/>
-                <a:cs typeface="Trebuchet MS" pitchFamily="34" charset="-120"/>
-              </a:rPr>
-              <a:t>Phonemes</a:t>
-            </a:r>
-            <a:endParaRPr lang="en-US" sz="1100" dirty="0"/>
-          </a:p>
-        </p:txBody>
-      </p:sp>
-      <p:sp>
-        <p:nvSpPr>
-          <p:cNvPr id="44" name="Shape 42"/>
-          <p:cNvSpPr/>
-          <p:nvPr/>
-        </p:nvSpPr>
-        <p:spPr>
-          <a:xfrm>
-            <a:off x="1874520" y="4096512"/>
-            <a:ext cx="6903720" cy="804672"/>
-          </a:xfrm>
-          <a:prstGeom prst="rect">
-            <a:avLst>
-              <a:gd name="adj" fmla="val 6818"/>
-            </a:avLst>
-          </a:prstGeom>
-          <a:solidFill>
-            <a:srgbClr val="FCE7F3"/>
-          </a:solidFill>
-          <a:ln w="12700">
-            <a:solidFill>
-              <a:srgbClr val="DB2777"/>
-            </a:solidFill>
-            <a:prstDash val="solid"/>
-          </a:ln>
-        </p:spPr>
-      </p:sp>
-      <p:sp>
-        <p:nvSpPr>
-          <p:cNvPr id="45" name="Shape 43"/>
-          <p:cNvSpPr/>
-          <p:nvPr/>
-        </p:nvSpPr>
-        <p:spPr>
-          <a:xfrm>
-            <a:off x="1951330" y="4169664"/>
-            <a:ext cx="676656" cy="384048"/>
-          </a:xfrm>
-          <a:prstGeom prst="rect">
-            <a:avLst>
-              <a:gd name="adj" fmla="val 9524"/>
-            </a:avLst>
-          </a:prstGeom>
-          <a:solidFill>
-            <a:srgbClr val="FFFFFF"/>
-          </a:solidFill>
-          <a:ln w="12700">
-            <a:solidFill>
-              <a:srgbClr val="DB2777"/>
-            </a:solidFill>
-            <a:prstDash val="solid"/>
-          </a:ln>
-        </p:spPr>
-      </p:sp>
-      <p:sp>
-        <p:nvSpPr>
-          <p:cNvPr id="46" name="Text 44"/>
-          <p:cNvSpPr/>
-          <p:nvPr/>
-        </p:nvSpPr>
-        <p:spPr>
-          <a:xfrm>
-            <a:off x="1951330" y="4169664"/>
-            <a:ext cx="676656" cy="384048"/>
-          </a:xfrm>
-          <a:prstGeom prst="rect">
-            <a:avLst/>
-          </a:prstGeom>
-          <a:noFill/>
-          <a:ln/>
-        </p:spPr>
-        <p:txBody>
-          <a:bodyPr wrap="square" lIns="0" tIns="0" rIns="0" bIns="0" rtlCol="0" anchor="ctr"/>
-          <a:lstStyle/>
-          <a:p>
-            <a:pPr algn="ctr" indent="0" marL="0">
-              <a:buNone/>
-            </a:pPr>
-            <a:r>
-              <a:rPr lang="en-US" sz="900" b="1" dirty="0">
-                <a:solidFill>
-                  <a:srgbClr val="9D174D"/>
-                </a:solidFill>
-                <a:latin typeface="Trebuchet MS" pitchFamily="34" charset="0"/>
-                <a:ea typeface="Trebuchet MS" pitchFamily="34" charset="-122"/>
-                <a:cs typeface="Trebuchet MS" pitchFamily="34" charset="-120"/>
-              </a:rPr>
-              <a:t>r</a:t>
+              <a:t>al</a:t>
             </a:r>
             <a:endParaRPr lang="en-US" sz="900" dirty="0"/>
-          </a:p>
-        </p:txBody>
-      </p:sp>
-      <p:sp>
-        <p:nvSpPr>
-          <p:cNvPr id="47" name="Shape 45"/>
-          <p:cNvSpPr/>
-          <p:nvPr/>
-        </p:nvSpPr>
-        <p:spPr>
-          <a:xfrm>
-            <a:off x="2677363" y="4169664"/>
-            <a:ext cx="676656" cy="384048"/>
-          </a:xfrm>
-          <a:prstGeom prst="rect">
-            <a:avLst>
-              <a:gd name="adj" fmla="val 9524"/>
-            </a:avLst>
-          </a:prstGeom>
-          <a:solidFill>
-            <a:srgbClr val="FFFFFF"/>
-          </a:solidFill>
-          <a:ln w="12700">
-            <a:solidFill>
-              <a:srgbClr val="DB2777"/>
-            </a:solidFill>
-            <a:prstDash val="solid"/>
-          </a:ln>
-        </p:spPr>
-      </p:sp>
-      <p:sp>
-        <p:nvSpPr>
-          <p:cNvPr id="48" name="Text 46"/>
-          <p:cNvSpPr/>
-          <p:nvPr/>
-        </p:nvSpPr>
-        <p:spPr>
-          <a:xfrm>
-            <a:off x="2677363" y="4169664"/>
-            <a:ext cx="676656" cy="384048"/>
-          </a:xfrm>
-          <a:prstGeom prst="rect">
-            <a:avLst/>
-          </a:prstGeom>
-          <a:noFill/>
-          <a:ln/>
-        </p:spPr>
-        <p:txBody>
-          <a:bodyPr wrap="square" lIns="0" tIns="0" rIns="0" bIns="0" rtlCol="0" anchor="ctr"/>
-          <a:lstStyle/>
-          <a:p>
-            <a:pPr algn="ctr" indent="0" marL="0">
-              <a:buNone/>
-            </a:pPr>
-            <a:r>
-              <a:rPr lang="en-US" sz="900" b="1" dirty="0">
-                <a:solidFill>
-                  <a:srgbClr val="9D174D"/>
-                </a:solidFill>
-                <a:latin typeface="Trebuchet MS" pitchFamily="34" charset="0"/>
-                <a:ea typeface="Trebuchet MS" pitchFamily="34" charset="-122"/>
-                <a:cs typeface="Trebuchet MS" pitchFamily="34" charset="-120"/>
-              </a:rPr>
-              <a:t>e</a:t>
-            </a:r>
-            <a:endParaRPr lang="en-US" sz="900" dirty="0"/>
-          </a:p>
-        </p:txBody>
-      </p:sp>
-      <p:sp>
-        <p:nvSpPr>
-          <p:cNvPr id="49" name="Shape 47"/>
-          <p:cNvSpPr/>
-          <p:nvPr/>
-        </p:nvSpPr>
-        <p:spPr>
-          <a:xfrm>
-            <a:off x="3403397" y="4169664"/>
-            <a:ext cx="676656" cy="384048"/>
-          </a:xfrm>
-          <a:prstGeom prst="rect">
-            <a:avLst>
-              <a:gd name="adj" fmla="val 9524"/>
-            </a:avLst>
-          </a:prstGeom>
-          <a:solidFill>
-            <a:srgbClr val="FFFFFF"/>
-          </a:solidFill>
-          <a:ln w="12700">
-            <a:solidFill>
-              <a:srgbClr val="DB2777"/>
-            </a:solidFill>
-            <a:prstDash val="solid"/>
-          </a:ln>
-        </p:spPr>
-      </p:sp>
-      <p:sp>
-        <p:nvSpPr>
-          <p:cNvPr id="50" name="Text 48"/>
-          <p:cNvSpPr/>
-          <p:nvPr/>
-        </p:nvSpPr>
-        <p:spPr>
-          <a:xfrm>
-            <a:off x="3403397" y="4169664"/>
-            <a:ext cx="676656" cy="384048"/>
-          </a:xfrm>
-          <a:prstGeom prst="rect">
-            <a:avLst/>
-          </a:prstGeom>
-          <a:noFill/>
-          <a:ln/>
-        </p:spPr>
-        <p:txBody>
-          <a:bodyPr wrap="square" lIns="0" tIns="0" rIns="0" bIns="0" rtlCol="0" anchor="ctr"/>
-          <a:lstStyle/>
-          <a:p>
-            <a:pPr algn="ctr" indent="0" marL="0">
-              <a:buNone/>
-            </a:pPr>
-            <a:r>
-              <a:rPr lang="en-US" sz="900" b="1" dirty="0">
-                <a:solidFill>
-                  <a:srgbClr val="9D174D"/>
-                </a:solidFill>
-                <a:latin typeface="Trebuchet MS" pitchFamily="34" charset="0"/>
-                <a:ea typeface="Trebuchet MS" pitchFamily="34" charset="-122"/>
-                <a:cs typeface="Trebuchet MS" pitchFamily="34" charset="-120"/>
-              </a:rPr>
-              <a:t>v</a:t>
-            </a:r>
-            <a:endParaRPr lang="en-US" sz="900" dirty="0"/>
-          </a:p>
-        </p:txBody>
-      </p:sp>
-      <p:sp>
-        <p:nvSpPr>
-          <p:cNvPr id="51" name="Shape 49"/>
-          <p:cNvSpPr/>
-          <p:nvPr/>
-        </p:nvSpPr>
-        <p:spPr>
-          <a:xfrm>
-            <a:off x="4129430" y="4169664"/>
-            <a:ext cx="676656" cy="384048"/>
-          </a:xfrm>
-          <a:prstGeom prst="rect">
-            <a:avLst>
-              <a:gd name="adj" fmla="val 9524"/>
-            </a:avLst>
-          </a:prstGeom>
-          <a:solidFill>
-            <a:srgbClr val="FFFFFF"/>
-          </a:solidFill>
-          <a:ln w="12700">
-            <a:solidFill>
-              <a:srgbClr val="DB2777"/>
-            </a:solidFill>
-            <a:prstDash val="solid"/>
-          </a:ln>
-        </p:spPr>
-      </p:sp>
-      <p:sp>
-        <p:nvSpPr>
-          <p:cNvPr id="52" name="Text 50"/>
-          <p:cNvSpPr/>
-          <p:nvPr/>
-        </p:nvSpPr>
-        <p:spPr>
-          <a:xfrm>
-            <a:off x="4129430" y="4169664"/>
-            <a:ext cx="676656" cy="384048"/>
-          </a:xfrm>
-          <a:prstGeom prst="rect">
-            <a:avLst/>
-          </a:prstGeom>
-          <a:noFill/>
-          <a:ln/>
-        </p:spPr>
-        <p:txBody>
-          <a:bodyPr wrap="square" lIns="0" tIns="0" rIns="0" bIns="0" rtlCol="0" anchor="ctr"/>
-          <a:lstStyle/>
-          <a:p>
-            <a:pPr algn="ctr" indent="0" marL="0">
-              <a:buNone/>
-            </a:pPr>
-            <a:r>
-              <a:rPr lang="en-US" sz="900" b="1" dirty="0">
-                <a:solidFill>
-                  <a:srgbClr val="9D174D"/>
-                </a:solidFill>
-                <a:latin typeface="Trebuchet MS" pitchFamily="34" charset="0"/>
-                <a:ea typeface="Trebuchet MS" pitchFamily="34" charset="-122"/>
-                <a:cs typeface="Trebuchet MS" pitchFamily="34" charset="-120"/>
-              </a:rPr>
-              <a:t>i</a:t>
-            </a:r>
-            <a:endParaRPr lang="en-US" sz="900" dirty="0"/>
-          </a:p>
-        </p:txBody>
-      </p:sp>
-      <p:sp>
-        <p:nvSpPr>
-          <p:cNvPr id="53" name="Shape 51"/>
-          <p:cNvSpPr/>
-          <p:nvPr/>
-        </p:nvSpPr>
-        <p:spPr>
-          <a:xfrm>
-            <a:off x="4855464" y="4169664"/>
-            <a:ext cx="676656" cy="384048"/>
-          </a:xfrm>
-          <a:prstGeom prst="rect">
-            <a:avLst>
-              <a:gd name="adj" fmla="val 9524"/>
-            </a:avLst>
-          </a:prstGeom>
-          <a:solidFill>
-            <a:srgbClr val="FFFFFF"/>
-          </a:solidFill>
-          <a:ln w="12700">
-            <a:solidFill>
-              <a:srgbClr val="DB2777"/>
-            </a:solidFill>
-            <a:prstDash val="solid"/>
-          </a:ln>
-        </p:spPr>
-      </p:sp>
-      <p:sp>
-        <p:nvSpPr>
-          <p:cNvPr id="54" name="Text 52"/>
-          <p:cNvSpPr/>
-          <p:nvPr/>
-        </p:nvSpPr>
-        <p:spPr>
-          <a:xfrm>
-            <a:off x="4855464" y="4169664"/>
-            <a:ext cx="676656" cy="384048"/>
-          </a:xfrm>
-          <a:prstGeom prst="rect">
-            <a:avLst/>
-          </a:prstGeom>
-          <a:noFill/>
-          <a:ln/>
-        </p:spPr>
-        <p:txBody>
-          <a:bodyPr wrap="square" lIns="0" tIns="0" rIns="0" bIns="0" rtlCol="0" anchor="ctr"/>
-          <a:lstStyle/>
-          <a:p>
-            <a:pPr algn="ctr" indent="0" marL="0">
-              <a:buNone/>
-            </a:pPr>
-            <a:r>
-              <a:rPr lang="en-US" sz="900" b="1" dirty="0">
-                <a:solidFill>
-                  <a:srgbClr val="9D174D"/>
-                </a:solidFill>
-                <a:latin typeface="Trebuchet MS" pitchFamily="34" charset="0"/>
-                <a:ea typeface="Trebuchet MS" pitchFamily="34" charset="-122"/>
-                <a:cs typeface="Trebuchet MS" pitchFamily="34" charset="-120"/>
-              </a:rPr>
-              <a:t>t</a:t>
-            </a:r>
-            <a:endParaRPr lang="en-US" sz="900" dirty="0"/>
-          </a:p>
-        </p:txBody>
-      </p:sp>
-      <p:sp>
-        <p:nvSpPr>
-          <p:cNvPr id="55" name="Shape 53"/>
-          <p:cNvSpPr/>
-          <p:nvPr/>
-        </p:nvSpPr>
-        <p:spPr>
-          <a:xfrm>
-            <a:off x="5581498" y="4169664"/>
-            <a:ext cx="676656" cy="384048"/>
-          </a:xfrm>
-          <a:prstGeom prst="rect">
-            <a:avLst>
-              <a:gd name="adj" fmla="val 9524"/>
-            </a:avLst>
-          </a:prstGeom>
-          <a:solidFill>
-            <a:srgbClr val="FFFFFF"/>
-          </a:solidFill>
-          <a:ln w="12700">
-            <a:solidFill>
-              <a:srgbClr val="DB2777"/>
-            </a:solidFill>
-            <a:prstDash val="solid"/>
-          </a:ln>
-        </p:spPr>
-      </p:sp>
-      <p:sp>
-        <p:nvSpPr>
-          <p:cNvPr id="56" name="Text 54"/>
-          <p:cNvSpPr/>
-          <p:nvPr/>
-        </p:nvSpPr>
-        <p:spPr>
-          <a:xfrm>
-            <a:off x="5581498" y="4169664"/>
-            <a:ext cx="676656" cy="384048"/>
-          </a:xfrm>
-          <a:prstGeom prst="rect">
-            <a:avLst/>
-          </a:prstGeom>
-          <a:noFill/>
-          <a:ln/>
-        </p:spPr>
-        <p:txBody>
-          <a:bodyPr wrap="square" lIns="0" tIns="0" rIns="0" bIns="0" rtlCol="0" anchor="ctr"/>
-          <a:lstStyle/>
-          <a:p>
-            <a:pPr algn="ctr" indent="0" marL="0">
-              <a:buNone/>
-            </a:pPr>
-            <a:r>
-              <a:rPr lang="en-US" sz="900" b="1" dirty="0">
-                <a:solidFill>
-                  <a:srgbClr val="9D174D"/>
-                </a:solidFill>
-                <a:latin typeface="Trebuchet MS" pitchFamily="34" charset="0"/>
-                <a:ea typeface="Trebuchet MS" pitchFamily="34" charset="-122"/>
-                <a:cs typeface="Trebuchet MS" pitchFamily="34" charset="-120"/>
-              </a:rPr>
-              <a:t>a</a:t>
-            </a:r>
-            <a:endParaRPr lang="en-US" sz="900" dirty="0"/>
-          </a:p>
-        </p:txBody>
-      </p:sp>
-      <p:sp>
-        <p:nvSpPr>
-          <p:cNvPr id="57" name="Shape 55"/>
-          <p:cNvSpPr/>
-          <p:nvPr/>
-        </p:nvSpPr>
-        <p:spPr>
-          <a:xfrm>
-            <a:off x="6307531" y="4169664"/>
-            <a:ext cx="676656" cy="384048"/>
-          </a:xfrm>
-          <a:prstGeom prst="rect">
-            <a:avLst>
-              <a:gd name="adj" fmla="val 9524"/>
-            </a:avLst>
-          </a:prstGeom>
-          <a:solidFill>
-            <a:srgbClr val="FFFFFF"/>
-          </a:solidFill>
-          <a:ln w="12700">
-            <a:solidFill>
-              <a:srgbClr val="DB2777"/>
-            </a:solidFill>
-            <a:prstDash val="solid"/>
-          </a:ln>
-        </p:spPr>
-      </p:sp>
-      <p:sp>
-        <p:nvSpPr>
-          <p:cNvPr id="58" name="Text 56"/>
-          <p:cNvSpPr/>
-          <p:nvPr/>
-        </p:nvSpPr>
-        <p:spPr>
-          <a:xfrm>
-            <a:off x="6307531" y="4169664"/>
-            <a:ext cx="676656" cy="384048"/>
-          </a:xfrm>
-          <a:prstGeom prst="rect">
-            <a:avLst/>
-          </a:prstGeom>
-          <a:noFill/>
-          <a:ln/>
-        </p:spPr>
-        <p:txBody>
-          <a:bodyPr wrap="square" lIns="0" tIns="0" rIns="0" bIns="0" rtlCol="0" anchor="ctr"/>
-          <a:lstStyle/>
-          <a:p>
-            <a:pPr algn="ctr" indent="0" marL="0">
-              <a:buNone/>
-            </a:pPr>
-            <a:r>
-              <a:rPr lang="en-US" sz="900" b="1" dirty="0">
-                <a:solidFill>
-                  <a:srgbClr val="9D174D"/>
-                </a:solidFill>
-                <a:latin typeface="Trebuchet MS" pitchFamily="34" charset="0"/>
-                <a:ea typeface="Trebuchet MS" pitchFamily="34" charset="-122"/>
-                <a:cs typeface="Trebuchet MS" pitchFamily="34" charset="-120"/>
-              </a:rPr>
-              <a:t>l</a:t>
-            </a:r>
-            <a:endParaRPr lang="en-US" sz="900" dirty="0"/>
-          </a:p>
-        </p:txBody>
-      </p:sp>
-      <p:sp>
-        <p:nvSpPr>
-          <p:cNvPr id="59" name="Shape 57"/>
-          <p:cNvSpPr/>
-          <p:nvPr/>
-        </p:nvSpPr>
-        <p:spPr>
-          <a:xfrm>
-            <a:off x="7033565" y="4169664"/>
-            <a:ext cx="676656" cy="384048"/>
-          </a:xfrm>
-          <a:prstGeom prst="rect">
-            <a:avLst>
-              <a:gd name="adj" fmla="val 9524"/>
-            </a:avLst>
-          </a:prstGeom>
-          <a:solidFill>
-            <a:srgbClr val="FFFFFF"/>
-          </a:solidFill>
-          <a:ln w="12700">
-            <a:solidFill>
-              <a:srgbClr val="DB2777"/>
-            </a:solidFill>
-            <a:prstDash val="solid"/>
-          </a:ln>
-        </p:spPr>
-      </p:sp>
-      <p:sp>
-        <p:nvSpPr>
-          <p:cNvPr id="60" name="Text 58"/>
-          <p:cNvSpPr/>
-          <p:nvPr/>
-        </p:nvSpPr>
-        <p:spPr>
-          <a:xfrm>
-            <a:off x="7033565" y="4169664"/>
-            <a:ext cx="676656" cy="384048"/>
-          </a:xfrm>
-          <a:prstGeom prst="rect">
-            <a:avLst/>
-          </a:prstGeom>
-          <a:noFill/>
-          <a:ln/>
-        </p:spPr>
-        <p:txBody>
-          <a:bodyPr wrap="square" lIns="0" tIns="0" rIns="0" bIns="0" rtlCol="0" anchor="ctr"/>
-          <a:lstStyle/>
-          <a:p>
-            <a:pPr algn="ctr" indent="0" marL="0">
-              <a:buNone/>
-            </a:pPr>
-            <a:r>
-              <a:rPr lang="en-US" sz="900" b="1" dirty="0">
-                <a:solidFill>
-                  <a:srgbClr val="9D174D"/>
-                </a:solidFill>
-                <a:latin typeface="Trebuchet MS" pitchFamily="34" charset="0"/>
-                <a:ea typeface="Trebuchet MS" pitchFamily="34" charset="-122"/>
-                <a:cs typeface="Trebuchet MS" pitchFamily="34" charset="-120"/>
-              </a:rPr>
-              <a:t>i</a:t>
-            </a:r>
-            <a:endParaRPr lang="en-US" sz="900" dirty="0"/>
-          </a:p>
-        </p:txBody>
-      </p:sp>
-      <p:sp>
-        <p:nvSpPr>
-          <p:cNvPr id="61" name="Shape 59"/>
-          <p:cNvSpPr/>
-          <p:nvPr/>
-        </p:nvSpPr>
-        <p:spPr>
-          <a:xfrm>
-            <a:off x="7759598" y="4169664"/>
-            <a:ext cx="676656" cy="384048"/>
-          </a:xfrm>
-          <a:prstGeom prst="rect">
-            <a:avLst>
-              <a:gd name="adj" fmla="val 9524"/>
-            </a:avLst>
-          </a:prstGeom>
-          <a:solidFill>
-            <a:srgbClr val="FFFFFF"/>
-          </a:solidFill>
-          <a:ln w="12700">
-            <a:solidFill>
-              <a:srgbClr val="DB2777"/>
-            </a:solidFill>
-            <a:prstDash val="solid"/>
-          </a:ln>
-        </p:spPr>
-      </p:sp>
-      <p:sp>
-        <p:nvSpPr>
-          <p:cNvPr id="62" name="Text 60"/>
-          <p:cNvSpPr/>
-          <p:nvPr/>
-        </p:nvSpPr>
-        <p:spPr>
-          <a:xfrm>
-            <a:off x="7759598" y="4169664"/>
-            <a:ext cx="676656" cy="384048"/>
-          </a:xfrm>
-          <a:prstGeom prst="rect">
-            <a:avLst/>
-          </a:prstGeom>
-          <a:noFill/>
-          <a:ln/>
-        </p:spPr>
-        <p:txBody>
-          <a:bodyPr wrap="square" lIns="0" tIns="0" rIns="0" bIns="0" rtlCol="0" anchor="ctr"/>
-          <a:lstStyle/>
-          <a:p>
-            <a:pPr algn="ctr" indent="0" marL="0">
-              <a:buNone/>
-            </a:pPr>
-            <a:r>
-              <a:rPr lang="en-US" sz="900" b="1" dirty="0">
-                <a:solidFill>
-                  <a:srgbClr val="9D174D"/>
-                </a:solidFill>
-                <a:latin typeface="Trebuchet MS" pitchFamily="34" charset="0"/>
-                <a:ea typeface="Trebuchet MS" pitchFamily="34" charset="-122"/>
-                <a:cs typeface="Trebuchet MS" pitchFamily="34" charset="-120"/>
-              </a:rPr>
-              <a:t>se</a:t>
-            </a:r>
-            <a:endParaRPr lang="en-US" sz="900" dirty="0"/>
-          </a:p>
-        </p:txBody>
-      </p:sp>
-      <p:sp>
-        <p:nvSpPr>
-          <p:cNvPr id="63" name="Text 61"/>
-          <p:cNvSpPr/>
-          <p:nvPr/>
-        </p:nvSpPr>
-        <p:spPr>
-          <a:xfrm>
-            <a:off x="7759598" y="4572000"/>
-            <a:ext cx="676656" cy="219456"/>
-          </a:xfrm>
-          <a:prstGeom prst="rect">
-            <a:avLst/>
-          </a:prstGeom>
-          <a:noFill/>
-          <a:ln/>
-        </p:spPr>
-        <p:txBody>
-          <a:bodyPr wrap="square" lIns="0" tIns="0" rIns="0" bIns="0" rtlCol="0" anchor="t"/>
-          <a:lstStyle/>
-          <a:p>
-            <a:pPr algn="ctr" indent="0" marL="0">
-              <a:buNone/>
-            </a:pPr>
-            <a:r>
-              <a:rPr lang="en-US" sz="750" i="1" dirty="0">
-                <a:solidFill>
-                  <a:srgbClr val="94A3B8"/>
-                </a:solidFill>
-                <a:latin typeface="Calibri" pitchFamily="34" charset="0"/>
-                <a:ea typeface="Calibri" pitchFamily="34" charset="-122"/>
-                <a:cs typeface="Calibri" pitchFamily="34" charset="-120"/>
-              </a:rPr>
-              <a:t>/z/</a:t>
-            </a:r>
-            <a:endParaRPr lang="en-US" sz="750" dirty="0"/>
           </a:p>
         </p:txBody>
       </p:sp>
@@ -35817,7 +36465,7 @@
                 <a:ea typeface="Trebuchet MS" pitchFamily="34" charset="-122"/>
                 <a:cs typeface="Trebuchet MS" pitchFamily="34" charset="-120"/>
               </a:rPr>
-              <a:t>in-</a:t>
+              <a:t>re-</a:t>
             </a:r>
             <a:endParaRPr lang="en-US" sz="1300" dirty="0"/>
           </a:p>
@@ -36009,7 +36657,7 @@
                 <a:ea typeface="Trebuchet MS" pitchFamily="34" charset="-122"/>
                 <a:cs typeface="Trebuchet MS" pitchFamily="34" charset="-120"/>
               </a:rPr>
-              <a:t>re-</a:t>
+              <a:t>in-</a:t>
             </a:r>
             <a:endParaRPr lang="en-US" sz="1300" dirty="0"/>
           </a:p>
@@ -36098,7 +36746,7 @@
                 <a:ea typeface="Trebuchet MS" pitchFamily="34" charset="-122"/>
                 <a:cs typeface="Trebuchet MS" pitchFamily="34" charset="-120"/>
               </a:rPr>
-              <a:t>-amin</a:t>
+              <a:t>-ity</a:t>
             </a:r>
             <a:endParaRPr lang="en-US" sz="1300" dirty="0"/>
           </a:p>
@@ -36251,7 +36899,7 @@
                 <a:ea typeface="Trebuchet MS" pitchFamily="34" charset="-122"/>
                 <a:cs typeface="Trebuchet MS" pitchFamily="34" charset="-120"/>
               </a:rPr>
-              <a:t>-ality</a:t>
+              <a:t>-amin</a:t>
             </a:r>
             <a:endParaRPr lang="en-US" sz="1300" dirty="0"/>
           </a:p>
@@ -36315,7 +36963,7 @@
                 <a:ea typeface="Trebuchet MS" pitchFamily="34" charset="-122"/>
                 <a:cs typeface="Trebuchet MS" pitchFamily="34" charset="-120"/>
               </a:rPr>
-              <a:t>pro-</a:t>
+              <a:t>de-</a:t>
             </a:r>
             <a:endParaRPr lang="en-US" sz="1300" dirty="0"/>
           </a:p>
@@ -36404,7 +37052,7 @@
                 <a:ea typeface="Trebuchet MS" pitchFamily="34" charset="-122"/>
                 <a:cs typeface="Trebuchet MS" pitchFamily="34" charset="-120"/>
               </a:rPr>
-              <a:t>-ise</a:t>
+              <a:t>-ate</a:t>
             </a:r>
             <a:endParaRPr lang="en-US" sz="1300" dirty="0"/>
           </a:p>
@@ -36468,7 +37116,7 @@
                 <a:ea typeface="Trebuchet MS" pitchFamily="34" charset="-122"/>
                 <a:cs typeface="Trebuchet MS" pitchFamily="34" charset="-120"/>
               </a:rPr>
-              <a:t>de-</a:t>
+              <a:t>pro-</a:t>
             </a:r>
             <a:endParaRPr lang="en-US" sz="1300" dirty="0"/>
           </a:p>
@@ -36557,7 +37205,7 @@
                 <a:ea typeface="Trebuchet MS" pitchFamily="34" charset="-122"/>
                 <a:cs typeface="Trebuchet MS" pitchFamily="34" charset="-120"/>
               </a:rPr>
-              <a:t>-ation</a:t>
+              <a:t>-ous</a:t>
             </a:r>
             <a:endParaRPr lang="en-US" sz="1300" dirty="0"/>
           </a:p>
@@ -36926,7 +37574,7 @@
                 <a:ea typeface="Trebuchet MS" pitchFamily="34" charset="-122"/>
                 <a:cs typeface="Trebuchet MS" pitchFamily="34" charset="-120"/>
               </a:rPr>
-              <a:t>invitiation</a:t>
+              <a:t>vitals</a:t>
             </a:r>
             <a:endParaRPr lang="en-US" sz="1200" dirty="0"/>
           </a:p>
@@ -36992,7 +37640,7 @@
                 <a:ea typeface="Trebuchet MS" pitchFamily="34" charset="-122"/>
                 <a:cs typeface="Trebuchet MS" pitchFamily="34" charset="-120"/>
               </a:rPr>
-              <a:t>survive</a:t>
+              <a:t>invitingly</a:t>
             </a:r>
             <a:endParaRPr lang="en-US" sz="1200" dirty="0"/>
           </a:p>
@@ -37058,7 +37706,7 @@
                 <a:ea typeface="Trebuchet MS" pitchFamily="34" charset="-122"/>
                 <a:cs typeface="Trebuchet MS" pitchFamily="34" charset="-120"/>
               </a:rPr>
-              <a:t>revival</a:t>
+              <a:t>survive</a:t>
             </a:r>
             <a:endParaRPr lang="en-US" sz="1200" dirty="0"/>
           </a:p>
@@ -37124,7 +37772,7 @@
                 <a:ea typeface="Trebuchet MS" pitchFamily="34" charset="-122"/>
                 <a:cs typeface="Trebuchet MS" pitchFamily="34" charset="-120"/>
               </a:rPr>
-              <a:t>vital</a:t>
+              <a:t>devitalise</a:t>
             </a:r>
             <a:endParaRPr lang="en-US" sz="1200" dirty="0"/>
           </a:p>
@@ -38312,7 +38960,7 @@
                 <a:ea typeface="Calibri" pitchFamily="34" charset="-122"/>
                 <a:cs typeface="Calibri" pitchFamily="34" charset="-120"/>
               </a:rPr>
-              <a:t>1.  The root 'vit' comes from the Latin word 'vita' meaning life.</a:t>
+              <a:t>1.  The word 'vitamin' has nothing to do with the root 'vit'.</a:t>
             </a:r>
             <a:endParaRPr lang="en-US" sz="1300" dirty="0"/>
           </a:p>
@@ -38335,11 +38983,11 @@
             </a:avLst>
           </a:prstGeom>
           <a:solidFill>
-            <a:srgbClr val="DCFCE7"/>
-          </a:solidFill>
-          <a:ln w="12700">
-            <a:solidFill>
-              <a:srgbClr val="16A34A"/>
+            <a:srgbClr val="FEE2E2"/>
+          </a:solidFill>
+          <a:ln w="12700">
+            <a:solidFill>
+              <a:srgbClr val="DC2626"/>
             </a:solidFill>
             <a:prstDash val="solid"/>
           </a:ln>
@@ -38372,13 +39020,13 @@
             <a:r>
               <a:rPr lang="en-US" sz="1100" b="1" dirty="0">
                 <a:solidFill>
-                  <a:srgbClr val="16A34A"/>
+                  <a:srgbClr val="DC2626"/>
                 </a:solidFill>
                 <a:latin typeface="Trebuchet MS" pitchFamily="34" charset="0"/>
                 <a:ea typeface="Trebuchet MS" pitchFamily="34" charset="-122"/>
                 <a:cs typeface="Trebuchet MS" pitchFamily="34" charset="-120"/>
               </a:rPr>
-              <a:t>TRUE</a:t>
+              <a:t>FALSE</a:t>
             </a:r>
             <a:endParaRPr lang="en-US" sz="1100" dirty="0"/>
           </a:p>
@@ -38451,7 +39099,7 @@
                 <a:ea typeface="Calibri" pitchFamily="34" charset="-122"/>
                 <a:cs typeface="Calibri" pitchFamily="34" charset="-120"/>
               </a:rPr>
-              <a:t>2.  The word 'vitamin' has nothing to do with the root 'vit'.</a:t>
+              <a:t>2.  The root 'vit' comes from a Latin word meaning life.</a:t>
             </a:r>
             <a:endParaRPr lang="en-US" sz="1300" dirty="0"/>
           </a:p>
@@ -38474,11 +39122,11 @@
             </a:avLst>
           </a:prstGeom>
           <a:solidFill>
-            <a:srgbClr val="FEE2E2"/>
-          </a:solidFill>
-          <a:ln w="12700">
-            <a:solidFill>
-              <a:srgbClr val="DC2626"/>
+            <a:srgbClr val="DCFCE7"/>
+          </a:solidFill>
+          <a:ln w="12700">
+            <a:solidFill>
+              <a:srgbClr val="16A34A"/>
             </a:solidFill>
             <a:prstDash val="solid"/>
           </a:ln>
@@ -38511,13 +39159,13 @@
             <a:r>
               <a:rPr lang="en-US" sz="1100" b="1" dirty="0">
                 <a:solidFill>
-                  <a:srgbClr val="DC2626"/>
+                  <a:srgbClr val="16A34A"/>
                 </a:solidFill>
                 <a:latin typeface="Trebuchet MS" pitchFamily="34" charset="0"/>
                 <a:ea typeface="Trebuchet MS" pitchFamily="34" charset="-122"/>
                 <a:cs typeface="Trebuchet MS" pitchFamily="34" charset="-120"/>
               </a:rPr>
-              <a:t>FALSE</a:t>
+              <a:t>TRUE</a:t>
             </a:r>
             <a:endParaRPr lang="en-US" sz="1100" dirty="0"/>
           </a:p>
@@ -38590,7 +39238,7 @@
                 <a:ea typeface="Calibri" pitchFamily="34" charset="-122"/>
                 <a:cs typeface="Calibri" pitchFamily="34" charset="-120"/>
               </a:rPr>
-              <a:t>3.  The word 'vitality' means having great energy and being full of life.</a:t>
+              <a:t>3.  The prefix 're' in 'revitalise' means to stop or remove life.</a:t>
             </a:r>
             <a:endParaRPr lang="en-US" sz="1300" dirty="0"/>
           </a:p>
@@ -38613,11 +39261,11 @@
             </a:avLst>
           </a:prstGeom>
           <a:solidFill>
-            <a:srgbClr val="DCFCE7"/>
-          </a:solidFill>
-          <a:ln w="12700">
-            <a:solidFill>
-              <a:srgbClr val="16A34A"/>
+            <a:srgbClr val="FEE2E2"/>
+          </a:solidFill>
+          <a:ln w="12700">
+            <a:solidFill>
+              <a:srgbClr val="DC2626"/>
             </a:solidFill>
             <a:prstDash val="solid"/>
           </a:ln>
@@ -38650,13 +39298,13 @@
             <a:r>
               <a:rPr lang="en-US" sz="1100" b="1" dirty="0">
                 <a:solidFill>
-                  <a:srgbClr val="16A34A"/>
+                  <a:srgbClr val="DC2626"/>
                 </a:solidFill>
                 <a:latin typeface="Trebuchet MS" pitchFamily="34" charset="0"/>
                 <a:ea typeface="Trebuchet MS" pitchFamily="34" charset="-122"/>
                 <a:cs typeface="Trebuchet MS" pitchFamily="34" charset="-120"/>
               </a:rPr>
-              <a:t>TRUE</a:t>
+              <a:t>FALSE</a:t>
             </a:r>
             <a:endParaRPr lang="en-US" sz="1100" dirty="0"/>
           </a:p>
@@ -38729,7 +39377,7 @@
                 <a:ea typeface="Calibri" pitchFamily="34" charset="-122"/>
                 <a:cs typeface="Calibri" pitchFamily="34" charset="-120"/>
               </a:rPr>
-              <a:t>4.  The prefix 'sur-' in 'survive' means beyond or above, helping give the meaning of living beyond danger.</a:t>
+              <a:t>4.  A 'vital' sign in a hospital tells doctors important information about keeping a patient alive.</a:t>
             </a:r>
             <a:endParaRPr lang="en-US" sz="1300" dirty="0"/>
           </a:p>
@@ -38868,7 +39516,7 @@
                 <a:ea typeface="Calibri" pitchFamily="34" charset="-122"/>
                 <a:cs typeface="Calibri" pitchFamily="34" charset="-120"/>
               </a:rPr>
-              <a:t>5.  The root 'vit' comes from a Greek word meaning strength.</a:t>
+              <a:t>5.  The root 'vit' can be found in the word 'vitality', which means full of life and energy.</a:t>
             </a:r>
             <a:endParaRPr lang="en-US" sz="1300" dirty="0"/>
           </a:p>
@@ -38891,11 +39539,11 @@
             </a:avLst>
           </a:prstGeom>
           <a:solidFill>
-            <a:srgbClr val="FEE2E2"/>
-          </a:solidFill>
-          <a:ln w="12700">
-            <a:solidFill>
-              <a:srgbClr val="DC2626"/>
+            <a:srgbClr val="DCFCE7"/>
+          </a:solidFill>
+          <a:ln w="12700">
+            <a:solidFill>
+              <a:srgbClr val="16A34A"/>
             </a:solidFill>
             <a:prstDash val="solid"/>
           </a:ln>
@@ -38928,13 +39576,13 @@
             <a:r>
               <a:rPr lang="en-US" sz="1100" b="1" dirty="0">
                 <a:solidFill>
-                  <a:srgbClr val="DC2626"/>
+                  <a:srgbClr val="16A34A"/>
                 </a:solidFill>
                 <a:latin typeface="Trebuchet MS" pitchFamily="34" charset="0"/>
                 <a:ea typeface="Trebuchet MS" pitchFamily="34" charset="-122"/>
                 <a:cs typeface="Trebuchet MS" pitchFamily="34" charset="-120"/>
               </a:rPr>
-              <a:t>FALSE</a:t>
+              <a:t>TRUE</a:t>
             </a:r>
             <a:endParaRPr lang="en-US" sz="1100" dirty="0"/>
           </a:p>
@@ -39771,7 +40419,7 @@
                 <a:ea typeface="Trebuchet MS" pitchFamily="34" charset="-122"/>
                 <a:cs typeface="Trebuchet MS" pitchFamily="34" charset="-120"/>
               </a:rPr>
-              <a:t>invitiation</a:t>
+              <a:t>vitals</a:t>
             </a:r>
             <a:endParaRPr lang="en-US" sz="1300" dirty="0"/>
           </a:p>
@@ -39837,7 +40485,7 @@
                 <a:ea typeface="Trebuchet MS" pitchFamily="34" charset="-122"/>
                 <a:cs typeface="Trebuchet MS" pitchFamily="34" charset="-120"/>
               </a:rPr>
-              <a:t>survive</a:t>
+              <a:t>invitingly</a:t>
             </a:r>
             <a:endParaRPr lang="en-US" sz="1300" dirty="0"/>
           </a:p>
@@ -39903,7 +40551,7 @@
                 <a:ea typeface="Trebuchet MS" pitchFamily="34" charset="-122"/>
                 <a:cs typeface="Trebuchet MS" pitchFamily="34" charset="-120"/>
               </a:rPr>
-              <a:t>revival</a:t>
+              <a:t>survive</a:t>
             </a:r>
             <a:endParaRPr lang="en-US" sz="1300" dirty="0"/>
           </a:p>
@@ -40496,7 +41144,7 @@
                 <a:ea typeface="Trebuchet MS" pitchFamily="34" charset="-122"/>
                 <a:cs typeface="Trebuchet MS" pitchFamily="34" charset="-120"/>
               </a:rPr>
-              <a:t>in-</a:t>
+              <a:t>re-</a:t>
             </a:r>
             <a:endParaRPr lang="en-US" sz="1300" dirty="0"/>
           </a:p>
@@ -40688,7 +41336,7 @@
                 <a:ea typeface="Trebuchet MS" pitchFamily="34" charset="-122"/>
                 <a:cs typeface="Trebuchet MS" pitchFamily="34" charset="-120"/>
               </a:rPr>
-              <a:t>re-</a:t>
+              <a:t>in-</a:t>
             </a:r>
             <a:endParaRPr lang="en-US" sz="1300" dirty="0"/>
           </a:p>
@@ -40777,7 +41425,7 @@
                 <a:ea typeface="Trebuchet MS" pitchFamily="34" charset="-122"/>
                 <a:cs typeface="Trebuchet MS" pitchFamily="34" charset="-120"/>
               </a:rPr>
-              <a:t>-amin</a:t>
+              <a:t>-ity</a:t>
             </a:r>
             <a:endParaRPr lang="en-US" sz="1300" dirty="0"/>
           </a:p>
@@ -40930,7 +41578,7 @@
                 <a:ea typeface="Trebuchet MS" pitchFamily="34" charset="-122"/>
                 <a:cs typeface="Trebuchet MS" pitchFamily="34" charset="-120"/>
               </a:rPr>
-              <a:t>-ality</a:t>
+              <a:t>-amin</a:t>
             </a:r>
             <a:endParaRPr lang="en-US" sz="1300" dirty="0"/>
           </a:p>
@@ -40994,7 +41642,7 @@
                 <a:ea typeface="Trebuchet MS" pitchFamily="34" charset="-122"/>
                 <a:cs typeface="Trebuchet MS" pitchFamily="34" charset="-120"/>
               </a:rPr>
-              <a:t>pro-</a:t>
+              <a:t>de-</a:t>
             </a:r>
             <a:endParaRPr lang="en-US" sz="1300" dirty="0"/>
           </a:p>
@@ -41083,7 +41731,7 @@
                 <a:ea typeface="Trebuchet MS" pitchFamily="34" charset="-122"/>
                 <a:cs typeface="Trebuchet MS" pitchFamily="34" charset="-120"/>
               </a:rPr>
-              <a:t>-ise</a:t>
+              <a:t>-ate</a:t>
             </a:r>
             <a:endParaRPr lang="en-US" sz="1300" dirty="0"/>
           </a:p>
@@ -41147,7 +41795,7 @@
                 <a:ea typeface="Trebuchet MS" pitchFamily="34" charset="-122"/>
                 <a:cs typeface="Trebuchet MS" pitchFamily="34" charset="-120"/>
               </a:rPr>
-              <a:t>de-</a:t>
+              <a:t>pro-</a:t>
             </a:r>
             <a:endParaRPr lang="en-US" sz="1300" dirty="0"/>
           </a:p>
@@ -41236,7 +41884,7 @@
                 <a:ea typeface="Trebuchet MS" pitchFamily="34" charset="-122"/>
                 <a:cs typeface="Trebuchet MS" pitchFamily="34" charset="-120"/>
               </a:rPr>
-              <a:t>-ation</a:t>
+              <a:t>-ous</a:t>
             </a:r>
             <a:endParaRPr lang="en-US" sz="1300" dirty="0"/>
           </a:p>
@@ -41348,7 +41996,7 @@
                 <a:ea typeface="Trebuchet MS" pitchFamily="34" charset="-122"/>
                 <a:cs typeface="Trebuchet MS" pitchFamily="34" charset="-120"/>
               </a:rPr>
-              <a:t>in-</a:t>
+              <a:t>re-</a:t>
             </a:r>
             <a:endParaRPr lang="en-US" sz="1300" dirty="0"/>
           </a:p>
@@ -42147,7 +42795,7 @@
                 <a:ea typeface="Calibri" pitchFamily="34" charset="-122"/>
                 <a:cs typeface="Calibri" pitchFamily="34" charset="-120"/>
               </a:rPr>
-              <a:t>Having lots of energy and enthusiasm, being full of life.</a:t>
+              <a:t>The energy and strength that makes a person feel alive and well.</a:t>
             </a:r>
             <a:endParaRPr lang="en-US" sz="1200" dirty="0"/>
           </a:p>
@@ -42286,7 +42934,7 @@
                 <a:ea typeface="Calibri" pitchFamily="34" charset="-122"/>
                 <a:cs typeface="Calibri" pitchFamily="34" charset="-120"/>
               </a:rPr>
-              <a:t>A written or spoken request asking someone to come to an event or place.</a:t>
+              <a:t>The most important parts of the body needed to keep a person alive, like the heart and lungs.</a:t>
             </a:r>
             <a:endParaRPr lang="en-US" sz="1200" dirty="0"/>
           </a:p>
@@ -42425,7 +43073,7 @@
                 <a:ea typeface="Calibri" pitchFamily="34" charset="-122"/>
                 <a:cs typeface="Calibri" pitchFamily="34" charset="-120"/>
               </a:rPr>
-              <a:t>Something that is extremely important or necessary for life.</a:t>
+              <a:t>Extremely important or necessary for life to continue.</a:t>
             </a:r>
             <a:endParaRPr lang="en-US" sz="1200" dirty="0"/>
           </a:p>
@@ -42564,7 +43212,7 @@
                 <a:ea typeface="Calibri" pitchFamily="34" charset="-122"/>
                 <a:cs typeface="Calibri" pitchFamily="34" charset="-120"/>
               </a:rPr>
-              <a:t>When something comes back to life or becomes popular and active again.</a:t>
+              <a:t>To stay alive through a dangerous or difficult situation.</a:t>
             </a:r>
             <a:endParaRPr lang="en-US" sz="1200" dirty="0"/>
           </a:p>
@@ -42637,7 +43285,7 @@
                 <a:ea typeface="Trebuchet MS" pitchFamily="34" charset="-122"/>
                 <a:cs typeface="Trebuchet MS" pitchFamily="34" charset="-120"/>
               </a:rPr>
-              <a:t>invitiation</a:t>
+              <a:t>vitals</a:t>
             </a:r>
             <a:endParaRPr lang="en-US" sz="1200" dirty="0"/>
           </a:p>
@@ -42703,7 +43351,7 @@
                 <a:ea typeface="Calibri" pitchFamily="34" charset="-122"/>
                 <a:cs typeface="Calibri" pitchFamily="34" charset="-120"/>
               </a:rPr>
-              <a:t>To stay alive through something dangerous or difficult.</a:t>
+              <a:t>In a way that makes something seem very appealing and welcoming.</a:t>
             </a:r>
             <a:endParaRPr lang="en-US" sz="1200" dirty="0"/>
           </a:p>
@@ -42776,7 +43424,7 @@
                 <a:ea typeface="Trebuchet MS" pitchFamily="34" charset="-122"/>
                 <a:cs typeface="Trebuchet MS" pitchFamily="34" charset="-120"/>
               </a:rPr>
-              <a:t>survive</a:t>
+              <a:t>invitingly</a:t>
             </a:r>
             <a:endParaRPr lang="en-US" sz="1200" dirty="0"/>
           </a:p>
@@ -42842,7 +43490,7 @@
                 <a:ea typeface="Calibri" pitchFamily="34" charset="-122"/>
                 <a:cs typeface="Calibri" pitchFamily="34" charset="-120"/>
               </a:rPr>
-              <a:t>To give something new energy or life again, to make it fresh and strong.</a:t>
+              <a:t>To give something new energy or life again after it has become tired or worn out.</a:t>
             </a:r>
             <a:endParaRPr lang="en-US" sz="1200" dirty="0"/>
           </a:p>
@@ -42915,7 +43563,7 @@
                 <a:ea typeface="Trebuchet MS" pitchFamily="34" charset="-122"/>
                 <a:cs typeface="Trebuchet MS" pitchFamily="34" charset="-120"/>
               </a:rPr>
-              <a:t>revival</a:t>
+              <a:t>survive</a:t>
             </a:r>
             <a:endParaRPr lang="en-US" sz="1200" dirty="0"/>
           </a:p>
@@ -42981,7 +43629,7 @@
                 <a:ea typeface="Calibri" pitchFamily="34" charset="-122"/>
                 <a:cs typeface="Calibri" pitchFamily="34" charset="-120"/>
               </a:rPr>
-              <a:t>A nutrient found in food that your body needs to stay healthy and alive.</a:t>
+              <a:t>A substance found in food that your body needs to stay healthy and alive.</a:t>
             </a:r>
             <a:endParaRPr lang="en-US" sz="1200" dirty="0"/>
           </a:p>
@@ -43476,7 +44124,7 @@
                 <a:ea typeface="Calibri" pitchFamily="34" charset="-122"/>
                 <a:cs typeface="Calibri" pitchFamily="34" charset="-120"/>
               </a:rPr>
-              <a:t>Water is vital for all living things on Earth — without it, nothing can survive.</a:t>
+              <a:t>It is vital that you drink enough water every day to keep your body healthy.</a:t>
             </a:r>
             <a:endParaRPr lang="en-US" sz="1500" dirty="0"/>
           </a:p>
@@ -43640,7 +44288,7 @@
                 <a:ea typeface="Calibri" pitchFamily="34" charset="-122"/>
                 <a:cs typeface="Calibri" pitchFamily="34" charset="-120"/>
               </a:rPr>
-              <a:t>The doctor told us that eating foods rich in vitamin C helps our bodies stay healthy.</a:t>
+              <a:t>The doctor checked the patient's vitals to make sure their heart and lungs were working well.</a:t>
             </a:r>
             <a:endParaRPr lang="en-US" sz="1500" dirty="0"/>
           </a:p>
@@ -43804,7 +44452,7 @@
                 <a:ea typeface="Calibri" pitchFamily="34" charset="-122"/>
                 <a:cs typeface="Calibri" pitchFamily="34" charset="-120"/>
               </a:rPr>
-              <a:t>After months of being closed, the old library was revitalised with new books, bright colours, and a reading garden.</a:t>
+              <a:t>Eating fruit and vegetables gives your body the vitamins it needs to stay strong and full of vitality.</a:t>
             </a:r>
             <a:endParaRPr lang="en-US" sz="1500" dirty="0"/>
           </a:p>
